--- a/meeting-slides/meeting_slides.pptx
+++ b/meeting-slides/meeting_slides.pptx
@@ -9802,7 +9802,7 @@
               </a:defRPr>
             </a:pPr>
             <a:r>
-              <a:t>2-1〜2-2</a:t>
+              <a:t>2-1〜2-3</a:t>
             </a:r>
           </a:p>
         </p:txBody>
@@ -10112,7 +10112,7 @@
               </a:defRPr>
             </a:pPr>
             <a:r>
-              <a:t>4-1〜4-4</a:t>
+              <a:t>4-1〜4-6</a:t>
             </a:r>
           </a:p>
         </p:txBody>
@@ -10267,7 +10267,7 @@
               </a:defRPr>
             </a:pPr>
             <a:r>
-              <a:t>5-1〜5-8</a:t>
+              <a:t>5-1〜5-5</a:t>
             </a:r>
           </a:p>
         </p:txBody>
@@ -11787,6 +11787,31 @@
               <a:t>全身麻酔の機序研究 — 京都工業繊維大学（医学部なし）の論文が確信に最も近い</a:t>
             </a:r>
           </a:p>
+          <a:p>
+            <a:pPr>
+              <a:spcBef>
+                <a:spcPts val="400"/>
+              </a:spcBef>
+            </a:pPr>
+            <a:r>
+              <a:rPr sz="1500" b="1">
+                <a:solidFill>
+                  <a:srgbClr val="2C7A7B"/>
+                </a:solidFill>
+                <a:latin typeface="Yu Gothic"/>
+              </a:rPr>
+              <a:t>2-3  </a:t>
+            </a:r>
+            <a:r>
+              <a:rPr sz="1600">
+                <a:solidFill>
+                  <a:srgbClr val="1A202C"/>
+                </a:solidFill>
+                <a:latin typeface="Yu Gothic"/>
+              </a:rPr>
+              <a:t>生成AI前のプログラミングコンペ受賞歴 → コーディング能力の客観的証明</a:t>
+            </a:r>
+          </a:p>
         </p:txBody>
       </p:sp>
       <p:sp>
@@ -13150,6 +13175,56 @@
               <a:t>学術支援サービス — 導入実績あり</a:t>
             </a:r>
           </a:p>
+          <a:p>
+            <a:pPr>
+              <a:spcBef>
+                <a:spcPts val="400"/>
+              </a:spcBef>
+            </a:pPr>
+            <a:r>
+              <a:rPr sz="1500" b="1">
+                <a:solidFill>
+                  <a:srgbClr val="B7791F"/>
+                </a:solidFill>
+                <a:latin typeface="Yu Gothic"/>
+              </a:rPr>
+              <a:t>4-5  </a:t>
+            </a:r>
+            <a:r>
+              <a:rPr sz="1600">
+                <a:solidFill>
+                  <a:srgbClr val="1A202C"/>
+                </a:solidFill>
+                <a:latin typeface="Yu Gothic"/>
+              </a:rPr>
+              <a:t>大学発ベンチャー法人補助金の大学還流モデル構想</a:t>
+            </a:r>
+          </a:p>
+          <a:p>
+            <a:pPr>
+              <a:spcBef>
+                <a:spcPts val="400"/>
+              </a:spcBef>
+            </a:pPr>
+            <a:r>
+              <a:rPr sz="1500" b="1">
+                <a:solidFill>
+                  <a:srgbClr val="B7791F"/>
+                </a:solidFill>
+                <a:latin typeface="Yu Gothic"/>
+              </a:rPr>
+              <a:t>4-6  </a:t>
+            </a:r>
+            <a:r>
+              <a:rPr sz="1600">
+                <a:solidFill>
+                  <a:srgbClr val="1A202C"/>
+                </a:solidFill>
+                <a:latin typeface="Yu Gothic"/>
+              </a:rPr>
+              <a:t>産学連携 — シフト最適化・学術支援の展開</a:t>
+            </a:r>
+          </a:p>
         </p:txBody>
       </p:sp>
       <p:sp>
@@ -13549,7 +13624,7 @@
                 </a:solidFill>
                 <a:latin typeface="Yu Gothic"/>
               </a:rPr>
-              <a:t>論文管理ダッシュボードを自作 → センターのプロジェクト管理にも活用</a:t>
+              <a:t>論文を100本書いてもいいですか？</a:t>
             </a:r>
           </a:p>
           <a:p>
@@ -13574,7 +13649,7 @@
                 </a:solidFill>
                 <a:latin typeface="Yu Gothic"/>
               </a:rPr>
-              <a:t>論文を100本書いてもいいですか？</a:t>
+              <a:t>論文管理ダッシュボードを自作 → センターのプロジェクト管理にも活用</a:t>
             </a:r>
           </a:p>
           <a:p>
@@ -13599,82 +13674,7 @@
                 </a:solidFill>
                 <a:latin typeface="Yu Gothic"/>
               </a:rPr>
-              <a:t>生成AI前のプログラミングコンペ受賞歴 → コーディング能力の客観的証明</a:t>
-            </a:r>
-          </a:p>
-          <a:p>
-            <a:pPr>
-              <a:spcBef>
-                <a:spcPts val="400"/>
-              </a:spcBef>
-            </a:pPr>
-            <a:r>
-              <a:rPr sz="1500" b="1">
-                <a:solidFill>
-                  <a:srgbClr val="553C9A"/>
-                </a:solidFill>
-                <a:latin typeface="Yu Gothic"/>
-              </a:rPr>
-              <a:t>5-6  </a:t>
-            </a:r>
-            <a:r>
-              <a:rPr sz="1600">
-                <a:solidFill>
-                  <a:srgbClr val="1A202C"/>
-                </a:solidFill>
-                <a:latin typeface="Yu Gothic"/>
-              </a:rPr>
               <a:t>Devin × 伊藤忠 × 滋賀大学 — AI支援の大学導入提案</a:t>
-            </a:r>
-          </a:p>
-          <a:p>
-            <a:pPr>
-              <a:spcBef>
-                <a:spcPts val="400"/>
-              </a:spcBef>
-            </a:pPr>
-            <a:r>
-              <a:rPr sz="1500" b="1">
-                <a:solidFill>
-                  <a:srgbClr val="553C9A"/>
-                </a:solidFill>
-                <a:latin typeface="Yu Gothic"/>
-              </a:rPr>
-              <a:t>5-7  </a:t>
-            </a:r>
-            <a:r>
-              <a:rPr sz="1600">
-                <a:solidFill>
-                  <a:srgbClr val="1A202C"/>
-                </a:solidFill>
-                <a:latin typeface="Yu Gothic"/>
-              </a:rPr>
-              <a:t>大学発ベンチャー法人補助金の大学還流モデル構想</a:t>
-            </a:r>
-          </a:p>
-          <a:p>
-            <a:pPr>
-              <a:spcBef>
-                <a:spcPts val="400"/>
-              </a:spcBef>
-            </a:pPr>
-            <a:r>
-              <a:rPr sz="1500" b="1">
-                <a:solidFill>
-                  <a:srgbClr val="553C9A"/>
-                </a:solidFill>
-                <a:latin typeface="Yu Gothic"/>
-              </a:rPr>
-              <a:t>5-8  </a:t>
-            </a:r>
-            <a:r>
-              <a:rPr sz="1600">
-                <a:solidFill>
-                  <a:srgbClr val="1A202C"/>
-                </a:solidFill>
-                <a:latin typeface="Yu Gothic"/>
-              </a:rPr>
-              <a:t>産学連携 — シフト最適化・学術支援の展開</a:t>
             </a:r>
           </a:p>
         </p:txBody>

--- a/meeting-slides/meeting_slides.pptx
+++ b/meeting-slides/meeting_slides.pptx
@@ -3133,15 +3133,14 @@
           </a:bodyPr>
           <a:lstStyle/>
           <a:p>
-            <a:pPr algn="ctr">
-              <a:defRPr sz="5200" b="1">
+            <a:pPr algn="ctr"/>
+            <a:r>
+              <a:rPr sz="5200" b="1">
                 <a:solidFill>
                   <a:srgbClr val="FFFFFF"/>
                 </a:solidFill>
                 <a:latin typeface="Yu Gothic"/>
-              </a:defRPr>
-            </a:pPr>
-            <a:r>
+              </a:rPr>
               <a:t>入職後初面談</a:t>
             </a:r>
           </a:p>
@@ -3212,15 +3211,14 @@
           </a:bodyPr>
           <a:lstStyle/>
           <a:p>
-            <a:pPr algn="ctr">
-              <a:defRPr sz="2000" b="0">
+            <a:pPr algn="ctr"/>
+            <a:r>
+              <a:rPr sz="2000" b="0">
                 <a:solidFill>
                   <a:srgbClr val="CCCCCC"/>
                 </a:solidFill>
                 <a:latin typeface="Yu Gothic"/>
-              </a:defRPr>
-            </a:pPr>
-            <a:r>
+              </a:rPr>
               <a:t>キャリア・研究ビジョン・産学連携のご共有</a:t>
             </a:r>
           </a:p>
@@ -3248,15 +3246,14 @@
           </a:bodyPr>
           <a:lstStyle/>
           <a:p>
-            <a:pPr algn="ctr">
-              <a:defRPr sz="1500" b="0">
+            <a:pPr algn="ctr"/>
+            <a:r>
+              <a:rPr sz="1500" b="0">
                 <a:solidFill>
                   <a:srgbClr val="999999"/>
                 </a:solidFill>
                 <a:latin typeface="Yu Gothic"/>
-              </a:defRPr>
-            </a:pPr>
-            <a:r>
+              </a:rPr>
               <a:t>2026年5月15日</a:t>
             </a:r>
           </a:p>
@@ -3284,15 +3281,14 @@
           </a:bodyPr>
           <a:lstStyle/>
           <a:p>
-            <a:pPr algn="l">
-              <a:defRPr sz="1000" b="0">
+            <a:pPr algn="l"/>
+            <a:r>
+              <a:rPr sz="1000" b="0">
                 <a:solidFill>
                   <a:srgbClr val="4A5568"/>
                 </a:solidFill>
                 <a:latin typeface="Yu Gothic"/>
-              </a:defRPr>
-            </a:pPr>
-            <a:r>
+              </a:rPr>
               <a:t>1 / 16</a:t>
             </a:r>
           </a:p>
@@ -3346,15 +3342,14 @@
           </a:bodyPr>
           <a:lstStyle/>
           <a:p>
-            <a:pPr algn="l">
-              <a:defRPr sz="3200" b="1">
+            <a:pPr algn="l"/>
+            <a:r>
+              <a:rPr sz="3200" b="1">
                 <a:solidFill>
                   <a:srgbClr val="1A365D"/>
                 </a:solidFill>
                 <a:latin typeface="Yu Gothic"/>
-              </a:defRPr>
-            </a:pPr>
-            <a:r>
+              </a:rPr>
               <a:t>研究ビジョン — データの上流へ</a:t>
             </a:r>
           </a:p>
@@ -3441,10 +3436,39 @@
           </a:fontRef>
         </p:style>
         <p:txBody>
-          <a:bodyPr rtlCol="0" anchor="ctr"/>
-          <a:lstStyle/>
-          <a:p>
-            <a:pPr algn="ctr"/>
+          <a:bodyPr rtlCol="0" anchor="ctr" wrap="square" lIns="137160" rIns="137160" tIns="73152" bIns="73152"/>
+          <a:lstStyle/>
+          <a:p>
+            <a:pPr algn="ctr">
+              <a:spcBef>
+                <a:spcPts val="200"/>
+              </a:spcBef>
+            </a:pPr>
+            <a:r>
+              <a:rPr sz="1300" b="1">
+                <a:solidFill>
+                  <a:srgbClr val="1A365D"/>
+                </a:solidFill>
+                <a:latin typeface="Yu Gothic"/>
+              </a:rPr>
+              <a:t>医学</a:t>
+            </a:r>
+          </a:p>
+          <a:p>
+            <a:pPr algn="ctr">
+              <a:spcBef>
+                <a:spcPts val="200"/>
+              </a:spcBef>
+            </a:pPr>
+            <a:r>
+              <a:rPr sz="1000" b="0">
+                <a:solidFill>
+                  <a:srgbClr val="4A5568"/>
+                </a:solidFill>
+                <a:latin typeface="Yu Gothic"/>
+              </a:rPr>
+              <a:t>エビデンスを使う立場</a:t>
+            </a:r>
           </a:p>
         </p:txBody>
       </p:sp>
@@ -3456,8 +3480,8 @@
         </p:nvSpPr>
         <p:spPr>
           <a:xfrm>
-            <a:off x="777240" y="1554480"/>
-            <a:ext cx="2194560" cy="365760"/>
+            <a:off x="3017520" y="1463040"/>
+            <a:ext cx="457200" cy="914400"/>
           </a:xfrm>
           <a:prstGeom prst="rect">
             <a:avLst/>
@@ -3470,87 +3494,14 @@
           </a:bodyPr>
           <a:lstStyle/>
           <a:p>
-            <a:pPr algn="ctr">
-              <a:defRPr sz="1400" b="1">
-                <a:solidFill>
-                  <a:srgbClr val="1A365D"/>
-                </a:solidFill>
-                <a:latin typeface="Yu Gothic"/>
-              </a:defRPr>
-            </a:pPr>
-            <a:r>
-              <a:t>医学</a:t>
-            </a:r>
-          </a:p>
-        </p:txBody>
-      </p:sp>
-      <p:sp>
-        <p:nvSpPr>
-          <p:cNvPr id="6" name="TextBox 5"/>
-          <p:cNvSpPr txBox="1"/>
-          <p:nvPr/>
-        </p:nvSpPr>
-        <p:spPr>
-          <a:xfrm>
-            <a:off x="777240" y="1920240"/>
-            <a:ext cx="2194560" cy="320040"/>
-          </a:xfrm>
-          <a:prstGeom prst="rect">
-            <a:avLst/>
-          </a:prstGeom>
-          <a:noFill/>
-        </p:spPr>
-        <p:txBody>
-          <a:bodyPr wrap="square">
-            <a:spAutoFit/>
-          </a:bodyPr>
-          <a:lstStyle/>
-          <a:p>
-            <a:pPr algn="ctr">
-              <a:defRPr sz="1100" b="0">
-                <a:solidFill>
-                  <a:srgbClr val="4A5568"/>
-                </a:solidFill>
-                <a:latin typeface="Yu Gothic"/>
-              </a:defRPr>
-            </a:pPr>
-            <a:r>
-              <a:t>エビデンスを使う立場</a:t>
-            </a:r>
-          </a:p>
-        </p:txBody>
-      </p:sp>
-      <p:sp>
-        <p:nvSpPr>
-          <p:cNvPr id="7" name="TextBox 6"/>
-          <p:cNvSpPr txBox="1"/>
-          <p:nvPr/>
-        </p:nvSpPr>
-        <p:spPr>
-          <a:xfrm>
-            <a:off x="3017520" y="1463040"/>
-            <a:ext cx="457200" cy="914400"/>
-          </a:xfrm>
-          <a:prstGeom prst="rect">
-            <a:avLst/>
-          </a:prstGeom>
-          <a:noFill/>
-        </p:spPr>
-        <p:txBody>
-          <a:bodyPr wrap="square">
-            <a:spAutoFit/>
-          </a:bodyPr>
-          <a:lstStyle/>
-          <a:p>
-            <a:pPr algn="ctr">
-              <a:defRPr sz="2400" b="0">
+            <a:pPr algn="ctr"/>
+            <a:r>
+              <a:rPr sz="2400" b="0">
                 <a:solidFill>
                   <a:srgbClr val="2B6CB0"/>
                 </a:solidFill>
                 <a:latin typeface="Yu Gothic"/>
-              </a:defRPr>
-            </a:pPr>
-            <a:r>
+              </a:rPr>
               <a:t>→</a:t>
             </a:r>
           </a:p>
@@ -3558,7 +3509,7 @@
       </p:sp>
       <p:sp>
         <p:nvSpPr>
-          <p:cNvPr id="8" name="Rounded Rectangle 7"/>
+          <p:cNvPr id="6" name="Rounded Rectangle 5"/>
           <p:cNvSpPr/>
           <p:nvPr/>
         </p:nvSpPr>
@@ -3594,23 +3545,52 @@
           </a:fontRef>
         </p:style>
         <p:txBody>
-          <a:bodyPr rtlCol="0" anchor="ctr"/>
-          <a:lstStyle/>
-          <a:p>
-            <a:pPr algn="ctr"/>
-          </a:p>
-        </p:txBody>
-      </p:sp>
-      <p:sp>
-        <p:nvSpPr>
-          <p:cNvPr id="9" name="TextBox 8"/>
+          <a:bodyPr rtlCol="0" anchor="ctr" wrap="square" lIns="137160" rIns="137160" tIns="73152" bIns="73152"/>
+          <a:lstStyle/>
+          <a:p>
+            <a:pPr algn="ctr">
+              <a:spcBef>
+                <a:spcPts val="200"/>
+              </a:spcBef>
+            </a:pPr>
+            <a:r>
+              <a:rPr sz="1300" b="1">
+                <a:solidFill>
+                  <a:srgbClr val="1A365D"/>
+                </a:solidFill>
+                <a:latin typeface="Yu Gothic"/>
+              </a:rPr>
+              <a:t>公衆衛生</a:t>
+            </a:r>
+          </a:p>
+          <a:p>
+            <a:pPr algn="ctr">
+              <a:spcBef>
+                <a:spcPts val="200"/>
+              </a:spcBef>
+            </a:pPr>
+            <a:r>
+              <a:rPr sz="1000" b="0">
+                <a:solidFill>
+                  <a:srgbClr val="4A5568"/>
+                </a:solidFill>
+                <a:latin typeface="Yu Gothic"/>
+              </a:rPr>
+              <a:t>手法を使う立場</a:t>
+            </a:r>
+          </a:p>
+        </p:txBody>
+      </p:sp>
+      <p:sp>
+        <p:nvSpPr>
+          <p:cNvPr id="7" name="TextBox 6"/>
           <p:cNvSpPr txBox="1"/>
           <p:nvPr/>
         </p:nvSpPr>
         <p:spPr>
           <a:xfrm>
-            <a:off x="3520440" y="1554480"/>
-            <a:ext cx="2194560" cy="365760"/>
+            <a:off x="5760720" y="1463040"/>
+            <a:ext cx="457200" cy="914400"/>
           </a:xfrm>
           <a:prstGeom prst="rect">
             <a:avLst/>
@@ -3623,87 +3603,14 @@
           </a:bodyPr>
           <a:lstStyle/>
           <a:p>
-            <a:pPr algn="ctr">
-              <a:defRPr sz="1400" b="1">
-                <a:solidFill>
-                  <a:srgbClr val="1A365D"/>
-                </a:solidFill>
-                <a:latin typeface="Yu Gothic"/>
-              </a:defRPr>
-            </a:pPr>
-            <a:r>
-              <a:t>公衆衛生</a:t>
-            </a:r>
-          </a:p>
-        </p:txBody>
-      </p:sp>
-      <p:sp>
-        <p:nvSpPr>
-          <p:cNvPr id="10" name="TextBox 9"/>
-          <p:cNvSpPr txBox="1"/>
-          <p:nvPr/>
-        </p:nvSpPr>
-        <p:spPr>
-          <a:xfrm>
-            <a:off x="3520440" y="1920240"/>
-            <a:ext cx="2194560" cy="320040"/>
-          </a:xfrm>
-          <a:prstGeom prst="rect">
-            <a:avLst/>
-          </a:prstGeom>
-          <a:noFill/>
-        </p:spPr>
-        <p:txBody>
-          <a:bodyPr wrap="square">
-            <a:spAutoFit/>
-          </a:bodyPr>
-          <a:lstStyle/>
-          <a:p>
-            <a:pPr algn="ctr">
-              <a:defRPr sz="1100" b="0">
-                <a:solidFill>
-                  <a:srgbClr val="4A5568"/>
-                </a:solidFill>
-                <a:latin typeface="Yu Gothic"/>
-              </a:defRPr>
-            </a:pPr>
-            <a:r>
-              <a:t>手法を使う立場</a:t>
-            </a:r>
-          </a:p>
-        </p:txBody>
-      </p:sp>
-      <p:sp>
-        <p:nvSpPr>
-          <p:cNvPr id="11" name="TextBox 10"/>
-          <p:cNvSpPr txBox="1"/>
-          <p:nvPr/>
-        </p:nvSpPr>
-        <p:spPr>
-          <a:xfrm>
-            <a:off x="5760720" y="1463040"/>
-            <a:ext cx="457200" cy="914400"/>
-          </a:xfrm>
-          <a:prstGeom prst="rect">
-            <a:avLst/>
-          </a:prstGeom>
-          <a:noFill/>
-        </p:spPr>
-        <p:txBody>
-          <a:bodyPr wrap="square">
-            <a:spAutoFit/>
-          </a:bodyPr>
-          <a:lstStyle/>
-          <a:p>
-            <a:pPr algn="ctr">
-              <a:defRPr sz="2400" b="0">
+            <a:pPr algn="ctr"/>
+            <a:r>
+              <a:rPr sz="2400" b="0">
                 <a:solidFill>
                   <a:srgbClr val="2B6CB0"/>
                 </a:solidFill>
                 <a:latin typeface="Yu Gothic"/>
-              </a:defRPr>
-            </a:pPr>
-            <a:r>
+              </a:rPr>
               <a:t>→</a:t>
             </a:r>
           </a:p>
@@ -3711,7 +3618,7 @@
       </p:sp>
       <p:sp>
         <p:nvSpPr>
-          <p:cNvPr id="12" name="Rounded Rectangle 11"/>
+          <p:cNvPr id="8" name="Rounded Rectangle 7"/>
           <p:cNvSpPr/>
           <p:nvPr/>
         </p:nvSpPr>
@@ -3747,23 +3654,52 @@
           </a:fontRef>
         </p:style>
         <p:txBody>
-          <a:bodyPr rtlCol="0" anchor="ctr"/>
-          <a:lstStyle/>
-          <a:p>
-            <a:pPr algn="ctr"/>
-          </a:p>
-        </p:txBody>
-      </p:sp>
-      <p:sp>
-        <p:nvSpPr>
-          <p:cNvPr id="13" name="TextBox 12"/>
+          <a:bodyPr rtlCol="0" anchor="ctr" wrap="square" lIns="137160" rIns="137160" tIns="73152" bIns="73152"/>
+          <a:lstStyle/>
+          <a:p>
+            <a:pPr algn="ctr">
+              <a:spcBef>
+                <a:spcPts val="200"/>
+              </a:spcBef>
+            </a:pPr>
+            <a:r>
+              <a:rPr sz="1300" b="1">
+                <a:solidFill>
+                  <a:srgbClr val="1A365D"/>
+                </a:solidFill>
+                <a:latin typeface="Yu Gothic"/>
+              </a:rPr>
+              <a:t>DS・統計学</a:t>
+            </a:r>
+          </a:p>
+          <a:p>
+            <a:pPr algn="ctr">
+              <a:spcBef>
+                <a:spcPts val="200"/>
+              </a:spcBef>
+            </a:pPr>
+            <a:r>
+              <a:rPr sz="1000" b="0">
+                <a:solidFill>
+                  <a:srgbClr val="4A5568"/>
+                </a:solidFill>
+                <a:latin typeface="Yu Gothic"/>
+              </a:rPr>
+              <a:t>手法をつくる立場</a:t>
+            </a:r>
+          </a:p>
+        </p:txBody>
+      </p:sp>
+      <p:sp>
+        <p:nvSpPr>
+          <p:cNvPr id="9" name="TextBox 8"/>
           <p:cNvSpPr txBox="1"/>
           <p:nvPr/>
         </p:nvSpPr>
         <p:spPr>
           <a:xfrm>
-            <a:off x="6263640" y="1554480"/>
-            <a:ext cx="2194560" cy="365760"/>
+            <a:off x="8503920" y="1463040"/>
+            <a:ext cx="457200" cy="914400"/>
           </a:xfrm>
           <a:prstGeom prst="rect">
             <a:avLst/>
@@ -3776,87 +3712,14 @@
           </a:bodyPr>
           <a:lstStyle/>
           <a:p>
-            <a:pPr algn="ctr">
-              <a:defRPr sz="1400" b="1">
-                <a:solidFill>
-                  <a:srgbClr val="1A365D"/>
-                </a:solidFill>
-                <a:latin typeface="Yu Gothic"/>
-              </a:defRPr>
-            </a:pPr>
-            <a:r>
-              <a:t>DS・統計学</a:t>
-            </a:r>
-          </a:p>
-        </p:txBody>
-      </p:sp>
-      <p:sp>
-        <p:nvSpPr>
-          <p:cNvPr id="14" name="TextBox 13"/>
-          <p:cNvSpPr txBox="1"/>
-          <p:nvPr/>
-        </p:nvSpPr>
-        <p:spPr>
-          <a:xfrm>
-            <a:off x="6263640" y="1920240"/>
-            <a:ext cx="2194560" cy="320040"/>
-          </a:xfrm>
-          <a:prstGeom prst="rect">
-            <a:avLst/>
-          </a:prstGeom>
-          <a:noFill/>
-        </p:spPr>
-        <p:txBody>
-          <a:bodyPr wrap="square">
-            <a:spAutoFit/>
-          </a:bodyPr>
-          <a:lstStyle/>
-          <a:p>
-            <a:pPr algn="ctr">
-              <a:defRPr sz="1100" b="0">
-                <a:solidFill>
-                  <a:srgbClr val="4A5568"/>
-                </a:solidFill>
-                <a:latin typeface="Yu Gothic"/>
-              </a:defRPr>
-            </a:pPr>
-            <a:r>
-              <a:t>手法をつくる立場</a:t>
-            </a:r>
-          </a:p>
-        </p:txBody>
-      </p:sp>
-      <p:sp>
-        <p:nvSpPr>
-          <p:cNvPr id="15" name="TextBox 14"/>
-          <p:cNvSpPr txBox="1"/>
-          <p:nvPr/>
-        </p:nvSpPr>
-        <p:spPr>
-          <a:xfrm>
-            <a:off x="8503920" y="1463040"/>
-            <a:ext cx="457200" cy="914400"/>
-          </a:xfrm>
-          <a:prstGeom prst="rect">
-            <a:avLst/>
-          </a:prstGeom>
-          <a:noFill/>
-        </p:spPr>
-        <p:txBody>
-          <a:bodyPr wrap="square">
-            <a:spAutoFit/>
-          </a:bodyPr>
-          <a:lstStyle/>
-          <a:p>
-            <a:pPr algn="ctr">
-              <a:defRPr sz="2400" b="0">
+            <a:pPr algn="ctr"/>
+            <a:r>
+              <a:rPr sz="2400" b="0">
                 <a:solidFill>
                   <a:srgbClr val="2B6CB0"/>
                 </a:solidFill>
                 <a:latin typeface="Yu Gothic"/>
-              </a:defRPr>
-            </a:pPr>
-            <a:r>
+              </a:rPr>
               <a:t>→</a:t>
             </a:r>
           </a:p>
@@ -3864,7 +3727,7 @@
       </p:sp>
       <p:sp>
         <p:nvSpPr>
-          <p:cNvPr id="16" name="Rounded Rectangle 15"/>
+          <p:cNvPr id="10" name="Rounded Rectangle 9"/>
           <p:cNvSpPr/>
           <p:nvPr/>
         </p:nvSpPr>
@@ -3900,92 +3763,46 @@
           </a:fontRef>
         </p:style>
         <p:txBody>
-          <a:bodyPr rtlCol="0" anchor="ctr"/>
-          <a:lstStyle/>
-          <a:p>
-            <a:pPr algn="ctr"/>
-          </a:p>
-        </p:txBody>
-      </p:sp>
-      <p:sp>
-        <p:nvSpPr>
-          <p:cNvPr id="17" name="TextBox 16"/>
-          <p:cNvSpPr txBox="1"/>
-          <p:nvPr/>
-        </p:nvSpPr>
-        <p:spPr>
-          <a:xfrm>
-            <a:off x="9006840" y="1554480"/>
-            <a:ext cx="2194560" cy="365760"/>
-          </a:xfrm>
-          <a:prstGeom prst="rect">
-            <a:avLst/>
-          </a:prstGeom>
-          <a:noFill/>
-        </p:spPr>
-        <p:txBody>
-          <a:bodyPr wrap="square">
-            <a:spAutoFit/>
-          </a:bodyPr>
+          <a:bodyPr rtlCol="0" anchor="ctr" wrap="square" lIns="137160" rIns="137160" tIns="73152" bIns="73152"/>
           <a:lstStyle/>
           <a:p>
             <a:pPr algn="ctr">
-              <a:defRPr sz="1400" b="1">
+              <a:spcBef>
+                <a:spcPts val="200"/>
+              </a:spcBef>
+            </a:pPr>
+            <a:r>
+              <a:rPr sz="1300" b="1">
                 <a:solidFill>
                   <a:srgbClr val="1A365D"/>
                 </a:solidFill>
                 <a:latin typeface="Yu Gothic"/>
-              </a:defRPr>
-            </a:pPr>
-            <a:r>
+              </a:rPr>
               <a:t>hikone</a:t>
             </a:r>
           </a:p>
-        </p:txBody>
-      </p:sp>
-      <p:sp>
-        <p:nvSpPr>
-          <p:cNvPr id="18" name="TextBox 17"/>
-          <p:cNvSpPr txBox="1"/>
-          <p:nvPr/>
-        </p:nvSpPr>
-        <p:spPr>
-          <a:xfrm>
-            <a:off x="9006840" y="1920240"/>
-            <a:ext cx="2194560" cy="320040"/>
-          </a:xfrm>
-          <a:prstGeom prst="rect">
-            <a:avLst/>
-          </a:prstGeom>
-          <a:noFill/>
-        </p:spPr>
-        <p:txBody>
-          <a:bodyPr wrap="square">
-            <a:spAutoFit/>
-          </a:bodyPr>
-          <a:lstStyle/>
           <a:p>
             <a:pPr algn="ctr">
-              <a:defRPr sz="1000" b="0">
+              <a:spcBef>
+                <a:spcPts val="200"/>
+              </a:spcBef>
+            </a:pPr>
+            <a:r>
+              <a:rPr sz="1000" b="0">
                 <a:solidFill>
                   <a:srgbClr val="4A5568"/>
                 </a:solidFill>
                 <a:latin typeface="Yu Gothic"/>
-              </a:defRPr>
-            </a:pPr>
-            <a:r>
-              <a:t>因果推論手法</a:t>
-            </a:r>
-            <a:br/>
-            <a:r>
-              <a:t>JMLR投稿中</a:t>
-            </a:r>
-          </a:p>
-        </p:txBody>
-      </p:sp>
-      <p:sp>
-        <p:nvSpPr>
-          <p:cNvPr id="19" name="Rounded Rectangle 18"/>
+              </a:rPr>
+              <a:t>因果推論手法
+JMLR投稿中</a:t>
+            </a:r>
+          </a:p>
+        </p:txBody>
+      </p:sp>
+      <p:sp>
+        <p:nvSpPr>
+          <p:cNvPr id="11" name="Rounded Rectangle 10"/>
           <p:cNvSpPr/>
           <p:nvPr/>
         </p:nvSpPr>
@@ -4000,8 +3817,10 @@
           <a:solidFill>
             <a:srgbClr val="EBF8FF"/>
           </a:solidFill>
-          <a:ln>
-            <a:noFill/>
+          <a:ln w="25400">
+            <a:solidFill>
+              <a:srgbClr val="2B6CB0"/>
+            </a:solidFill>
           </a:ln>
         </p:spPr>
         <p:style>
@@ -4019,32 +3838,64 @@
           </a:fontRef>
         </p:style>
         <p:txBody>
-          <a:bodyPr rtlCol="0" anchor="ctr"/>
-          <a:lstStyle/>
-          <a:p>
-            <a:pPr algn="ctr"/>
-          </a:p>
-        </p:txBody>
-      </p:sp>
-      <p:sp>
-        <p:nvSpPr>
-          <p:cNvPr id="20" name="Rectangle 19"/>
+          <a:bodyPr rtlCol="0" anchor="ctr" wrap="square" lIns="137160" rIns="137160" tIns="73152" bIns="73152"/>
+          <a:lstStyle/>
+          <a:p>
+            <a:pPr algn="l">
+              <a:spcBef>
+                <a:spcPts val="200"/>
+              </a:spcBef>
+            </a:pPr>
+            <a:r>
+              <a:rPr sz="1000" b="1">
+                <a:solidFill>
+                  <a:srgbClr val="2B6CB0"/>
+                </a:solidFill>
+                <a:latin typeface="Yu Gothic"/>
+              </a:rPr>
+              <a:t>データの下流＝医学の強み</a:t>
+            </a:r>
+          </a:p>
+          <a:p>
+            <a:pPr algn="l">
+              <a:spcBef>
+                <a:spcPts val="200"/>
+              </a:spcBef>
+            </a:pPr>
+            <a:r>
+              <a:rPr sz="1400" b="0">
+                <a:solidFill>
+                  <a:srgbClr val="1A202C"/>
+                </a:solidFill>
+                <a:latin typeface="Yu Gothic"/>
+              </a:rPr>
+              <a:t>医学はデータの下流だが本人のプラクティスは変わる
+→ 必ず社会実装される</a:t>
+            </a:r>
+          </a:p>
+        </p:txBody>
+      </p:sp>
+      <p:sp>
+        <p:nvSpPr>
+          <p:cNvPr id="12" name="Rounded Rectangle 11"/>
           <p:cNvSpPr/>
           <p:nvPr/>
         </p:nvSpPr>
         <p:spPr>
           <a:xfrm>
-            <a:off x="731520" y="2743200"/>
-            <a:ext cx="63500" cy="914400"/>
-          </a:xfrm>
-          <a:prstGeom prst="rect">
+            <a:off x="6126480" y="2743200"/>
+            <a:ext cx="5303520" cy="914400"/>
+          </a:xfrm>
+          <a:prstGeom prst="roundRect">
             <a:avLst/>
           </a:prstGeom>
           <a:solidFill>
-            <a:srgbClr val="2B6CB0"/>
+            <a:srgbClr val="FEFCBF"/>
           </a:solidFill>
-          <a:ln>
-            <a:noFill/>
+          <a:ln w="25400">
+            <a:solidFill>
+              <a:srgbClr val="B7791F"/>
+            </a:solidFill>
           </a:ln>
         </p:spPr>
         <p:style>
@@ -4062,108 +3913,64 @@
           </a:fontRef>
         </p:style>
         <p:txBody>
-          <a:bodyPr rtlCol="0" anchor="ctr"/>
-          <a:lstStyle/>
-          <a:p>
-            <a:pPr algn="ctr"/>
-          </a:p>
-        </p:txBody>
-      </p:sp>
-      <p:sp>
-        <p:nvSpPr>
-          <p:cNvPr id="21" name="TextBox 20"/>
-          <p:cNvSpPr txBox="1"/>
-          <p:nvPr/>
-        </p:nvSpPr>
-        <p:spPr>
-          <a:xfrm>
-            <a:off x="960120" y="2816352"/>
-            <a:ext cx="4754880" cy="228600"/>
-          </a:xfrm>
-          <a:prstGeom prst="rect">
-            <a:avLst/>
-          </a:prstGeom>
-          <a:noFill/>
-        </p:spPr>
-        <p:txBody>
-          <a:bodyPr wrap="square">
-            <a:spAutoFit/>
-          </a:bodyPr>
+          <a:bodyPr rtlCol="0" anchor="ctr" wrap="square" lIns="137160" rIns="137160" tIns="73152" bIns="73152"/>
           <a:lstStyle/>
           <a:p>
             <a:pPr algn="l">
-              <a:defRPr sz="1000" b="1">
-                <a:solidFill>
-                  <a:srgbClr val="2B6CB0"/>
-                </a:solidFill>
-                <a:latin typeface="Yu Gothic"/>
-              </a:defRPr>
-            </a:pPr>
-            <a:r>
-              <a:t>データの下流＝医学の強み</a:t>
-            </a:r>
-          </a:p>
-        </p:txBody>
-      </p:sp>
-      <p:sp>
-        <p:nvSpPr>
-          <p:cNvPr id="22" name="TextBox 21"/>
-          <p:cNvSpPr txBox="1"/>
-          <p:nvPr/>
-        </p:nvSpPr>
-        <p:spPr>
-          <a:xfrm>
-            <a:off x="960120" y="3017520"/>
-            <a:ext cx="4754880" cy="594360"/>
-          </a:xfrm>
-          <a:prstGeom prst="rect">
-            <a:avLst/>
-          </a:prstGeom>
-          <a:noFill/>
-        </p:spPr>
-        <p:txBody>
-          <a:bodyPr wrap="square">
-            <a:spAutoFit/>
-          </a:bodyPr>
-          <a:lstStyle/>
+              <a:spcBef>
+                <a:spcPts val="200"/>
+              </a:spcBef>
+            </a:pPr>
+            <a:r>
+              <a:rPr sz="1000" b="1">
+                <a:solidFill>
+                  <a:srgbClr val="B7791F"/>
+                </a:solidFill>
+                <a:latin typeface="Yu Gothic"/>
+              </a:rPr>
+              <a:t>エビデンスの階梯への異論</a:t>
+            </a:r>
+          </a:p>
           <a:p>
             <a:pPr algn="l">
-              <a:defRPr sz="1500" b="0">
+              <a:spcBef>
+                <a:spcPts val="200"/>
+              </a:spcBef>
+            </a:pPr>
+            <a:r>
+              <a:rPr sz="1400" b="0">
                 <a:solidFill>
                   <a:srgbClr val="1A202C"/>
                 </a:solidFill>
                 <a:latin typeface="Yu Gothic"/>
-              </a:defRPr>
-            </a:pPr>
-            <a:r>
-              <a:t>医学はデータの下流だが本人のプラクティスは変わる</a:t>
-            </a:r>
-            <a:br/>
-            <a:r>
-              <a:t>→ 必ず社会実装される</a:t>
-            </a:r>
-          </a:p>
-        </p:txBody>
-      </p:sp>
-      <p:sp>
-        <p:nvSpPr>
-          <p:cNvPr id="23" name="Rounded Rectangle 22"/>
+              </a:rPr>
+              <a:t>エビデンスの階梯は誤解されている。
+ケースリポートはRCTに劣らない</a:t>
+            </a:r>
+          </a:p>
+        </p:txBody>
+      </p:sp>
+      <p:sp>
+        <p:nvSpPr>
+          <p:cNvPr id="13" name="Rounded Rectangle 12"/>
           <p:cNvSpPr/>
           <p:nvPr/>
         </p:nvSpPr>
         <p:spPr>
           <a:xfrm>
-            <a:off x="6126480" y="2743200"/>
-            <a:ext cx="5303520" cy="914400"/>
+            <a:off x="731520" y="3931920"/>
+            <a:ext cx="10698480" cy="914400"/>
           </a:xfrm>
           <a:prstGeom prst="roundRect">
             <a:avLst/>
           </a:prstGeom>
           <a:solidFill>
-            <a:srgbClr val="FEFCBF"/>
+            <a:srgbClr val="E9D8FD"/>
           </a:solidFill>
-          <a:ln>
-            <a:noFill/>
+          <a:ln w="25400">
+            <a:solidFill>
+              <a:srgbClr val="553C9A"/>
+            </a:solidFill>
           </a:ln>
         </p:spPr>
         <p:style>
@@ -4181,66 +3988,53 @@
           </a:fontRef>
         </p:style>
         <p:txBody>
-          <a:bodyPr rtlCol="0" anchor="ctr"/>
-          <a:lstStyle/>
-          <a:p>
-            <a:pPr algn="ctr"/>
-          </a:p>
-        </p:txBody>
-      </p:sp>
-      <p:sp>
-        <p:nvSpPr>
-          <p:cNvPr id="24" name="Rectangle 23"/>
-          <p:cNvSpPr/>
-          <p:nvPr/>
-        </p:nvSpPr>
-        <p:spPr>
-          <a:xfrm>
-            <a:off x="6126480" y="2743200"/>
-            <a:ext cx="63500" cy="914400"/>
-          </a:xfrm>
-          <a:prstGeom prst="rect">
-            <a:avLst/>
-          </a:prstGeom>
-          <a:solidFill>
-            <a:srgbClr val="B7791F"/>
-          </a:solidFill>
-          <a:ln>
-            <a:noFill/>
-          </a:ln>
-        </p:spPr>
-        <p:style>
-          <a:lnRef idx="1">
-            <a:schemeClr val="accent1"/>
-          </a:lnRef>
-          <a:fillRef idx="3">
-            <a:schemeClr val="accent1"/>
-          </a:fillRef>
-          <a:effectRef idx="2">
-            <a:schemeClr val="accent1"/>
-          </a:effectRef>
-          <a:fontRef idx="minor">
-            <a:schemeClr val="lt1"/>
-          </a:fontRef>
-        </p:style>
-        <p:txBody>
-          <a:bodyPr rtlCol="0" anchor="ctr"/>
-          <a:lstStyle/>
-          <a:p>
-            <a:pPr algn="ctr"/>
-          </a:p>
-        </p:txBody>
-      </p:sp>
-      <p:sp>
-        <p:nvSpPr>
-          <p:cNvPr id="25" name="TextBox 24"/>
+          <a:bodyPr rtlCol="0" anchor="ctr" wrap="square" lIns="137160" rIns="137160" tIns="73152" bIns="73152"/>
+          <a:lstStyle/>
+          <a:p>
+            <a:pPr algn="l">
+              <a:spcBef>
+                <a:spcPts val="200"/>
+              </a:spcBef>
+            </a:pPr>
+            <a:r>
+              <a:rPr sz="1000" b="1">
+                <a:solidFill>
+                  <a:srgbClr val="553C9A"/>
+                </a:solidFill>
+                <a:latin typeface="Yu Gothic"/>
+              </a:rPr>
+              <a:t>戦略</a:t>
+            </a:r>
+          </a:p>
+          <a:p>
+            <a:pPr algn="l">
+              <a:spcBef>
+                <a:spcPts val="200"/>
+              </a:spcBef>
+            </a:pPr>
+            <a:r>
+              <a:rPr sz="1400" b="0">
+                <a:solidFill>
+                  <a:srgbClr val="1A202C"/>
+                </a:solidFill>
+                <a:latin typeface="Yu Gothic"/>
+              </a:rPr>
+              <a:t>データの上流に遡ってキャリアを積み、手法をつくる側へ。
+同時に臨床経験に基づく社会実装力を武器に、研究と実践の両輪を回す。</a:t>
+            </a:r>
+          </a:p>
+        </p:txBody>
+      </p:sp>
+      <p:sp>
+        <p:nvSpPr>
+          <p:cNvPr id="14" name="TextBox 13"/>
           <p:cNvSpPr txBox="1"/>
           <p:nvPr/>
         </p:nvSpPr>
         <p:spPr>
           <a:xfrm>
-            <a:off x="6355080" y="2816352"/>
-            <a:ext cx="5029200" cy="228600"/>
+            <a:off x="365760" y="6400800"/>
+            <a:ext cx="914400" cy="274320"/>
           </a:xfrm>
           <a:prstGeom prst="rect">
             <a:avLst/>
@@ -4253,253 +4047,14 @@
           </a:bodyPr>
           <a:lstStyle/>
           <a:p>
-            <a:pPr algn="l">
-              <a:defRPr sz="1000" b="1">
-                <a:solidFill>
-                  <a:srgbClr val="B7791F"/>
-                </a:solidFill>
-                <a:latin typeface="Yu Gothic"/>
-              </a:defRPr>
-            </a:pPr>
-            <a:r>
-              <a:t>エビデンスの階梯への異論</a:t>
-            </a:r>
-          </a:p>
-        </p:txBody>
-      </p:sp>
-      <p:sp>
-        <p:nvSpPr>
-          <p:cNvPr id="26" name="TextBox 25"/>
-          <p:cNvSpPr txBox="1"/>
-          <p:nvPr/>
-        </p:nvSpPr>
-        <p:spPr>
-          <a:xfrm>
-            <a:off x="6355080" y="3017520"/>
-            <a:ext cx="5029200" cy="594360"/>
-          </a:xfrm>
-          <a:prstGeom prst="rect">
-            <a:avLst/>
-          </a:prstGeom>
-          <a:noFill/>
-        </p:spPr>
-        <p:txBody>
-          <a:bodyPr wrap="square">
-            <a:spAutoFit/>
-          </a:bodyPr>
-          <a:lstStyle/>
-          <a:p>
-            <a:pPr algn="l">
-              <a:defRPr sz="1500" b="0">
-                <a:solidFill>
-                  <a:srgbClr val="1A202C"/>
-                </a:solidFill>
-                <a:latin typeface="Yu Gothic"/>
-              </a:defRPr>
-            </a:pPr>
-            <a:r>
-              <a:t>エビデンスの階梯は誤解されている。</a:t>
-            </a:r>
-            <a:br/>
-            <a:r>
-              <a:t>ケースリポートはRCTに劣らない</a:t>
-            </a:r>
-          </a:p>
-        </p:txBody>
-      </p:sp>
-      <p:sp>
-        <p:nvSpPr>
-          <p:cNvPr id="27" name="Rounded Rectangle 26"/>
-          <p:cNvSpPr/>
-          <p:nvPr/>
-        </p:nvSpPr>
-        <p:spPr>
-          <a:xfrm>
-            <a:off x="731520" y="3931920"/>
-            <a:ext cx="10698480" cy="914400"/>
-          </a:xfrm>
-          <a:prstGeom prst="roundRect">
-            <a:avLst/>
-          </a:prstGeom>
-          <a:solidFill>
-            <a:srgbClr val="E9D8FD"/>
-          </a:solidFill>
-          <a:ln>
-            <a:noFill/>
-          </a:ln>
-        </p:spPr>
-        <p:style>
-          <a:lnRef idx="1">
-            <a:schemeClr val="accent1"/>
-          </a:lnRef>
-          <a:fillRef idx="3">
-            <a:schemeClr val="accent1"/>
-          </a:fillRef>
-          <a:effectRef idx="2">
-            <a:schemeClr val="accent1"/>
-          </a:effectRef>
-          <a:fontRef idx="minor">
-            <a:schemeClr val="lt1"/>
-          </a:fontRef>
-        </p:style>
-        <p:txBody>
-          <a:bodyPr rtlCol="0" anchor="ctr"/>
-          <a:lstStyle/>
-          <a:p>
-            <a:pPr algn="ctr"/>
-          </a:p>
-        </p:txBody>
-      </p:sp>
-      <p:sp>
-        <p:nvSpPr>
-          <p:cNvPr id="28" name="Rectangle 27"/>
-          <p:cNvSpPr/>
-          <p:nvPr/>
-        </p:nvSpPr>
-        <p:spPr>
-          <a:xfrm>
-            <a:off x="731520" y="3931920"/>
-            <a:ext cx="63500" cy="914400"/>
-          </a:xfrm>
-          <a:prstGeom prst="rect">
-            <a:avLst/>
-          </a:prstGeom>
-          <a:solidFill>
-            <a:srgbClr val="553C9A"/>
-          </a:solidFill>
-          <a:ln>
-            <a:noFill/>
-          </a:ln>
-        </p:spPr>
-        <p:style>
-          <a:lnRef idx="1">
-            <a:schemeClr val="accent1"/>
-          </a:lnRef>
-          <a:fillRef idx="3">
-            <a:schemeClr val="accent1"/>
-          </a:fillRef>
-          <a:effectRef idx="2">
-            <a:schemeClr val="accent1"/>
-          </a:effectRef>
-          <a:fontRef idx="minor">
-            <a:schemeClr val="lt1"/>
-          </a:fontRef>
-        </p:style>
-        <p:txBody>
-          <a:bodyPr rtlCol="0" anchor="ctr"/>
-          <a:lstStyle/>
-          <a:p>
-            <a:pPr algn="ctr"/>
-          </a:p>
-        </p:txBody>
-      </p:sp>
-      <p:sp>
-        <p:nvSpPr>
-          <p:cNvPr id="29" name="TextBox 28"/>
-          <p:cNvSpPr txBox="1"/>
-          <p:nvPr/>
-        </p:nvSpPr>
-        <p:spPr>
-          <a:xfrm>
-            <a:off x="960120" y="4005072"/>
-            <a:ext cx="10424160" cy="228600"/>
-          </a:xfrm>
-          <a:prstGeom prst="rect">
-            <a:avLst/>
-          </a:prstGeom>
-          <a:noFill/>
-        </p:spPr>
-        <p:txBody>
-          <a:bodyPr wrap="square">
-            <a:spAutoFit/>
-          </a:bodyPr>
-          <a:lstStyle/>
-          <a:p>
-            <a:pPr algn="l">
-              <a:defRPr sz="1000" b="1">
-                <a:solidFill>
-                  <a:srgbClr val="553C9A"/>
-                </a:solidFill>
-                <a:latin typeface="Yu Gothic"/>
-              </a:defRPr>
-            </a:pPr>
-            <a:r>
-              <a:t>戦略</a:t>
-            </a:r>
-          </a:p>
-        </p:txBody>
-      </p:sp>
-      <p:sp>
-        <p:nvSpPr>
-          <p:cNvPr id="30" name="TextBox 29"/>
-          <p:cNvSpPr txBox="1"/>
-          <p:nvPr/>
-        </p:nvSpPr>
-        <p:spPr>
-          <a:xfrm>
-            <a:off x="960120" y="4206240"/>
-            <a:ext cx="10424160" cy="594360"/>
-          </a:xfrm>
-          <a:prstGeom prst="rect">
-            <a:avLst/>
-          </a:prstGeom>
-          <a:noFill/>
-        </p:spPr>
-        <p:txBody>
-          <a:bodyPr wrap="square">
-            <a:spAutoFit/>
-          </a:bodyPr>
-          <a:lstStyle/>
-          <a:p>
-            <a:pPr algn="l">
-              <a:defRPr sz="1500" b="0">
-                <a:solidFill>
-                  <a:srgbClr val="1A202C"/>
-                </a:solidFill>
-                <a:latin typeface="Yu Gothic"/>
-              </a:defRPr>
-            </a:pPr>
-            <a:r>
-              <a:t>データの上流に遡ってキャリアを積み、手法をつくる側へ。</a:t>
-            </a:r>
-            <a:br/>
-            <a:r>
-              <a:t>同時に臨床経験に基づく社会実装力を武器に、研究と実践の両輪を回す。</a:t>
-            </a:r>
-          </a:p>
-        </p:txBody>
-      </p:sp>
-      <p:sp>
-        <p:nvSpPr>
-          <p:cNvPr id="31" name="TextBox 30"/>
-          <p:cNvSpPr txBox="1"/>
-          <p:nvPr/>
-        </p:nvSpPr>
-        <p:spPr>
-          <a:xfrm>
-            <a:off x="365760" y="6400800"/>
-            <a:ext cx="914400" cy="274320"/>
-          </a:xfrm>
-          <a:prstGeom prst="rect">
-            <a:avLst/>
-          </a:prstGeom>
-          <a:noFill/>
-        </p:spPr>
-        <p:txBody>
-          <a:bodyPr wrap="square">
-            <a:spAutoFit/>
-          </a:bodyPr>
-          <a:lstStyle/>
-          <a:p>
-            <a:pPr algn="l">
-              <a:defRPr sz="1000" b="0">
+            <a:pPr algn="l"/>
+            <a:r>
+              <a:rPr sz="1000" b="0">
                 <a:solidFill>
                   <a:srgbClr val="4A5568"/>
                 </a:solidFill>
                 <a:latin typeface="Yu Gothic"/>
-              </a:defRPr>
-            </a:pPr>
-            <a:r>
+              </a:rPr>
               <a:t>10 / 16</a:t>
             </a:r>
           </a:p>
@@ -4553,15 +4108,14 @@
           </a:bodyPr>
           <a:lstStyle/>
           <a:p>
-            <a:pPr algn="l">
-              <a:defRPr sz="3200" b="1">
+            <a:pPr algn="l"/>
+            <a:r>
+              <a:rPr sz="3200" b="1">
                 <a:solidFill>
                   <a:srgbClr val="1A365D"/>
                 </a:solidFill>
                 <a:latin typeface="Yu Gothic"/>
-              </a:defRPr>
-            </a:pPr>
-            <a:r>
+              </a:rPr>
               <a:t>コーディング能力の証明</a:t>
             </a:r>
           </a:p>
@@ -4627,8 +4181,10 @@
           <a:solidFill>
             <a:srgbClr val="EBF8FF"/>
           </a:solidFill>
-          <a:ln>
-            <a:noFill/>
+          <a:ln w="25400">
+            <a:solidFill>
+              <a:srgbClr val="2B6CB0"/>
+            </a:solidFill>
           </a:ln>
         </p:spPr>
         <p:style>
@@ -4646,25 +4202,129 @@
           </a:fontRef>
         </p:style>
         <p:txBody>
-          <a:bodyPr rtlCol="0" anchor="ctr"/>
-          <a:lstStyle/>
-          <a:p>
-            <a:pPr algn="ctr"/>
-          </a:p>
-        </p:txBody>
-      </p:sp>
-      <p:sp>
-        <p:nvSpPr>
-          <p:cNvPr id="5" name="Rectangle 4"/>
+          <a:bodyPr rtlCol="0" anchor="ctr" wrap="square" lIns="137160" rIns="137160" tIns="73152" bIns="73152"/>
+          <a:lstStyle/>
+          <a:p>
+            <a:pPr algn="l">
+              <a:spcBef>
+                <a:spcPts val="200"/>
+              </a:spcBef>
+            </a:pPr>
+            <a:r>
+              <a:rPr sz="1000" b="1">
+                <a:solidFill>
+                  <a:srgbClr val="2B6CB0"/>
+                </a:solidFill>
+                <a:latin typeface="Yu Gothic"/>
+              </a:rPr>
+              <a:t>課題認識</a:t>
+            </a:r>
+          </a:p>
+          <a:p>
+            <a:pPr algn="l">
+              <a:spcBef>
+                <a:spcPts val="200"/>
+              </a:spcBef>
+            </a:pPr>
+            <a:r>
+              <a:rPr sz="1400" b="0">
+                <a:solidFill>
+                  <a:srgbClr val="1A202C"/>
+                </a:solidFill>
+                <a:latin typeface="Yu Gothic"/>
+              </a:rPr>
+              <a:t>生成AI時代においてはコード能力の客観的評価が困難に</a:t>
+            </a:r>
+          </a:p>
+        </p:txBody>
+      </p:sp>
+      <p:sp>
+        <p:nvSpPr>
+          <p:cNvPr id="5" name="Rounded Rectangle 4"/>
           <p:cNvSpPr/>
           <p:nvPr/>
         </p:nvSpPr>
         <p:spPr>
           <a:xfrm>
-            <a:off x="731520" y="1371600"/>
-            <a:ext cx="63500" cy="914400"/>
-          </a:xfrm>
-          <a:prstGeom prst="rect">
+            <a:off x="731520" y="2560320"/>
+            <a:ext cx="10515600" cy="1097280"/>
+          </a:xfrm>
+          <a:prstGeom prst="roundRect">
+            <a:avLst/>
+          </a:prstGeom>
+          <a:solidFill>
+            <a:srgbClr val="C6F6D5"/>
+          </a:solidFill>
+          <a:ln w="25400">
+            <a:solidFill>
+              <a:srgbClr val="276749"/>
+            </a:solidFill>
+          </a:ln>
+        </p:spPr>
+        <p:style>
+          <a:lnRef idx="1">
+            <a:schemeClr val="accent1"/>
+          </a:lnRef>
+          <a:fillRef idx="3">
+            <a:schemeClr val="accent1"/>
+          </a:fillRef>
+          <a:effectRef idx="2">
+            <a:schemeClr val="accent1"/>
+          </a:effectRef>
+          <a:fontRef idx="minor">
+            <a:schemeClr val="lt1"/>
+          </a:fontRef>
+        </p:style>
+        <p:txBody>
+          <a:bodyPr rtlCol="0" anchor="ctr" wrap="square" lIns="137160" rIns="137160" tIns="73152" bIns="73152"/>
+          <a:lstStyle/>
+          <a:p>
+            <a:pPr algn="l">
+              <a:spcBef>
+                <a:spcPts val="200"/>
+              </a:spcBef>
+            </a:pPr>
+            <a:r>
+              <a:rPr sz="1000" b="1">
+                <a:solidFill>
+                  <a:srgbClr val="276749"/>
+                </a:solidFill>
+                <a:latin typeface="Yu Gothic"/>
+              </a:rPr>
+              <a:t>強み</a:t>
+            </a:r>
+          </a:p>
+          <a:p>
+            <a:pPr algn="l">
+              <a:spcBef>
+                <a:spcPts val="200"/>
+              </a:spcBef>
+            </a:pPr>
+            <a:r>
+              <a:rPr sz="1400" b="0">
+                <a:solidFill>
+                  <a:srgbClr val="1A202C"/>
+                </a:solidFill>
+                <a:latin typeface="Yu Gothic"/>
+              </a:rPr>
+              <a:t>生成AI登場以前のプログラミングコンペティションにおける受賞歴あり
+→ コーディング能力、およびコードレビュー能力の客観的裏付け</a:t>
+            </a:r>
+          </a:p>
+        </p:txBody>
+      </p:sp>
+      <p:sp>
+        <p:nvSpPr>
+          <p:cNvPr id="6" name="Rounded Rectangle 5"/>
+          <p:cNvSpPr/>
+          <p:nvPr/>
+        </p:nvSpPr>
+        <p:spPr>
+          <a:xfrm>
+            <a:off x="731520" y="3931920"/>
+            <a:ext cx="941832" cy="274320"/>
+          </a:xfrm>
+          <a:prstGeom prst="roundRect">
             <a:avLst/>
           </a:prstGeom>
           <a:solidFill>
@@ -4689,101 +4349,42 @@
           </a:fontRef>
         </p:style>
         <p:txBody>
-          <a:bodyPr rtlCol="0" anchor="ctr"/>
-          <a:lstStyle/>
-          <a:p>
-            <a:pPr algn="ctr"/>
-          </a:p>
-        </p:txBody>
-      </p:sp>
-      <p:sp>
-        <p:nvSpPr>
-          <p:cNvPr id="6" name="TextBox 5"/>
-          <p:cNvSpPr txBox="1"/>
-          <p:nvPr/>
-        </p:nvSpPr>
-        <p:spPr>
-          <a:xfrm>
-            <a:off x="960120" y="1444752"/>
-            <a:ext cx="10241280" cy="228600"/>
-          </a:xfrm>
-          <a:prstGeom prst="rect">
-            <a:avLst/>
-          </a:prstGeom>
-          <a:noFill/>
-        </p:spPr>
-        <p:txBody>
-          <a:bodyPr wrap="square">
-            <a:spAutoFit/>
-          </a:bodyPr>
-          <a:lstStyle/>
-          <a:p>
-            <a:pPr algn="l">
-              <a:defRPr sz="1000" b="1">
-                <a:solidFill>
-                  <a:srgbClr val="2B6CB0"/>
-                </a:solidFill>
-                <a:latin typeface="Yu Gothic"/>
-              </a:defRPr>
-            </a:pPr>
-            <a:r>
-              <a:t>課題認識</a:t>
-            </a:r>
-          </a:p>
-        </p:txBody>
-      </p:sp>
-      <p:sp>
-        <p:nvSpPr>
-          <p:cNvPr id="7" name="TextBox 6"/>
-          <p:cNvSpPr txBox="1"/>
-          <p:nvPr/>
-        </p:nvSpPr>
-        <p:spPr>
-          <a:xfrm>
-            <a:off x="960120" y="1645920"/>
-            <a:ext cx="10241280" cy="594360"/>
-          </a:xfrm>
-          <a:prstGeom prst="rect">
-            <a:avLst/>
-          </a:prstGeom>
-          <a:noFill/>
-        </p:spPr>
-        <p:txBody>
-          <a:bodyPr wrap="square">
-            <a:spAutoFit/>
-          </a:bodyPr>
-          <a:lstStyle/>
-          <a:p>
-            <a:pPr algn="l">
-              <a:defRPr sz="1500" b="0">
-                <a:solidFill>
-                  <a:srgbClr val="1A202C"/>
-                </a:solidFill>
-                <a:latin typeface="Yu Gothic"/>
-              </a:defRPr>
-            </a:pPr>
-            <a:r>
-              <a:t>生成AI時代においてはコード能力の客観的評価が困難に</a:t>
-            </a:r>
-          </a:p>
-        </p:txBody>
-      </p:sp>
-      <p:sp>
-        <p:nvSpPr>
-          <p:cNvPr id="8" name="Rounded Rectangle 7"/>
+          <a:bodyPr rtlCol="0" anchor="ctr" wrap="square" lIns="137160" rIns="137160" tIns="73152" bIns="73152"/>
+          <a:lstStyle/>
+          <a:p>
+            <a:pPr algn="ctr">
+              <a:spcBef>
+                <a:spcPts val="200"/>
+              </a:spcBef>
+            </a:pPr>
+            <a:r>
+              <a:rPr sz="1000" b="1">
+                <a:solidFill>
+                  <a:srgbClr val="FFFFFF"/>
+                </a:solidFill>
+                <a:latin typeface="Yu Gothic"/>
+              </a:rPr>
+              <a:t>数値最適化</a:t>
+            </a:r>
+          </a:p>
+        </p:txBody>
+      </p:sp>
+      <p:sp>
+        <p:nvSpPr>
+          <p:cNvPr id="7" name="Rounded Rectangle 6"/>
           <p:cNvSpPr/>
           <p:nvPr/>
         </p:nvSpPr>
         <p:spPr>
           <a:xfrm>
-            <a:off x="731520" y="2560320"/>
-            <a:ext cx="10515600" cy="1097280"/>
+            <a:off x="1764792" y="3931920"/>
+            <a:ext cx="1252728" cy="274320"/>
           </a:xfrm>
           <a:prstGeom prst="roundRect">
             <a:avLst/>
           </a:prstGeom>
           <a:solidFill>
-            <a:srgbClr val="C6F6D5"/>
+            <a:srgbClr val="2B6CB0"/>
           </a:solidFill>
           <a:ln>
             <a:noFill/>
@@ -4804,25 +4405,94 @@
           </a:fontRef>
         </p:style>
         <p:txBody>
-          <a:bodyPr rtlCol="0" anchor="ctr"/>
-          <a:lstStyle/>
-          <a:p>
-            <a:pPr algn="ctr"/>
-          </a:p>
-        </p:txBody>
-      </p:sp>
-      <p:sp>
-        <p:nvSpPr>
-          <p:cNvPr id="9" name="Rectangle 8"/>
+          <a:bodyPr rtlCol="0" anchor="ctr" wrap="square" lIns="137160" rIns="137160" tIns="73152" bIns="73152"/>
+          <a:lstStyle/>
+          <a:p>
+            <a:pPr algn="ctr">
+              <a:spcBef>
+                <a:spcPts val="200"/>
+              </a:spcBef>
+            </a:pPr>
+            <a:r>
+              <a:rPr sz="1000" b="1">
+                <a:solidFill>
+                  <a:srgbClr val="FFFFFF"/>
+                </a:solidFill>
+                <a:latin typeface="Yu Gothic"/>
+              </a:rPr>
+              <a:t>統計モデリング</a:t>
+            </a:r>
+          </a:p>
+        </p:txBody>
+      </p:sp>
+      <p:sp>
+        <p:nvSpPr>
+          <p:cNvPr id="8" name="Rounded Rectangle 7"/>
           <p:cNvSpPr/>
           <p:nvPr/>
         </p:nvSpPr>
         <p:spPr>
           <a:xfrm>
-            <a:off x="731520" y="2560320"/>
-            <a:ext cx="63500" cy="1097280"/>
-          </a:xfrm>
-          <a:prstGeom prst="rect">
+            <a:off x="3108960" y="3931920"/>
+            <a:ext cx="1252728" cy="274320"/>
+          </a:xfrm>
+          <a:prstGeom prst="roundRect">
+            <a:avLst/>
+          </a:prstGeom>
+          <a:solidFill>
+            <a:srgbClr val="2B6CB0"/>
+          </a:solidFill>
+          <a:ln>
+            <a:noFill/>
+          </a:ln>
+        </p:spPr>
+        <p:style>
+          <a:lnRef idx="1">
+            <a:schemeClr val="accent1"/>
+          </a:lnRef>
+          <a:fillRef idx="3">
+            <a:schemeClr val="accent1"/>
+          </a:fillRef>
+          <a:effectRef idx="2">
+            <a:schemeClr val="accent1"/>
+          </a:effectRef>
+          <a:fontRef idx="minor">
+            <a:schemeClr val="lt1"/>
+          </a:fontRef>
+        </p:style>
+        <p:txBody>
+          <a:bodyPr rtlCol="0" anchor="ctr" wrap="square" lIns="137160" rIns="137160" tIns="73152" bIns="73152"/>
+          <a:lstStyle/>
+          <a:p>
+            <a:pPr algn="ctr">
+              <a:spcBef>
+                <a:spcPts val="200"/>
+              </a:spcBef>
+            </a:pPr>
+            <a:r>
+              <a:rPr sz="1000" b="1">
+                <a:solidFill>
+                  <a:srgbClr val="FFFFFF"/>
+                </a:solidFill>
+                <a:latin typeface="Yu Gothic"/>
+              </a:rPr>
+              <a:t>コードレビュー</a:t>
+            </a:r>
+          </a:p>
+        </p:txBody>
+      </p:sp>
+      <p:sp>
+        <p:nvSpPr>
+          <p:cNvPr id="9" name="Rounded Rectangle 8"/>
+          <p:cNvSpPr/>
+          <p:nvPr/>
+        </p:nvSpPr>
+        <p:spPr>
+          <a:xfrm>
+            <a:off x="4453128" y="3931920"/>
+            <a:ext cx="1252728" cy="274320"/>
+          </a:xfrm>
+          <a:prstGeom prst="roundRect">
             <a:avLst/>
           </a:prstGeom>
           <a:solidFill>
@@ -4847,400 +4517,21 @@
           </a:fontRef>
         </p:style>
         <p:txBody>
-          <a:bodyPr rtlCol="0" anchor="ctr"/>
-          <a:lstStyle/>
-          <a:p>
-            <a:pPr algn="ctr"/>
-          </a:p>
-        </p:txBody>
-      </p:sp>
-      <p:sp>
-        <p:nvSpPr>
-          <p:cNvPr id="10" name="TextBox 9"/>
-          <p:cNvSpPr txBox="1"/>
-          <p:nvPr/>
-        </p:nvSpPr>
-        <p:spPr>
-          <a:xfrm>
-            <a:off x="960120" y="2633472"/>
-            <a:ext cx="10241280" cy="228600"/>
-          </a:xfrm>
-          <a:prstGeom prst="rect">
-            <a:avLst/>
-          </a:prstGeom>
-          <a:noFill/>
-        </p:spPr>
-        <p:txBody>
-          <a:bodyPr wrap="square">
-            <a:spAutoFit/>
-          </a:bodyPr>
-          <a:lstStyle/>
-          <a:p>
-            <a:pPr algn="l">
-              <a:defRPr sz="1000" b="1">
-                <a:solidFill>
-                  <a:srgbClr val="276749"/>
-                </a:solidFill>
-                <a:latin typeface="Yu Gothic"/>
-              </a:defRPr>
-            </a:pPr>
-            <a:r>
-              <a:t>強み</a:t>
-            </a:r>
-          </a:p>
-        </p:txBody>
-      </p:sp>
-      <p:sp>
-        <p:nvSpPr>
-          <p:cNvPr id="11" name="TextBox 10"/>
-          <p:cNvSpPr txBox="1"/>
-          <p:nvPr/>
-        </p:nvSpPr>
-        <p:spPr>
-          <a:xfrm>
-            <a:off x="960120" y="2834640"/>
-            <a:ext cx="10241280" cy="777240"/>
-          </a:xfrm>
-          <a:prstGeom prst="rect">
-            <a:avLst/>
-          </a:prstGeom>
-          <a:noFill/>
-        </p:spPr>
-        <p:txBody>
-          <a:bodyPr wrap="square">
-            <a:spAutoFit/>
-          </a:bodyPr>
-          <a:lstStyle/>
-          <a:p>
-            <a:pPr algn="l">
-              <a:defRPr sz="1500" b="0">
-                <a:solidFill>
-                  <a:srgbClr val="1A202C"/>
-                </a:solidFill>
-                <a:latin typeface="Yu Gothic"/>
-              </a:defRPr>
-            </a:pPr>
-            <a:r>
-              <a:t>生成AI登場以前のプログラミングコンペティションにおける受賞歴あり</a:t>
-            </a:r>
-            <a:br/>
-            <a:r>
-              <a:t>→ コーディング能力、およびコードレビュー能力の客観的裏付け</a:t>
-            </a:r>
-          </a:p>
-        </p:txBody>
-      </p:sp>
-      <p:sp>
-        <p:nvSpPr>
-          <p:cNvPr id="12" name="Rounded Rectangle 11"/>
-          <p:cNvSpPr/>
-          <p:nvPr/>
-        </p:nvSpPr>
-        <p:spPr>
-          <a:xfrm>
-            <a:off x="731520" y="3931920"/>
-            <a:ext cx="941832" cy="274320"/>
-          </a:xfrm>
-          <a:prstGeom prst="roundRect">
-            <a:avLst/>
-          </a:prstGeom>
-          <a:solidFill>
-            <a:srgbClr val="2B6CB0"/>
-          </a:solidFill>
-          <a:ln>
-            <a:noFill/>
-          </a:ln>
-        </p:spPr>
-        <p:style>
-          <a:lnRef idx="1">
-            <a:schemeClr val="accent1"/>
-          </a:lnRef>
-          <a:fillRef idx="3">
-            <a:schemeClr val="accent1"/>
-          </a:fillRef>
-          <a:effectRef idx="2">
-            <a:schemeClr val="accent1"/>
-          </a:effectRef>
-          <a:fontRef idx="minor">
-            <a:schemeClr val="lt1"/>
-          </a:fontRef>
-        </p:style>
-        <p:txBody>
-          <a:bodyPr rtlCol="0" anchor="ctr"/>
-          <a:lstStyle/>
-          <a:p>
-            <a:pPr algn="ctr"/>
-          </a:p>
-        </p:txBody>
-      </p:sp>
-      <p:sp>
-        <p:nvSpPr>
-          <p:cNvPr id="13" name="TextBox 12"/>
-          <p:cNvSpPr txBox="1"/>
-          <p:nvPr/>
-        </p:nvSpPr>
-        <p:spPr>
-          <a:xfrm>
-            <a:off x="731520" y="3941064"/>
-            <a:ext cx="941832" cy="256032"/>
-          </a:xfrm>
-          <a:prstGeom prst="rect">
-            <a:avLst/>
-          </a:prstGeom>
-          <a:noFill/>
-        </p:spPr>
-        <p:txBody>
-          <a:bodyPr wrap="square">
-            <a:spAutoFit/>
-          </a:bodyPr>
+          <a:bodyPr rtlCol="0" anchor="ctr" wrap="square" lIns="137160" rIns="137160" tIns="73152" bIns="73152"/>
           <a:lstStyle/>
           <a:p>
             <a:pPr algn="ctr">
-              <a:defRPr sz="1000" b="1">
+              <a:spcBef>
+                <a:spcPts val="200"/>
+              </a:spcBef>
+            </a:pPr>
+            <a:r>
+              <a:rPr sz="1000" b="1">
                 <a:solidFill>
                   <a:srgbClr val="FFFFFF"/>
                 </a:solidFill>
                 <a:latin typeface="Yu Gothic"/>
-              </a:defRPr>
-            </a:pPr>
-            <a:r>
-              <a:t>数値最適化</a:t>
-            </a:r>
-          </a:p>
-        </p:txBody>
-      </p:sp>
-      <p:sp>
-        <p:nvSpPr>
-          <p:cNvPr id="14" name="Rounded Rectangle 13"/>
-          <p:cNvSpPr/>
-          <p:nvPr/>
-        </p:nvSpPr>
-        <p:spPr>
-          <a:xfrm>
-            <a:off x="1764792" y="3931920"/>
-            <a:ext cx="1252728" cy="274320"/>
-          </a:xfrm>
-          <a:prstGeom prst="roundRect">
-            <a:avLst/>
-          </a:prstGeom>
-          <a:solidFill>
-            <a:srgbClr val="2B6CB0"/>
-          </a:solidFill>
-          <a:ln>
-            <a:noFill/>
-          </a:ln>
-        </p:spPr>
-        <p:style>
-          <a:lnRef idx="1">
-            <a:schemeClr val="accent1"/>
-          </a:lnRef>
-          <a:fillRef idx="3">
-            <a:schemeClr val="accent1"/>
-          </a:fillRef>
-          <a:effectRef idx="2">
-            <a:schemeClr val="accent1"/>
-          </a:effectRef>
-          <a:fontRef idx="minor">
-            <a:schemeClr val="lt1"/>
-          </a:fontRef>
-        </p:style>
-        <p:txBody>
-          <a:bodyPr rtlCol="0" anchor="ctr"/>
-          <a:lstStyle/>
-          <a:p>
-            <a:pPr algn="ctr"/>
-          </a:p>
-        </p:txBody>
-      </p:sp>
-      <p:sp>
-        <p:nvSpPr>
-          <p:cNvPr id="15" name="TextBox 14"/>
-          <p:cNvSpPr txBox="1"/>
-          <p:nvPr/>
-        </p:nvSpPr>
-        <p:spPr>
-          <a:xfrm>
-            <a:off x="1764792" y="3941064"/>
-            <a:ext cx="1252728" cy="256032"/>
-          </a:xfrm>
-          <a:prstGeom prst="rect">
-            <a:avLst/>
-          </a:prstGeom>
-          <a:noFill/>
-        </p:spPr>
-        <p:txBody>
-          <a:bodyPr wrap="square">
-            <a:spAutoFit/>
-          </a:bodyPr>
-          <a:lstStyle/>
-          <a:p>
-            <a:pPr algn="ctr">
-              <a:defRPr sz="1000" b="1">
-                <a:solidFill>
-                  <a:srgbClr val="FFFFFF"/>
-                </a:solidFill>
-                <a:latin typeface="Yu Gothic"/>
-              </a:defRPr>
-            </a:pPr>
-            <a:r>
-              <a:t>統計モデリング</a:t>
-            </a:r>
-          </a:p>
-        </p:txBody>
-      </p:sp>
-      <p:sp>
-        <p:nvSpPr>
-          <p:cNvPr id="16" name="Rounded Rectangle 15"/>
-          <p:cNvSpPr/>
-          <p:nvPr/>
-        </p:nvSpPr>
-        <p:spPr>
-          <a:xfrm>
-            <a:off x="3108960" y="3931920"/>
-            <a:ext cx="1252728" cy="274320"/>
-          </a:xfrm>
-          <a:prstGeom prst="roundRect">
-            <a:avLst/>
-          </a:prstGeom>
-          <a:solidFill>
-            <a:srgbClr val="2B6CB0"/>
-          </a:solidFill>
-          <a:ln>
-            <a:noFill/>
-          </a:ln>
-        </p:spPr>
-        <p:style>
-          <a:lnRef idx="1">
-            <a:schemeClr val="accent1"/>
-          </a:lnRef>
-          <a:fillRef idx="3">
-            <a:schemeClr val="accent1"/>
-          </a:fillRef>
-          <a:effectRef idx="2">
-            <a:schemeClr val="accent1"/>
-          </a:effectRef>
-          <a:fontRef idx="minor">
-            <a:schemeClr val="lt1"/>
-          </a:fontRef>
-        </p:style>
-        <p:txBody>
-          <a:bodyPr rtlCol="0" anchor="ctr"/>
-          <a:lstStyle/>
-          <a:p>
-            <a:pPr algn="ctr"/>
-          </a:p>
-        </p:txBody>
-      </p:sp>
-      <p:sp>
-        <p:nvSpPr>
-          <p:cNvPr id="17" name="TextBox 16"/>
-          <p:cNvSpPr txBox="1"/>
-          <p:nvPr/>
-        </p:nvSpPr>
-        <p:spPr>
-          <a:xfrm>
-            <a:off x="3108960" y="3941064"/>
-            <a:ext cx="1252728" cy="256032"/>
-          </a:xfrm>
-          <a:prstGeom prst="rect">
-            <a:avLst/>
-          </a:prstGeom>
-          <a:noFill/>
-        </p:spPr>
-        <p:txBody>
-          <a:bodyPr wrap="square">
-            <a:spAutoFit/>
-          </a:bodyPr>
-          <a:lstStyle/>
-          <a:p>
-            <a:pPr algn="ctr">
-              <a:defRPr sz="1000" b="1">
-                <a:solidFill>
-                  <a:srgbClr val="FFFFFF"/>
-                </a:solidFill>
-                <a:latin typeface="Yu Gothic"/>
-              </a:defRPr>
-            </a:pPr>
-            <a:r>
-              <a:t>コードレビュー</a:t>
-            </a:r>
-          </a:p>
-        </p:txBody>
-      </p:sp>
-      <p:sp>
-        <p:nvSpPr>
-          <p:cNvPr id="18" name="Rounded Rectangle 17"/>
-          <p:cNvSpPr/>
-          <p:nvPr/>
-        </p:nvSpPr>
-        <p:spPr>
-          <a:xfrm>
-            <a:off x="4453128" y="3931920"/>
-            <a:ext cx="1252728" cy="274320"/>
-          </a:xfrm>
-          <a:prstGeom prst="roundRect">
-            <a:avLst/>
-          </a:prstGeom>
-          <a:solidFill>
-            <a:srgbClr val="276749"/>
-          </a:solidFill>
-          <a:ln>
-            <a:noFill/>
-          </a:ln>
-        </p:spPr>
-        <p:style>
-          <a:lnRef idx="1">
-            <a:schemeClr val="accent1"/>
-          </a:lnRef>
-          <a:fillRef idx="3">
-            <a:schemeClr val="accent1"/>
-          </a:fillRef>
-          <a:effectRef idx="2">
-            <a:schemeClr val="accent1"/>
-          </a:effectRef>
-          <a:fontRef idx="minor">
-            <a:schemeClr val="lt1"/>
-          </a:fontRef>
-        </p:style>
-        <p:txBody>
-          <a:bodyPr rtlCol="0" anchor="ctr"/>
-          <a:lstStyle/>
-          <a:p>
-            <a:pPr algn="ctr"/>
-          </a:p>
-        </p:txBody>
-      </p:sp>
-      <p:sp>
-        <p:nvSpPr>
-          <p:cNvPr id="19" name="TextBox 18"/>
-          <p:cNvSpPr txBox="1"/>
-          <p:nvPr/>
-        </p:nvSpPr>
-        <p:spPr>
-          <a:xfrm>
-            <a:off x="4453128" y="3941064"/>
-            <a:ext cx="1252728" cy="256032"/>
-          </a:xfrm>
-          <a:prstGeom prst="rect">
-            <a:avLst/>
-          </a:prstGeom>
-          <a:noFill/>
-        </p:spPr>
-        <p:txBody>
-          <a:bodyPr wrap="square">
-            <a:spAutoFit/>
-          </a:bodyPr>
-          <a:lstStyle/>
-          <a:p>
-            <a:pPr algn="ctr">
-              <a:defRPr sz="1000" b="1">
-                <a:solidFill>
-                  <a:srgbClr val="FFFFFF"/>
-                </a:solidFill>
-                <a:latin typeface="Yu Gothic"/>
-              </a:defRPr>
-            </a:pPr>
-            <a:r>
+              </a:rPr>
               <a:t>AI前受賞実績</a:t>
             </a:r>
           </a:p>
@@ -5248,7 +4539,7 @@
       </p:sp>
       <p:sp>
         <p:nvSpPr>
-          <p:cNvPr id="20" name="Rounded Rectangle 19"/>
+          <p:cNvPr id="10" name="Rounded Rectangle 9"/>
           <p:cNvSpPr/>
           <p:nvPr/>
         </p:nvSpPr>
@@ -5282,44 +4573,21 @@
           </a:fontRef>
         </p:style>
         <p:txBody>
-          <a:bodyPr rtlCol="0" anchor="ctr"/>
-          <a:lstStyle/>
-          <a:p>
-            <a:pPr algn="ctr"/>
-          </a:p>
-        </p:txBody>
-      </p:sp>
-      <p:sp>
-        <p:nvSpPr>
-          <p:cNvPr id="21" name="TextBox 20"/>
-          <p:cNvSpPr txBox="1"/>
-          <p:nvPr/>
-        </p:nvSpPr>
-        <p:spPr>
-          <a:xfrm>
-            <a:off x="5797296" y="3941064"/>
-            <a:ext cx="786384" cy="256032"/>
-          </a:xfrm>
-          <a:prstGeom prst="rect">
-            <a:avLst/>
-          </a:prstGeom>
-          <a:noFill/>
-        </p:spPr>
-        <p:txBody>
-          <a:bodyPr wrap="square">
-            <a:spAutoFit/>
-          </a:bodyPr>
+          <a:bodyPr rtlCol="0" anchor="ctr" wrap="square" lIns="137160" rIns="137160" tIns="73152" bIns="73152"/>
           <a:lstStyle/>
           <a:p>
             <a:pPr algn="ctr">
-              <a:defRPr sz="1000" b="1">
+              <a:spcBef>
+                <a:spcPts val="200"/>
+              </a:spcBef>
+            </a:pPr>
+            <a:r>
+              <a:rPr sz="1000" b="1">
                 <a:solidFill>
                   <a:srgbClr val="FFFFFF"/>
                 </a:solidFill>
                 <a:latin typeface="Yu Gothic"/>
-              </a:defRPr>
-            </a:pPr>
-            <a:r>
+              </a:rPr>
               <a:t>因果推論</a:t>
             </a:r>
           </a:p>
@@ -5327,7 +4595,7 @@
       </p:sp>
       <p:sp>
         <p:nvSpPr>
-          <p:cNvPr id="22" name="Rounded Rectangle 21"/>
+          <p:cNvPr id="11" name="Rounded Rectangle 10"/>
           <p:cNvSpPr/>
           <p:nvPr/>
         </p:nvSpPr>
@@ -5361,23 +4629,36 @@
           </a:fontRef>
         </p:style>
         <p:txBody>
-          <a:bodyPr rtlCol="0" anchor="ctr"/>
-          <a:lstStyle/>
-          <a:p>
-            <a:pPr algn="ctr"/>
-          </a:p>
-        </p:txBody>
-      </p:sp>
-      <p:sp>
-        <p:nvSpPr>
-          <p:cNvPr id="23" name="TextBox 22"/>
+          <a:bodyPr rtlCol="0" anchor="ctr" wrap="square" lIns="137160" rIns="137160" tIns="73152" bIns="73152"/>
+          <a:lstStyle/>
+          <a:p>
+            <a:pPr algn="ctr">
+              <a:spcBef>
+                <a:spcPts val="200"/>
+              </a:spcBef>
+            </a:pPr>
+            <a:r>
+              <a:rPr sz="1000" b="1">
+                <a:solidFill>
+                  <a:srgbClr val="FFFFFF"/>
+                </a:solidFill>
+                <a:latin typeface="Yu Gothic"/>
+              </a:rPr>
+              <a:t>論文ダッシュボード</a:t>
+            </a:r>
+          </a:p>
+        </p:txBody>
+      </p:sp>
+      <p:sp>
+        <p:nvSpPr>
+          <p:cNvPr id="12" name="TextBox 11"/>
           <p:cNvSpPr txBox="1"/>
           <p:nvPr/>
         </p:nvSpPr>
         <p:spPr>
           <a:xfrm>
-            <a:off x="6675120" y="3941064"/>
-            <a:ext cx="1563624" cy="256032"/>
+            <a:off x="365760" y="6400800"/>
+            <a:ext cx="914400" cy="274320"/>
           </a:xfrm>
           <a:prstGeom prst="rect">
             <a:avLst/>
@@ -5390,51 +4671,14 @@
           </a:bodyPr>
           <a:lstStyle/>
           <a:p>
-            <a:pPr algn="ctr">
-              <a:defRPr sz="1000" b="1">
-                <a:solidFill>
-                  <a:srgbClr val="FFFFFF"/>
-                </a:solidFill>
-                <a:latin typeface="Yu Gothic"/>
-              </a:defRPr>
-            </a:pPr>
-            <a:r>
-              <a:t>論文ダッシュボード</a:t>
-            </a:r>
-          </a:p>
-        </p:txBody>
-      </p:sp>
-      <p:sp>
-        <p:nvSpPr>
-          <p:cNvPr id="24" name="TextBox 23"/>
-          <p:cNvSpPr txBox="1"/>
-          <p:nvPr/>
-        </p:nvSpPr>
-        <p:spPr>
-          <a:xfrm>
-            <a:off x="365760" y="6400800"/>
-            <a:ext cx="914400" cy="274320"/>
-          </a:xfrm>
-          <a:prstGeom prst="rect">
-            <a:avLst/>
-          </a:prstGeom>
-          <a:noFill/>
-        </p:spPr>
-        <p:txBody>
-          <a:bodyPr wrap="square">
-            <a:spAutoFit/>
-          </a:bodyPr>
-          <a:lstStyle/>
-          <a:p>
-            <a:pPr algn="l">
-              <a:defRPr sz="1000" b="0">
+            <a:pPr algn="l"/>
+            <a:r>
+              <a:rPr sz="1000" b="0">
                 <a:solidFill>
                   <a:srgbClr val="4A5568"/>
                 </a:solidFill>
                 <a:latin typeface="Yu Gothic"/>
-              </a:defRPr>
-            </a:pPr>
-            <a:r>
+              </a:rPr>
               <a:t>11 / 16</a:t>
             </a:r>
           </a:p>
@@ -5488,15 +4732,14 @@
           </a:bodyPr>
           <a:lstStyle/>
           <a:p>
-            <a:pPr algn="l">
-              <a:defRPr sz="3200" b="1">
+            <a:pPr algn="l"/>
+            <a:r>
+              <a:rPr sz="3200" b="1">
                 <a:solidFill>
                   <a:srgbClr val="1A365D"/>
                 </a:solidFill>
                 <a:latin typeface="Yu Gothic"/>
-              </a:defRPr>
-            </a:pPr>
-            <a:r>
+              </a:rPr>
               <a:t>Devin × 伊藤忠 × 滋賀大学</a:t>
             </a:r>
           </a:p>
@@ -5583,10 +4826,39 @@
           </a:fontRef>
         </p:style>
         <p:txBody>
-          <a:bodyPr rtlCol="0" anchor="ctr"/>
-          <a:lstStyle/>
-          <a:p>
-            <a:pPr algn="ctr"/>
+          <a:bodyPr rtlCol="0" anchor="ctr" wrap="square" lIns="137160" rIns="137160" tIns="73152" bIns="73152"/>
+          <a:lstStyle/>
+          <a:p>
+            <a:pPr algn="ctr">
+              <a:spcBef>
+                <a:spcPts val="200"/>
+              </a:spcBef>
+            </a:pPr>
+            <a:r>
+              <a:rPr sz="1300" b="1">
+                <a:solidFill>
+                  <a:srgbClr val="1A365D"/>
+                </a:solidFill>
+                <a:latin typeface="Yu Gothic"/>
+              </a:rPr>
+              <a:t>Cognition AI</a:t>
+            </a:r>
+          </a:p>
+          <a:p>
+            <a:pPr algn="ctr">
+              <a:spcBef>
+                <a:spcPts val="200"/>
+              </a:spcBef>
+            </a:pPr>
+            <a:r>
+              <a:rPr sz="1000" b="0">
+                <a:solidFill>
+                  <a:srgbClr val="4A5568"/>
+                </a:solidFill>
+                <a:latin typeface="Yu Gothic"/>
+              </a:rPr>
+              <a:t>Devin 開発元</a:t>
+            </a:r>
           </a:p>
         </p:txBody>
       </p:sp>
@@ -5598,8 +4870,8 @@
         </p:nvSpPr>
         <p:spPr>
           <a:xfrm>
-            <a:off x="1143000" y="1737360"/>
-            <a:ext cx="2194560" cy="365760"/>
+            <a:off x="3383280" y="1645920"/>
+            <a:ext cx="457200" cy="914400"/>
           </a:xfrm>
           <a:prstGeom prst="rect">
             <a:avLst/>
@@ -5612,87 +4884,14 @@
           </a:bodyPr>
           <a:lstStyle/>
           <a:p>
-            <a:pPr algn="ctr">
-              <a:defRPr sz="1400" b="1">
-                <a:solidFill>
-                  <a:srgbClr val="1A365D"/>
-                </a:solidFill>
-                <a:latin typeface="Yu Gothic"/>
-              </a:defRPr>
-            </a:pPr>
-            <a:r>
-              <a:t>Cognition AI</a:t>
-            </a:r>
-          </a:p>
-        </p:txBody>
-      </p:sp>
-      <p:sp>
-        <p:nvSpPr>
-          <p:cNvPr id="6" name="TextBox 5"/>
-          <p:cNvSpPr txBox="1"/>
-          <p:nvPr/>
-        </p:nvSpPr>
-        <p:spPr>
-          <a:xfrm>
-            <a:off x="1143000" y="2103120"/>
-            <a:ext cx="2194560" cy="320040"/>
-          </a:xfrm>
-          <a:prstGeom prst="rect">
-            <a:avLst/>
-          </a:prstGeom>
-          <a:noFill/>
-        </p:spPr>
-        <p:txBody>
-          <a:bodyPr wrap="square">
-            <a:spAutoFit/>
-          </a:bodyPr>
-          <a:lstStyle/>
-          <a:p>
-            <a:pPr algn="ctr">
-              <a:defRPr sz="1100" b="0">
-                <a:solidFill>
-                  <a:srgbClr val="4A5568"/>
-                </a:solidFill>
-                <a:latin typeface="Yu Gothic"/>
-              </a:defRPr>
-            </a:pPr>
-            <a:r>
-              <a:t>Devin 開発元</a:t>
-            </a:r>
-          </a:p>
-        </p:txBody>
-      </p:sp>
-      <p:sp>
-        <p:nvSpPr>
-          <p:cNvPr id="7" name="TextBox 6"/>
-          <p:cNvSpPr txBox="1"/>
-          <p:nvPr/>
-        </p:nvSpPr>
-        <p:spPr>
-          <a:xfrm>
-            <a:off x="3383280" y="1645920"/>
-            <a:ext cx="457200" cy="914400"/>
-          </a:xfrm>
-          <a:prstGeom prst="rect">
-            <a:avLst/>
-          </a:prstGeom>
-          <a:noFill/>
-        </p:spPr>
-        <p:txBody>
-          <a:bodyPr wrap="square">
-            <a:spAutoFit/>
-          </a:bodyPr>
-          <a:lstStyle/>
-          <a:p>
-            <a:pPr algn="ctr">
-              <a:defRPr sz="2400" b="0">
+            <a:pPr algn="ctr"/>
+            <a:r>
+              <a:rPr sz="2400" b="0">
                 <a:solidFill>
                   <a:srgbClr val="2B6CB0"/>
                 </a:solidFill>
                 <a:latin typeface="Yu Gothic"/>
-              </a:defRPr>
-            </a:pPr>
-            <a:r>
+              </a:rPr>
               <a:t>→</a:t>
             </a:r>
           </a:p>
@@ -5700,7 +4899,7 @@
       </p:sp>
       <p:sp>
         <p:nvSpPr>
-          <p:cNvPr id="8" name="Rounded Rectangle 7"/>
+          <p:cNvPr id="6" name="Rounded Rectangle 5"/>
           <p:cNvSpPr/>
           <p:nvPr/>
         </p:nvSpPr>
@@ -5736,23 +4935,53 @@
           </a:fontRef>
         </p:style>
         <p:txBody>
-          <a:bodyPr rtlCol="0" anchor="ctr"/>
-          <a:lstStyle/>
-          <a:p>
-            <a:pPr algn="ctr"/>
-          </a:p>
-        </p:txBody>
-      </p:sp>
-      <p:sp>
-        <p:nvSpPr>
-          <p:cNvPr id="9" name="TextBox 8"/>
+          <a:bodyPr rtlCol="0" anchor="ctr" wrap="square" lIns="137160" rIns="137160" tIns="73152" bIns="73152"/>
+          <a:lstStyle/>
+          <a:p>
+            <a:pPr algn="ctr">
+              <a:spcBef>
+                <a:spcPts val="200"/>
+              </a:spcBef>
+            </a:pPr>
+            <a:r>
+              <a:rPr sz="1300" b="1">
+                <a:solidFill>
+                  <a:srgbClr val="1A365D"/>
+                </a:solidFill>
+                <a:latin typeface="Yu Gothic"/>
+              </a:rPr>
+              <a:t>伊藤忠テクノ
+ソリューションズ</a:t>
+            </a:r>
+          </a:p>
+          <a:p>
+            <a:pPr algn="ctr">
+              <a:spcBef>
+                <a:spcPts val="200"/>
+              </a:spcBef>
+            </a:pPr>
+            <a:r>
+              <a:rPr sz="1000" b="0">
+                <a:solidFill>
+                  <a:srgbClr val="4A5568"/>
+                </a:solidFill>
+                <a:latin typeface="Yu Gothic"/>
+              </a:rPr>
+              <a:t>日本代理店</a:t>
+            </a:r>
+          </a:p>
+        </p:txBody>
+      </p:sp>
+      <p:sp>
+        <p:nvSpPr>
+          <p:cNvPr id="7" name="TextBox 6"/>
           <p:cNvSpPr txBox="1"/>
           <p:nvPr/>
         </p:nvSpPr>
         <p:spPr>
           <a:xfrm>
-            <a:off x="3886200" y="1737360"/>
-            <a:ext cx="2194560" cy="365760"/>
+            <a:off x="6126480" y="1645920"/>
+            <a:ext cx="457200" cy="914400"/>
           </a:xfrm>
           <a:prstGeom prst="rect">
             <a:avLst/>
@@ -5765,87 +4994,14 @@
           </a:bodyPr>
           <a:lstStyle/>
           <a:p>
-            <a:pPr algn="ctr">
-              <a:defRPr sz="1400" b="1">
-                <a:solidFill>
-                  <a:srgbClr val="1A365D"/>
-                </a:solidFill>
-                <a:latin typeface="Yu Gothic"/>
-              </a:defRPr>
-            </a:pPr>
-            <a:r>
-              <a:t>伊藤忠テクノソリューションズ</a:t>
-            </a:r>
-          </a:p>
-        </p:txBody>
-      </p:sp>
-      <p:sp>
-        <p:nvSpPr>
-          <p:cNvPr id="10" name="TextBox 9"/>
-          <p:cNvSpPr txBox="1"/>
-          <p:nvPr/>
-        </p:nvSpPr>
-        <p:spPr>
-          <a:xfrm>
-            <a:off x="3886200" y="2103120"/>
-            <a:ext cx="2194560" cy="320040"/>
-          </a:xfrm>
-          <a:prstGeom prst="rect">
-            <a:avLst/>
-          </a:prstGeom>
-          <a:noFill/>
-        </p:spPr>
-        <p:txBody>
-          <a:bodyPr wrap="square">
-            <a:spAutoFit/>
-          </a:bodyPr>
-          <a:lstStyle/>
-          <a:p>
-            <a:pPr algn="ctr">
-              <a:defRPr sz="1100" b="0">
-                <a:solidFill>
-                  <a:srgbClr val="4A5568"/>
-                </a:solidFill>
-                <a:latin typeface="Yu Gothic"/>
-              </a:defRPr>
-            </a:pPr>
-            <a:r>
-              <a:t>日本代理店</a:t>
-            </a:r>
-          </a:p>
-        </p:txBody>
-      </p:sp>
-      <p:sp>
-        <p:nvSpPr>
-          <p:cNvPr id="11" name="TextBox 10"/>
-          <p:cNvSpPr txBox="1"/>
-          <p:nvPr/>
-        </p:nvSpPr>
-        <p:spPr>
-          <a:xfrm>
-            <a:off x="6126480" y="1645920"/>
-            <a:ext cx="457200" cy="914400"/>
-          </a:xfrm>
-          <a:prstGeom prst="rect">
-            <a:avLst/>
-          </a:prstGeom>
-          <a:noFill/>
-        </p:spPr>
-        <p:txBody>
-          <a:bodyPr wrap="square">
-            <a:spAutoFit/>
-          </a:bodyPr>
-          <a:lstStyle/>
-          <a:p>
-            <a:pPr algn="ctr">
-              <a:defRPr sz="2400" b="0">
+            <a:pPr algn="ctr"/>
+            <a:r>
+              <a:rPr sz="2400" b="0">
                 <a:solidFill>
                   <a:srgbClr val="2B6CB0"/>
                 </a:solidFill>
                 <a:latin typeface="Yu Gothic"/>
-              </a:defRPr>
-            </a:pPr>
-            <a:r>
+              </a:rPr>
               <a:t>→</a:t>
             </a:r>
           </a:p>
@@ -5853,7 +5009,7 @@
       </p:sp>
       <p:sp>
         <p:nvSpPr>
-          <p:cNvPr id="12" name="Rounded Rectangle 11"/>
+          <p:cNvPr id="8" name="Rounded Rectangle 7"/>
           <p:cNvSpPr/>
           <p:nvPr/>
         </p:nvSpPr>
@@ -5889,80 +5045,37 @@
           </a:fontRef>
         </p:style>
         <p:txBody>
-          <a:bodyPr rtlCol="0" anchor="ctr"/>
-          <a:lstStyle/>
-          <a:p>
-            <a:pPr algn="ctr"/>
-          </a:p>
-        </p:txBody>
-      </p:sp>
-      <p:sp>
-        <p:nvSpPr>
-          <p:cNvPr id="13" name="TextBox 12"/>
-          <p:cNvSpPr txBox="1"/>
-          <p:nvPr/>
-        </p:nvSpPr>
-        <p:spPr>
-          <a:xfrm>
-            <a:off x="6629400" y="1737360"/>
-            <a:ext cx="2194560" cy="365760"/>
-          </a:xfrm>
-          <a:prstGeom prst="rect">
-            <a:avLst/>
-          </a:prstGeom>
-          <a:noFill/>
-        </p:spPr>
-        <p:txBody>
-          <a:bodyPr wrap="square">
-            <a:spAutoFit/>
-          </a:bodyPr>
+          <a:bodyPr rtlCol="0" anchor="ctr" wrap="square" lIns="137160" rIns="137160" tIns="73152" bIns="73152"/>
           <a:lstStyle/>
           <a:p>
             <a:pPr algn="ctr">
-              <a:defRPr sz="1400" b="1">
+              <a:spcBef>
+                <a:spcPts val="200"/>
+              </a:spcBef>
+            </a:pPr>
+            <a:r>
+              <a:rPr sz="1300" b="1">
                 <a:solidFill>
                   <a:srgbClr val="1A365D"/>
                 </a:solidFill>
                 <a:latin typeface="Yu Gothic"/>
-              </a:defRPr>
-            </a:pPr>
-            <a:r>
+              </a:rPr>
               <a:t>滋賀大学</a:t>
             </a:r>
           </a:p>
-        </p:txBody>
-      </p:sp>
-      <p:sp>
-        <p:nvSpPr>
-          <p:cNvPr id="14" name="TextBox 13"/>
-          <p:cNvSpPr txBox="1"/>
-          <p:nvPr/>
-        </p:nvSpPr>
-        <p:spPr>
-          <a:xfrm>
-            <a:off x="6629400" y="2103120"/>
-            <a:ext cx="2194560" cy="320040"/>
-          </a:xfrm>
-          <a:prstGeom prst="rect">
-            <a:avLst/>
-          </a:prstGeom>
-          <a:noFill/>
-        </p:spPr>
-        <p:txBody>
-          <a:bodyPr wrap="square">
-            <a:spAutoFit/>
-          </a:bodyPr>
-          <a:lstStyle/>
           <a:p>
             <a:pPr algn="ctr">
-              <a:defRPr sz="1100" b="0">
+              <a:spcBef>
+                <a:spcPts val="200"/>
+              </a:spcBef>
+            </a:pPr>
+            <a:r>
+              <a:rPr sz="1000" b="0">
                 <a:solidFill>
                   <a:srgbClr val="4A5568"/>
                 </a:solidFill>
                 <a:latin typeface="Yu Gothic"/>
-              </a:defRPr>
-            </a:pPr>
-            <a:r>
+              </a:rPr>
               <a:t>伊藤忠と縁あり</a:t>
             </a:r>
           </a:p>
@@ -5970,7 +5083,7 @@
       </p:sp>
       <p:sp>
         <p:nvSpPr>
-          <p:cNvPr id="15" name="Rounded Rectangle 14"/>
+          <p:cNvPr id="9" name="Rounded Rectangle 8"/>
           <p:cNvSpPr/>
           <p:nvPr/>
         </p:nvSpPr>
@@ -5985,8 +5098,10 @@
           <a:solidFill>
             <a:srgbClr val="FEFCBF"/>
           </a:solidFill>
-          <a:ln>
-            <a:noFill/>
+          <a:ln w="25400">
+            <a:solidFill>
+              <a:srgbClr val="B7791F"/>
+            </a:solidFill>
           </a:ln>
         </p:spPr>
         <p:style>
@@ -6004,66 +5119,52 @@
           </a:fontRef>
         </p:style>
         <p:txBody>
-          <a:bodyPr rtlCol="0" anchor="ctr"/>
-          <a:lstStyle/>
-          <a:p>
-            <a:pPr algn="ctr"/>
-          </a:p>
-        </p:txBody>
-      </p:sp>
-      <p:sp>
-        <p:nvSpPr>
-          <p:cNvPr id="16" name="Rectangle 15"/>
-          <p:cNvSpPr/>
-          <p:nvPr/>
-        </p:nvSpPr>
-        <p:spPr>
-          <a:xfrm>
-            <a:off x="731520" y="2926080"/>
-            <a:ext cx="63500" cy="914400"/>
-          </a:xfrm>
-          <a:prstGeom prst="rect">
-            <a:avLst/>
-          </a:prstGeom>
-          <a:solidFill>
-            <a:srgbClr val="B7791F"/>
-          </a:solidFill>
-          <a:ln>
-            <a:noFill/>
-          </a:ln>
-        </p:spPr>
-        <p:style>
-          <a:lnRef idx="1">
-            <a:schemeClr val="accent1"/>
-          </a:lnRef>
-          <a:fillRef idx="3">
-            <a:schemeClr val="accent1"/>
-          </a:fillRef>
-          <a:effectRef idx="2">
-            <a:schemeClr val="accent1"/>
-          </a:effectRef>
-          <a:fontRef idx="minor">
-            <a:schemeClr val="lt1"/>
-          </a:fontRef>
-        </p:style>
-        <p:txBody>
-          <a:bodyPr rtlCol="0" anchor="ctr"/>
-          <a:lstStyle/>
-          <a:p>
-            <a:pPr algn="ctr"/>
-          </a:p>
-        </p:txBody>
-      </p:sp>
-      <p:sp>
-        <p:nvSpPr>
-          <p:cNvPr id="17" name="TextBox 16"/>
+          <a:bodyPr rtlCol="0" anchor="ctr" wrap="square" lIns="137160" rIns="137160" tIns="73152" bIns="73152"/>
+          <a:lstStyle/>
+          <a:p>
+            <a:pPr algn="l">
+              <a:spcBef>
+                <a:spcPts val="200"/>
+              </a:spcBef>
+            </a:pPr>
+            <a:r>
+              <a:rPr sz="1000" b="1">
+                <a:solidFill>
+                  <a:srgbClr val="B7791F"/>
+                </a:solidFill>
+                <a:latin typeface="Yu Gothic"/>
+              </a:rPr>
+              <a:t>提案</a:t>
+            </a:r>
+          </a:p>
+          <a:p>
+            <a:pPr algn="l">
+              <a:spcBef>
+                <a:spcPts val="200"/>
+              </a:spcBef>
+            </a:pPr>
+            <a:r>
+              <a:rPr sz="1400" b="0">
+                <a:solidFill>
+                  <a:srgbClr val="1A202C"/>
+                </a:solidFill>
+                <a:latin typeface="Yu Gothic"/>
+              </a:rPr>
+              <a:t>伊藤忠が日本におけるDevin代理店となった今、滋賀大学でのDevin導入を検討できないか？</a:t>
+            </a:r>
+          </a:p>
+        </p:txBody>
+      </p:sp>
+      <p:sp>
+        <p:nvSpPr>
+          <p:cNvPr id="10" name="TextBox 9"/>
           <p:cNvSpPr txBox="1"/>
           <p:nvPr/>
         </p:nvSpPr>
         <p:spPr>
           <a:xfrm>
-            <a:off x="960120" y="2999232"/>
-            <a:ext cx="10241280" cy="228600"/>
+            <a:off x="914400" y="4114800"/>
+            <a:ext cx="10058400" cy="1828800"/>
           </a:xfrm>
           <a:prstGeom prst="rect">
             <a:avLst/>
@@ -6075,31 +5176,73 @@
             <a:spAutoFit/>
           </a:bodyPr>
           <a:lstStyle/>
-          <a:p>
-            <a:pPr algn="l">
-              <a:defRPr sz="1000" b="1">
-                <a:solidFill>
-                  <a:srgbClr val="B7791F"/>
-                </a:solidFill>
-                <a:latin typeface="Yu Gothic"/>
-              </a:defRPr>
-            </a:pPr>
-            <a:r>
-              <a:t>提案</a:t>
-            </a:r>
-          </a:p>
-        </p:txBody>
-      </p:sp>
-      <p:sp>
-        <p:nvSpPr>
-          <p:cNvPr id="18" name="TextBox 17"/>
+          <a:p/>
+          <a:p>
+            <a:pPr>
+              <a:spcBef>
+                <a:spcPts val="400"/>
+              </a:spcBef>
+              <a:spcAft>
+                <a:spcPts val="300"/>
+              </a:spcAft>
+            </a:pPr>
+            <a:r>
+              <a:rPr sz="1700" b="0">
+                <a:solidFill>
+                  <a:srgbClr val="1A202C"/>
+                </a:solidFill>
+                <a:latin typeface="Yu Gothic"/>
+              </a:rPr>
+              <a:t>◆ AI駆動型ソフトウェアエンジニアリングによる研究加速</a:t>
+            </a:r>
+          </a:p>
+          <a:p>
+            <a:pPr>
+              <a:spcBef>
+                <a:spcPts val="100"/>
+              </a:spcBef>
+            </a:pPr>
+            <a:r>
+              <a:rPr sz="1300" b="0">
+                <a:solidFill>
+                  <a:srgbClr val="4A5568"/>
+                </a:solidFill>
+                <a:latin typeface="Yu Gothic"/>
+              </a:rPr>
+              <a:t>    コーディング、データ分析、論文整備の自動化</a:t>
+            </a:r>
+          </a:p>
+          <a:p>
+            <a:pPr>
+              <a:spcBef>
+                <a:spcPts val="400"/>
+              </a:spcBef>
+              <a:spcAft>
+                <a:spcPts val="300"/>
+              </a:spcAft>
+            </a:pPr>
+            <a:r>
+              <a:rPr sz="1700" b="0">
+                <a:solidFill>
+                  <a:srgbClr val="1A202C"/>
+                </a:solidFill>
+                <a:latin typeface="Yu Gothic"/>
+              </a:rPr>
+              <a:t>◆ 大学全体のDX推進の先行事例になり得る</a:t>
+            </a:r>
+          </a:p>
+        </p:txBody>
+      </p:sp>
+      <p:sp>
+        <p:nvSpPr>
+          <p:cNvPr id="11" name="TextBox 10"/>
           <p:cNvSpPr txBox="1"/>
           <p:nvPr/>
         </p:nvSpPr>
         <p:spPr>
           <a:xfrm>
-            <a:off x="960120" y="3200400"/>
-            <a:ext cx="10241280" cy="594360"/>
+            <a:off x="365760" y="6400800"/>
+            <a:ext cx="914400" cy="274320"/>
           </a:xfrm>
           <a:prstGeom prst="rect">
             <a:avLst/>
@@ -6112,129 +5255,14 @@
           </a:bodyPr>
           <a:lstStyle/>
           <a:p>
-            <a:pPr algn="l">
-              <a:defRPr sz="1500" b="0">
-                <a:solidFill>
-                  <a:srgbClr val="1A202C"/>
-                </a:solidFill>
-                <a:latin typeface="Yu Gothic"/>
-              </a:defRPr>
-            </a:pPr>
-            <a:r>
-              <a:t>伊藤忠が日本におけるDevin代理店となった今、滋賀大学でのDevin導入を検討できないか？</a:t>
-            </a:r>
-          </a:p>
-        </p:txBody>
-      </p:sp>
-      <p:sp>
-        <p:nvSpPr>
-          <p:cNvPr id="19" name="TextBox 18"/>
-          <p:cNvSpPr txBox="1"/>
-          <p:nvPr/>
-        </p:nvSpPr>
-        <p:spPr>
-          <a:xfrm>
-            <a:off x="914400" y="4114800"/>
-            <a:ext cx="10058400" cy="1828800"/>
-          </a:xfrm>
-          <a:prstGeom prst="rect">
-            <a:avLst/>
-          </a:prstGeom>
-          <a:noFill/>
-        </p:spPr>
-        <p:txBody>
-          <a:bodyPr wrap="square">
-            <a:spAutoFit/>
-          </a:bodyPr>
-          <a:lstStyle/>
-          <a:p/>
-          <a:p>
-            <a:pPr>
-              <a:spcBef>
-                <a:spcPts val="400"/>
-              </a:spcBef>
-              <a:spcAft>
-                <a:spcPts val="300"/>
-              </a:spcAft>
-            </a:pPr>
-            <a:r>
-              <a:rPr sz="1700" b="0">
-                <a:solidFill>
-                  <a:srgbClr val="1A202C"/>
-                </a:solidFill>
-                <a:latin typeface="Yu Gothic"/>
-              </a:rPr>
-              <a:t>AI駆動型ソフトウェアエンジニアリングによる研究加速</a:t>
-            </a:r>
-          </a:p>
-          <a:p>
-            <a:pPr>
-              <a:spcBef>
-                <a:spcPts val="100"/>
-              </a:spcBef>
-            </a:pPr>
-            <a:r>
-              <a:rPr sz="1300">
+            <a:pPr algn="l"/>
+            <a:r>
+              <a:rPr sz="1000" b="0">
                 <a:solidFill>
                   <a:srgbClr val="4A5568"/>
                 </a:solidFill>
                 <a:latin typeface="Yu Gothic"/>
               </a:rPr>
-              <a:t>    コーディング、データ分析、論文整備の自動化</a:t>
-            </a:r>
-          </a:p>
-          <a:p>
-            <a:pPr>
-              <a:spcBef>
-                <a:spcPts val="400"/>
-              </a:spcBef>
-              <a:spcAft>
-                <a:spcPts val="300"/>
-              </a:spcAft>
-            </a:pPr>
-            <a:r>
-              <a:rPr sz="1700" b="0">
-                <a:solidFill>
-                  <a:srgbClr val="1A202C"/>
-                </a:solidFill>
-                <a:latin typeface="Yu Gothic"/>
-              </a:rPr>
-              <a:t>大学全体のDX推進の先行事例になり得る</a:t>
-            </a:r>
-          </a:p>
-        </p:txBody>
-      </p:sp>
-      <p:sp>
-        <p:nvSpPr>
-          <p:cNvPr id="20" name="TextBox 19"/>
-          <p:cNvSpPr txBox="1"/>
-          <p:nvPr/>
-        </p:nvSpPr>
-        <p:spPr>
-          <a:xfrm>
-            <a:off x="365760" y="6400800"/>
-            <a:ext cx="914400" cy="274320"/>
-          </a:xfrm>
-          <a:prstGeom prst="rect">
-            <a:avLst/>
-          </a:prstGeom>
-          <a:noFill/>
-        </p:spPr>
-        <p:txBody>
-          <a:bodyPr wrap="square">
-            <a:spAutoFit/>
-          </a:bodyPr>
-          <a:lstStyle/>
-          <a:p>
-            <a:pPr algn="l">
-              <a:defRPr sz="1000" b="0">
-                <a:solidFill>
-                  <a:srgbClr val="4A5568"/>
-                </a:solidFill>
-                <a:latin typeface="Yu Gothic"/>
-              </a:defRPr>
-            </a:pPr>
-            <a:r>
               <a:t>12 / 16</a:t>
             </a:r>
           </a:p>
@@ -6288,15 +5316,14 @@
           </a:bodyPr>
           <a:lstStyle/>
           <a:p>
-            <a:pPr algn="l">
-              <a:defRPr sz="3200" b="1">
+            <a:pPr algn="l"/>
+            <a:r>
+              <a:rPr sz="3200" b="1">
                 <a:solidFill>
                   <a:srgbClr val="1A365D"/>
                 </a:solidFill>
                 <a:latin typeface="Yu Gothic"/>
-              </a:defRPr>
-            </a:pPr>
-            <a:r>
+              </a:rPr>
               <a:t>法人補助金の大学還流モデル</a:t>
             </a:r>
           </a:p>
@@ -6383,10 +5410,39 @@
           </a:fontRef>
         </p:style>
         <p:txBody>
-          <a:bodyPr rtlCol="0" anchor="ctr"/>
-          <a:lstStyle/>
-          <a:p>
-            <a:pPr algn="ctr"/>
+          <a:bodyPr rtlCol="0" anchor="ctr" wrap="square" lIns="137160" rIns="137160" tIns="73152" bIns="73152"/>
+          <a:lstStyle/>
+          <a:p>
+            <a:pPr algn="ctr">
+              <a:spcBef>
+                <a:spcPts val="200"/>
+              </a:spcBef>
+            </a:pPr>
+            <a:r>
+              <a:rPr sz="1300" b="1">
+                <a:solidFill>
+                  <a:srgbClr val="1A365D"/>
+                </a:solidFill>
+                <a:latin typeface="Yu Gothic"/>
+              </a:rPr>
+              <a:t>大学発ベンチャー</a:t>
+            </a:r>
+          </a:p>
+          <a:p>
+            <a:pPr algn="ctr">
+              <a:spcBef>
+                <a:spcPts val="200"/>
+              </a:spcBef>
+            </a:pPr>
+            <a:r>
+              <a:rPr sz="1000" b="0">
+                <a:solidFill>
+                  <a:srgbClr val="4A5568"/>
+                </a:solidFill>
+                <a:latin typeface="Yu Gothic"/>
+              </a:rPr>
+              <a:t>技術・知見の事業化</a:t>
+            </a:r>
           </a:p>
         </p:txBody>
       </p:sp>
@@ -6398,8 +5454,8 @@
         </p:nvSpPr>
         <p:spPr>
           <a:xfrm>
-            <a:off x="1143000" y="1645920"/>
-            <a:ext cx="2194560" cy="365760"/>
+            <a:off x="3383280" y="1554480"/>
+            <a:ext cx="457200" cy="914400"/>
           </a:xfrm>
           <a:prstGeom prst="rect">
             <a:avLst/>
@@ -6412,87 +5468,14 @@
           </a:bodyPr>
           <a:lstStyle/>
           <a:p>
-            <a:pPr algn="ctr">
-              <a:defRPr sz="1400" b="1">
-                <a:solidFill>
-                  <a:srgbClr val="1A365D"/>
-                </a:solidFill>
-                <a:latin typeface="Yu Gothic"/>
-              </a:defRPr>
-            </a:pPr>
-            <a:r>
-              <a:t>大学発ベンチャー</a:t>
-            </a:r>
-          </a:p>
-        </p:txBody>
-      </p:sp>
-      <p:sp>
-        <p:nvSpPr>
-          <p:cNvPr id="6" name="TextBox 5"/>
-          <p:cNvSpPr txBox="1"/>
-          <p:nvPr/>
-        </p:nvSpPr>
-        <p:spPr>
-          <a:xfrm>
-            <a:off x="1143000" y="2011680"/>
-            <a:ext cx="2194560" cy="320040"/>
-          </a:xfrm>
-          <a:prstGeom prst="rect">
-            <a:avLst/>
-          </a:prstGeom>
-          <a:noFill/>
-        </p:spPr>
-        <p:txBody>
-          <a:bodyPr wrap="square">
-            <a:spAutoFit/>
-          </a:bodyPr>
-          <a:lstStyle/>
-          <a:p>
-            <a:pPr algn="ctr">
-              <a:defRPr sz="1100" b="0">
-                <a:solidFill>
-                  <a:srgbClr val="4A5568"/>
-                </a:solidFill>
-                <a:latin typeface="Yu Gothic"/>
-              </a:defRPr>
-            </a:pPr>
-            <a:r>
-              <a:t>技術・知見の事業化</a:t>
-            </a:r>
-          </a:p>
-        </p:txBody>
-      </p:sp>
-      <p:sp>
-        <p:nvSpPr>
-          <p:cNvPr id="7" name="TextBox 6"/>
-          <p:cNvSpPr txBox="1"/>
-          <p:nvPr/>
-        </p:nvSpPr>
-        <p:spPr>
-          <a:xfrm>
-            <a:off x="3383280" y="1554480"/>
-            <a:ext cx="457200" cy="914400"/>
-          </a:xfrm>
-          <a:prstGeom prst="rect">
-            <a:avLst/>
-          </a:prstGeom>
-          <a:noFill/>
-        </p:spPr>
-        <p:txBody>
-          <a:bodyPr wrap="square">
-            <a:spAutoFit/>
-          </a:bodyPr>
-          <a:lstStyle/>
-          <a:p>
-            <a:pPr algn="ctr">
-              <a:defRPr sz="2400" b="0">
+            <a:pPr algn="ctr"/>
+            <a:r>
+              <a:rPr sz="2400" b="0">
                 <a:solidFill>
                   <a:srgbClr val="2B6CB0"/>
                 </a:solidFill>
                 <a:latin typeface="Yu Gothic"/>
-              </a:defRPr>
-            </a:pPr>
-            <a:r>
+              </a:rPr>
               <a:t>→</a:t>
             </a:r>
           </a:p>
@@ -6500,7 +5483,7 @@
       </p:sp>
       <p:sp>
         <p:nvSpPr>
-          <p:cNvPr id="8" name="Rounded Rectangle 7"/>
+          <p:cNvPr id="6" name="Rounded Rectangle 5"/>
           <p:cNvSpPr/>
           <p:nvPr/>
         </p:nvSpPr>
@@ -6536,23 +5519,52 @@
           </a:fontRef>
         </p:style>
         <p:txBody>
-          <a:bodyPr rtlCol="0" anchor="ctr"/>
-          <a:lstStyle/>
-          <a:p>
-            <a:pPr algn="ctr"/>
-          </a:p>
-        </p:txBody>
-      </p:sp>
-      <p:sp>
-        <p:nvSpPr>
-          <p:cNvPr id="9" name="TextBox 8"/>
+          <a:bodyPr rtlCol="0" anchor="ctr" wrap="square" lIns="137160" rIns="137160" tIns="73152" bIns="73152"/>
+          <a:lstStyle/>
+          <a:p>
+            <a:pPr algn="ctr">
+              <a:spcBef>
+                <a:spcPts val="200"/>
+              </a:spcBef>
+            </a:pPr>
+            <a:r>
+              <a:rPr sz="1300" b="1">
+                <a:solidFill>
+                  <a:srgbClr val="1A365D"/>
+                </a:solidFill>
+                <a:latin typeface="Yu Gothic"/>
+              </a:rPr>
+              <a:t>法人補助金取得</a:t>
+            </a:r>
+          </a:p>
+          <a:p>
+            <a:pPr algn="ctr">
+              <a:spcBef>
+                <a:spcPts val="200"/>
+              </a:spcBef>
+            </a:pPr>
+            <a:r>
+              <a:rPr sz="1000" b="0">
+                <a:solidFill>
+                  <a:srgbClr val="4A5568"/>
+                </a:solidFill>
+                <a:latin typeface="Yu Gothic"/>
+              </a:rPr>
+              <a:t>公的資金の獲得</a:t>
+            </a:r>
+          </a:p>
+        </p:txBody>
+      </p:sp>
+      <p:sp>
+        <p:nvSpPr>
+          <p:cNvPr id="7" name="TextBox 6"/>
           <p:cNvSpPr txBox="1"/>
           <p:nvPr/>
         </p:nvSpPr>
         <p:spPr>
           <a:xfrm>
-            <a:off x="3886200" y="1645920"/>
-            <a:ext cx="2194560" cy="365760"/>
+            <a:off x="6126480" y="1554480"/>
+            <a:ext cx="457200" cy="914400"/>
           </a:xfrm>
           <a:prstGeom prst="rect">
             <a:avLst/>
@@ -6565,87 +5577,14 @@
           </a:bodyPr>
           <a:lstStyle/>
           <a:p>
-            <a:pPr algn="ctr">
-              <a:defRPr sz="1400" b="1">
-                <a:solidFill>
-                  <a:srgbClr val="1A365D"/>
-                </a:solidFill>
-                <a:latin typeface="Yu Gothic"/>
-              </a:defRPr>
-            </a:pPr>
-            <a:r>
-              <a:t>法人補助金取得</a:t>
-            </a:r>
-          </a:p>
-        </p:txBody>
-      </p:sp>
-      <p:sp>
-        <p:nvSpPr>
-          <p:cNvPr id="10" name="TextBox 9"/>
-          <p:cNvSpPr txBox="1"/>
-          <p:nvPr/>
-        </p:nvSpPr>
-        <p:spPr>
-          <a:xfrm>
-            <a:off x="3886200" y="2011680"/>
-            <a:ext cx="2194560" cy="320040"/>
-          </a:xfrm>
-          <a:prstGeom prst="rect">
-            <a:avLst/>
-          </a:prstGeom>
-          <a:noFill/>
-        </p:spPr>
-        <p:txBody>
-          <a:bodyPr wrap="square">
-            <a:spAutoFit/>
-          </a:bodyPr>
-          <a:lstStyle/>
-          <a:p>
-            <a:pPr algn="ctr">
-              <a:defRPr sz="1100" b="0">
-                <a:solidFill>
-                  <a:srgbClr val="4A5568"/>
-                </a:solidFill>
-                <a:latin typeface="Yu Gothic"/>
-              </a:defRPr>
-            </a:pPr>
-            <a:r>
-              <a:t>公的資金の獲得</a:t>
-            </a:r>
-          </a:p>
-        </p:txBody>
-      </p:sp>
-      <p:sp>
-        <p:nvSpPr>
-          <p:cNvPr id="11" name="TextBox 10"/>
-          <p:cNvSpPr txBox="1"/>
-          <p:nvPr/>
-        </p:nvSpPr>
-        <p:spPr>
-          <a:xfrm>
-            <a:off x="6126480" y="1554480"/>
-            <a:ext cx="457200" cy="914400"/>
-          </a:xfrm>
-          <a:prstGeom prst="rect">
-            <a:avLst/>
-          </a:prstGeom>
-          <a:noFill/>
-        </p:spPr>
-        <p:txBody>
-          <a:bodyPr wrap="square">
-            <a:spAutoFit/>
-          </a:bodyPr>
-          <a:lstStyle/>
-          <a:p>
-            <a:pPr algn="ctr">
-              <a:defRPr sz="2400" b="0">
+            <a:pPr algn="ctr"/>
+            <a:r>
+              <a:rPr sz="2400" b="0">
                 <a:solidFill>
                   <a:srgbClr val="2B6CB0"/>
                 </a:solidFill>
                 <a:latin typeface="Yu Gothic"/>
-              </a:defRPr>
-            </a:pPr>
-            <a:r>
+              </a:rPr>
               <a:t>→</a:t>
             </a:r>
           </a:p>
@@ -6653,7 +5592,7 @@
       </p:sp>
       <p:sp>
         <p:nvSpPr>
-          <p:cNvPr id="12" name="Rounded Rectangle 11"/>
+          <p:cNvPr id="8" name="Rounded Rectangle 7"/>
           <p:cNvSpPr/>
           <p:nvPr/>
         </p:nvSpPr>
@@ -6689,80 +5628,37 @@
           </a:fontRef>
         </p:style>
         <p:txBody>
-          <a:bodyPr rtlCol="0" anchor="ctr"/>
-          <a:lstStyle/>
-          <a:p>
-            <a:pPr algn="ctr"/>
-          </a:p>
-        </p:txBody>
-      </p:sp>
-      <p:sp>
-        <p:nvSpPr>
-          <p:cNvPr id="13" name="TextBox 12"/>
-          <p:cNvSpPr txBox="1"/>
-          <p:nvPr/>
-        </p:nvSpPr>
-        <p:spPr>
-          <a:xfrm>
-            <a:off x="6629400" y="1645920"/>
-            <a:ext cx="2194560" cy="365760"/>
-          </a:xfrm>
-          <a:prstGeom prst="rect">
-            <a:avLst/>
-          </a:prstGeom>
-          <a:noFill/>
-        </p:spPr>
-        <p:txBody>
-          <a:bodyPr wrap="square">
-            <a:spAutoFit/>
-          </a:bodyPr>
+          <a:bodyPr rtlCol="0" anchor="ctr" wrap="square" lIns="137160" rIns="137160" tIns="73152" bIns="73152"/>
           <a:lstStyle/>
           <a:p>
             <a:pPr algn="ctr">
-              <a:defRPr sz="1400" b="1">
+              <a:spcBef>
+                <a:spcPts val="200"/>
+              </a:spcBef>
+            </a:pPr>
+            <a:r>
+              <a:rPr sz="1300" b="1">
                 <a:solidFill>
                   <a:srgbClr val="1A365D"/>
                 </a:solidFill>
                 <a:latin typeface="Yu Gothic"/>
-              </a:defRPr>
-            </a:pPr>
-            <a:r>
+              </a:rPr>
               <a:t>大学への還流</a:t>
             </a:r>
           </a:p>
-        </p:txBody>
-      </p:sp>
-      <p:sp>
-        <p:nvSpPr>
-          <p:cNvPr id="14" name="TextBox 13"/>
-          <p:cNvSpPr txBox="1"/>
-          <p:nvPr/>
-        </p:nvSpPr>
-        <p:spPr>
-          <a:xfrm>
-            <a:off x="6629400" y="2011680"/>
-            <a:ext cx="2194560" cy="320040"/>
-          </a:xfrm>
-          <a:prstGeom prst="rect">
-            <a:avLst/>
-          </a:prstGeom>
-          <a:noFill/>
-        </p:spPr>
-        <p:txBody>
-          <a:bodyPr wrap="square">
-            <a:spAutoFit/>
-          </a:bodyPr>
-          <a:lstStyle/>
           <a:p>
             <a:pPr algn="ctr">
-              <a:defRPr sz="1100" b="0">
+              <a:spcBef>
+                <a:spcPts val="200"/>
+              </a:spcBef>
+            </a:pPr>
+            <a:r>
+              <a:rPr sz="1000" b="0">
                 <a:solidFill>
                   <a:srgbClr val="4A5568"/>
                 </a:solidFill>
                 <a:latin typeface="Yu Gothic"/>
-              </a:defRPr>
-            </a:pPr>
-            <a:r>
+              </a:rPr>
               <a:t>研究基盤の強化</a:t>
             </a:r>
           </a:p>
@@ -6770,7 +5666,7 @@
       </p:sp>
       <p:sp>
         <p:nvSpPr>
-          <p:cNvPr id="15" name="Rounded Rectangle 14"/>
+          <p:cNvPr id="9" name="Rounded Rectangle 8"/>
           <p:cNvSpPr/>
           <p:nvPr/>
         </p:nvSpPr>
@@ -6785,8 +5681,10 @@
           <a:solidFill>
             <a:srgbClr val="FEFCBF"/>
           </a:solidFill>
-          <a:ln>
-            <a:noFill/>
+          <a:ln w="25400">
+            <a:solidFill>
+              <a:srgbClr val="B7791F"/>
+            </a:solidFill>
           </a:ln>
         </p:spPr>
         <p:style>
@@ -6804,66 +5702,52 @@
           </a:fontRef>
         </p:style>
         <p:txBody>
-          <a:bodyPr rtlCol="0" anchor="ctr"/>
-          <a:lstStyle/>
-          <a:p>
-            <a:pPr algn="ctr"/>
-          </a:p>
-        </p:txBody>
-      </p:sp>
-      <p:sp>
-        <p:nvSpPr>
-          <p:cNvPr id="16" name="Rectangle 15"/>
-          <p:cNvSpPr/>
-          <p:nvPr/>
-        </p:nvSpPr>
-        <p:spPr>
-          <a:xfrm>
-            <a:off x="731520" y="2834640"/>
-            <a:ext cx="63500" cy="914400"/>
-          </a:xfrm>
-          <a:prstGeom prst="rect">
-            <a:avLst/>
-          </a:prstGeom>
-          <a:solidFill>
-            <a:srgbClr val="B7791F"/>
-          </a:solidFill>
-          <a:ln>
-            <a:noFill/>
-          </a:ln>
-        </p:spPr>
-        <p:style>
-          <a:lnRef idx="1">
-            <a:schemeClr val="accent1"/>
-          </a:lnRef>
-          <a:fillRef idx="3">
-            <a:schemeClr val="accent1"/>
-          </a:fillRef>
-          <a:effectRef idx="2">
-            <a:schemeClr val="accent1"/>
-          </a:effectRef>
-          <a:fontRef idx="minor">
-            <a:schemeClr val="lt1"/>
-          </a:fontRef>
-        </p:style>
-        <p:txBody>
-          <a:bodyPr rtlCol="0" anchor="ctr"/>
-          <a:lstStyle/>
-          <a:p>
-            <a:pPr algn="ctr"/>
-          </a:p>
-        </p:txBody>
-      </p:sp>
-      <p:sp>
-        <p:nvSpPr>
-          <p:cNvPr id="17" name="TextBox 16"/>
+          <a:bodyPr rtlCol="0" anchor="ctr" wrap="square" lIns="137160" rIns="137160" tIns="73152" bIns="73152"/>
+          <a:lstStyle/>
+          <a:p>
+            <a:pPr algn="l">
+              <a:spcBef>
+                <a:spcPts val="200"/>
+              </a:spcBef>
+            </a:pPr>
+            <a:r>
+              <a:rPr sz="1000" b="1">
+                <a:solidFill>
+                  <a:srgbClr val="B7791F"/>
+                </a:solidFill>
+                <a:latin typeface="Yu Gothic"/>
+              </a:rPr>
+              <a:t>ビジョン</a:t>
+            </a:r>
+          </a:p>
+          <a:p>
+            <a:pPr algn="l">
+              <a:spcBef>
+                <a:spcPts val="200"/>
+              </a:spcBef>
+            </a:pPr>
+            <a:r>
+              <a:rPr sz="1400" b="0">
+                <a:solidFill>
+                  <a:srgbClr val="1A202C"/>
+                </a:solidFill>
+                <a:latin typeface="Yu Gothic"/>
+              </a:rPr>
+              <a:t>大学発ベンチャーが獲得した法人補助金を大学の研究基盤に還流させるサステナブルなモデルを構築</a:t>
+            </a:r>
+          </a:p>
+        </p:txBody>
+      </p:sp>
+      <p:sp>
+        <p:nvSpPr>
+          <p:cNvPr id="10" name="TextBox 9"/>
           <p:cNvSpPr txBox="1"/>
           <p:nvPr/>
         </p:nvSpPr>
         <p:spPr>
           <a:xfrm>
-            <a:off x="960120" y="2907792"/>
-            <a:ext cx="10241280" cy="228600"/>
+            <a:off x="914400" y="4023360"/>
+            <a:ext cx="10058400" cy="1828800"/>
           </a:xfrm>
           <a:prstGeom prst="rect">
             <a:avLst/>
@@ -6875,31 +5759,57 @@
             <a:spAutoFit/>
           </a:bodyPr>
           <a:lstStyle/>
-          <a:p>
-            <a:pPr algn="l">
-              <a:defRPr sz="1000" b="1">
-                <a:solidFill>
-                  <a:srgbClr val="B7791F"/>
-                </a:solidFill>
-                <a:latin typeface="Yu Gothic"/>
-              </a:defRPr>
-            </a:pPr>
-            <a:r>
-              <a:t>ビジョン</a:t>
-            </a:r>
-          </a:p>
-        </p:txBody>
-      </p:sp>
-      <p:sp>
-        <p:nvSpPr>
-          <p:cNvPr id="18" name="TextBox 17"/>
+          <a:p/>
+          <a:p>
+            <a:pPr>
+              <a:spcBef>
+                <a:spcPts val="400"/>
+              </a:spcBef>
+              <a:spcAft>
+                <a:spcPts val="300"/>
+              </a:spcAft>
+            </a:pPr>
+            <a:r>
+              <a:rPr sz="1700" b="0">
+                <a:solidFill>
+                  <a:srgbClr val="1A202C"/>
+                </a:solidFill>
+                <a:latin typeface="Yu Gothic"/>
+              </a:rPr>
+              <a:t>◆ 産学連携の成果を大学運営に直接貢献させる仕組み</a:t>
+            </a:r>
+          </a:p>
+          <a:p>
+            <a:pPr>
+              <a:spcBef>
+                <a:spcPts val="400"/>
+              </a:spcBef>
+              <a:spcAft>
+                <a:spcPts val="300"/>
+              </a:spcAft>
+            </a:pPr>
+            <a:r>
+              <a:rPr sz="1700" b="0">
+                <a:solidFill>
+                  <a:srgbClr val="1A202C"/>
+                </a:solidFill>
+                <a:latin typeface="Yu Gothic"/>
+              </a:rPr>
+              <a:t>◆ ベンチャー → 補助金 → 大学 の好循環サイクル</a:t>
+            </a:r>
+          </a:p>
+        </p:txBody>
+      </p:sp>
+      <p:sp>
+        <p:nvSpPr>
+          <p:cNvPr id="11" name="TextBox 10"/>
           <p:cNvSpPr txBox="1"/>
           <p:nvPr/>
         </p:nvSpPr>
         <p:spPr>
           <a:xfrm>
-            <a:off x="960120" y="3108960"/>
-            <a:ext cx="10241280" cy="594360"/>
+            <a:off x="365760" y="6400800"/>
+            <a:ext cx="914400" cy="274320"/>
           </a:xfrm>
           <a:prstGeom prst="rect">
             <a:avLst/>
@@ -6912,113 +5822,14 @@
           </a:bodyPr>
           <a:lstStyle/>
           <a:p>
-            <a:pPr algn="l">
-              <a:defRPr sz="1500" b="0">
-                <a:solidFill>
-                  <a:srgbClr val="1A202C"/>
-                </a:solidFill>
-                <a:latin typeface="Yu Gothic"/>
-              </a:defRPr>
-            </a:pPr>
-            <a:r>
-              <a:t>大学発ベンチャーが獲得した法人補助金を大学の研究基盤に還流させるサステナブルなモデルを構築</a:t>
-            </a:r>
-          </a:p>
-        </p:txBody>
-      </p:sp>
-      <p:sp>
-        <p:nvSpPr>
-          <p:cNvPr id="19" name="TextBox 18"/>
-          <p:cNvSpPr txBox="1"/>
-          <p:nvPr/>
-        </p:nvSpPr>
-        <p:spPr>
-          <a:xfrm>
-            <a:off x="914400" y="4023360"/>
-            <a:ext cx="10058400" cy="1828800"/>
-          </a:xfrm>
-          <a:prstGeom prst="rect">
-            <a:avLst/>
-          </a:prstGeom>
-          <a:noFill/>
-        </p:spPr>
-        <p:txBody>
-          <a:bodyPr wrap="square">
-            <a:spAutoFit/>
-          </a:bodyPr>
-          <a:lstStyle/>
-          <a:p/>
-          <a:p>
-            <a:pPr>
-              <a:spcBef>
-                <a:spcPts val="400"/>
-              </a:spcBef>
-              <a:spcAft>
-                <a:spcPts val="300"/>
-              </a:spcAft>
-            </a:pPr>
-            <a:r>
-              <a:rPr sz="1700" b="0">
-                <a:solidFill>
-                  <a:srgbClr val="1A202C"/>
-                </a:solidFill>
-                <a:latin typeface="Yu Gothic"/>
-              </a:rPr>
-              <a:t>産学連携の成果を大学運営に直接貢献させる仕組み</a:t>
-            </a:r>
-          </a:p>
-          <a:p>
-            <a:pPr>
-              <a:spcBef>
-                <a:spcPts val="400"/>
-              </a:spcBef>
-              <a:spcAft>
-                <a:spcPts val="300"/>
-              </a:spcAft>
-            </a:pPr>
-            <a:r>
-              <a:rPr sz="1700" b="0">
-                <a:solidFill>
-                  <a:srgbClr val="1A202C"/>
-                </a:solidFill>
-                <a:latin typeface="Yu Gothic"/>
-              </a:rPr>
-              <a:t>ベンチャー → 補助金 → 大学 の好循環サイクル</a:t>
-            </a:r>
-          </a:p>
-        </p:txBody>
-      </p:sp>
-      <p:sp>
-        <p:nvSpPr>
-          <p:cNvPr id="20" name="TextBox 19"/>
-          <p:cNvSpPr txBox="1"/>
-          <p:nvPr/>
-        </p:nvSpPr>
-        <p:spPr>
-          <a:xfrm>
-            <a:off x="365760" y="6400800"/>
-            <a:ext cx="914400" cy="274320"/>
-          </a:xfrm>
-          <a:prstGeom prst="rect">
-            <a:avLst/>
-          </a:prstGeom>
-          <a:noFill/>
-        </p:spPr>
-        <p:txBody>
-          <a:bodyPr wrap="square">
-            <a:spAutoFit/>
-          </a:bodyPr>
-          <a:lstStyle/>
-          <a:p>
-            <a:pPr algn="l">
-              <a:defRPr sz="1000" b="0">
+            <a:pPr algn="l"/>
+            <a:r>
+              <a:rPr sz="1000" b="0">
                 <a:solidFill>
                   <a:srgbClr val="4A5568"/>
                 </a:solidFill>
                 <a:latin typeface="Yu Gothic"/>
-              </a:defRPr>
-            </a:pPr>
-            <a:r>
+              </a:rPr>
               <a:t>13 / 16</a:t>
             </a:r>
           </a:p>
@@ -7072,15 +5883,14 @@
           </a:bodyPr>
           <a:lstStyle/>
           <a:p>
-            <a:pPr algn="l">
-              <a:defRPr sz="3200" b="1">
+            <a:pPr algn="l"/>
+            <a:r>
+              <a:rPr sz="3200" b="1">
                 <a:solidFill>
                   <a:srgbClr val="1A365D"/>
                 </a:solidFill>
                 <a:latin typeface="Yu Gothic"/>
-              </a:defRPr>
-            </a:pPr>
-            <a:r>
+              </a:rPr>
               <a:t>産学連携の展開</a:t>
             </a:r>
           </a:p>
@@ -7148,7 +5958,7 @@
           </a:solidFill>
           <a:ln w="25400">
             <a:solidFill>
-              <a:srgbClr val="E2E8F0"/>
+              <a:srgbClr val="2B6CB0"/>
             </a:solidFill>
           </a:ln>
         </p:spPr>
@@ -7167,25 +5977,330 @@
           </a:fontRef>
         </p:style>
         <p:txBody>
-          <a:bodyPr rtlCol="0" anchor="ctr"/>
-          <a:lstStyle/>
-          <a:p>
-            <a:pPr algn="ctr"/>
-          </a:p>
-        </p:txBody>
-      </p:sp>
-      <p:sp>
-        <p:nvSpPr>
-          <p:cNvPr id="5" name="Rectangle 4"/>
+          <a:bodyPr rtlCol="0" anchor="ctr" wrap="square" lIns="137160" rIns="137160" tIns="73152" bIns="73152"/>
+          <a:lstStyle/>
+          <a:p>
+            <a:pPr algn="l">
+              <a:spcBef>
+                <a:spcPts val="200"/>
+              </a:spcBef>
+            </a:pPr>
+            <a:r>
+              <a:rPr sz="1600" b="1">
+                <a:solidFill>
+                  <a:srgbClr val="1A365D"/>
+                </a:solidFill>
+                <a:latin typeface="Yu Gothic"/>
+              </a:rPr>
+              <a:t>シフト作成の最適化</a:t>
+            </a:r>
+          </a:p>
+          <a:p>
+            <a:pPr algn="l">
+              <a:spcBef>
+                <a:spcPts val="200"/>
+              </a:spcBef>
+            </a:pPr>
+            <a:r>
+              <a:rPr sz="1300" b="0">
+                <a:solidFill>
+                  <a:srgbClr val="1A202C"/>
+                </a:solidFill>
+                <a:latin typeface="Yu Gothic"/>
+              </a:rPr>
+              <a:t>▸ 手法：数値最適化</a:t>
+            </a:r>
+          </a:p>
+          <a:p>
+            <a:pPr algn="l">
+              <a:spcBef>
+                <a:spcPts val="200"/>
+              </a:spcBef>
+            </a:pPr>
+            <a:r>
+              <a:rPr sz="1300" b="0">
+                <a:solidFill>
+                  <a:srgbClr val="1A202C"/>
+                </a:solidFill>
+                <a:latin typeface="Yu Gothic"/>
+              </a:rPr>
+              <a:t>▸ 実績：導入済 ✓</a:t>
+            </a:r>
+          </a:p>
+          <a:p>
+            <a:pPr algn="l">
+              <a:spcBef>
+                <a:spcPts val="200"/>
+              </a:spcBef>
+            </a:pPr>
+            <a:r>
+              <a:rPr sz="1300" b="0">
+                <a:solidFill>
+                  <a:srgbClr val="1A202C"/>
+                </a:solidFill>
+                <a:latin typeface="Yu Gothic"/>
+              </a:rPr>
+              <a:t>▸ 公平性・連続勤務制限</a:t>
+            </a:r>
+          </a:p>
+          <a:p>
+            <a:pPr algn="l">
+              <a:spcBef>
+                <a:spcPts val="200"/>
+              </a:spcBef>
+            </a:pPr>
+            <a:r>
+              <a:rPr sz="1300" b="0">
+                <a:solidFill>
+                  <a:srgbClr val="1A202C"/>
+                </a:solidFill>
+                <a:latin typeface="Yu Gothic"/>
+              </a:rPr>
+              <a:t>▸ コスト削減 + 満足度両立</a:t>
+            </a:r>
+          </a:p>
+        </p:txBody>
+      </p:sp>
+      <p:sp>
+        <p:nvSpPr>
+          <p:cNvPr id="5" name="Rounded Rectangle 4"/>
           <p:cNvSpPr/>
           <p:nvPr/>
         </p:nvSpPr>
         <p:spPr>
           <a:xfrm>
-            <a:off x="731520" y="1188720"/>
-            <a:ext cx="63500" cy="3657600"/>
-          </a:xfrm>
-          <a:prstGeom prst="rect">
+            <a:off x="4480560" y="1188720"/>
+            <a:ext cx="3474720" cy="3657600"/>
+          </a:xfrm>
+          <a:prstGeom prst="roundRect">
+            <a:avLst/>
+          </a:prstGeom>
+          <a:solidFill>
+            <a:srgbClr val="FFFFFF"/>
+          </a:solidFill>
+          <a:ln w="25400">
+            <a:solidFill>
+              <a:srgbClr val="276749"/>
+            </a:solidFill>
+          </a:ln>
+        </p:spPr>
+        <p:style>
+          <a:lnRef idx="1">
+            <a:schemeClr val="accent1"/>
+          </a:lnRef>
+          <a:fillRef idx="3">
+            <a:schemeClr val="accent1"/>
+          </a:fillRef>
+          <a:effectRef idx="2">
+            <a:schemeClr val="accent1"/>
+          </a:effectRef>
+          <a:fontRef idx="minor">
+            <a:schemeClr val="lt1"/>
+          </a:fontRef>
+        </p:style>
+        <p:txBody>
+          <a:bodyPr rtlCol="0" anchor="ctr" wrap="square" lIns="137160" rIns="137160" tIns="73152" bIns="73152"/>
+          <a:lstStyle/>
+          <a:p>
+            <a:pPr algn="l">
+              <a:spcBef>
+                <a:spcPts val="200"/>
+              </a:spcBef>
+            </a:pPr>
+            <a:r>
+              <a:rPr sz="1600" b="1">
+                <a:solidFill>
+                  <a:srgbClr val="1A365D"/>
+                </a:solidFill>
+                <a:latin typeface="Yu Gothic"/>
+              </a:rPr>
+              <a:t>学術支援</a:t>
+            </a:r>
+          </a:p>
+          <a:p>
+            <a:pPr algn="l">
+              <a:spcBef>
+                <a:spcPts val="200"/>
+              </a:spcBef>
+            </a:pPr>
+            <a:r>
+              <a:rPr sz="1300" b="0">
+                <a:solidFill>
+                  <a:srgbClr val="1A202C"/>
+                </a:solidFill>
+                <a:latin typeface="Yu Gothic"/>
+              </a:rPr>
+              <a:t>▸ 実績：導入済 ✓</a:t>
+            </a:r>
+          </a:p>
+          <a:p>
+            <a:pPr algn="l">
+              <a:spcBef>
+                <a:spcPts val="200"/>
+              </a:spcBef>
+            </a:pPr>
+            <a:r>
+              <a:rPr sz="1300" b="0">
+                <a:solidFill>
+                  <a:srgbClr val="1A202C"/>
+                </a:solidFill>
+                <a:latin typeface="Yu Gothic"/>
+              </a:rPr>
+              <a:t>▸ 論文執筆・データ解析</a:t>
+            </a:r>
+          </a:p>
+          <a:p>
+            <a:pPr algn="l">
+              <a:spcBef>
+                <a:spcPts val="200"/>
+              </a:spcBef>
+            </a:pPr>
+            <a:r>
+              <a:rPr sz="1300" b="0">
+                <a:solidFill>
+                  <a:srgbClr val="1A202C"/>
+                </a:solidFill>
+                <a:latin typeface="Yu Gothic"/>
+              </a:rPr>
+              <a:t>▸ 統計コンサルティング</a:t>
+            </a:r>
+          </a:p>
+          <a:p>
+            <a:pPr algn="l">
+              <a:spcBef>
+                <a:spcPts val="200"/>
+              </a:spcBef>
+            </a:pPr>
+            <a:r>
+              <a:rPr sz="1300" b="0">
+                <a:solidFill>
+                  <a:srgbClr val="1A202C"/>
+                </a:solidFill>
+                <a:latin typeface="Yu Gothic"/>
+              </a:rPr>
+              <a:t>▸ 研究デザイン助言</a:t>
+            </a:r>
+          </a:p>
+        </p:txBody>
+      </p:sp>
+      <p:sp>
+        <p:nvSpPr>
+          <p:cNvPr id="6" name="Rounded Rectangle 5"/>
+          <p:cNvSpPr/>
+          <p:nvPr/>
+        </p:nvSpPr>
+        <p:spPr>
+          <a:xfrm>
+            <a:off x="8229600" y="1188720"/>
+            <a:ext cx="3474720" cy="3657600"/>
+          </a:xfrm>
+          <a:prstGeom prst="roundRect">
+            <a:avLst/>
+          </a:prstGeom>
+          <a:solidFill>
+            <a:srgbClr val="FFFFFF"/>
+          </a:solidFill>
+          <a:ln w="25400">
+            <a:solidFill>
+              <a:srgbClr val="553C9A"/>
+            </a:solidFill>
+          </a:ln>
+        </p:spPr>
+        <p:style>
+          <a:lnRef idx="1">
+            <a:schemeClr val="accent1"/>
+          </a:lnRef>
+          <a:fillRef idx="3">
+            <a:schemeClr val="accent1"/>
+          </a:fillRef>
+          <a:effectRef idx="2">
+            <a:schemeClr val="accent1"/>
+          </a:effectRef>
+          <a:fontRef idx="minor">
+            <a:schemeClr val="lt1"/>
+          </a:fontRef>
+        </p:style>
+        <p:txBody>
+          <a:bodyPr rtlCol="0" anchor="ctr" wrap="square" lIns="137160" rIns="137160" tIns="73152" bIns="73152"/>
+          <a:lstStyle/>
+          <a:p>
+            <a:pPr algn="l">
+              <a:spcBef>
+                <a:spcPts val="200"/>
+              </a:spcBef>
+            </a:pPr>
+            <a:r>
+              <a:rPr sz="1600" b="1">
+                <a:solidFill>
+                  <a:srgbClr val="1A365D"/>
+                </a:solidFill>
+                <a:latin typeface="Yu Gothic"/>
+              </a:rPr>
+              <a:t>論文ダッシュボード</a:t>
+            </a:r>
+          </a:p>
+          <a:p>
+            <a:pPr algn="l">
+              <a:spcBef>
+                <a:spcPts val="200"/>
+              </a:spcBef>
+            </a:pPr>
+            <a:r>
+              <a:rPr sz="1300" b="0">
+                <a:solidFill>
+                  <a:srgbClr val="1A202C"/>
+                </a:solidFill>
+                <a:latin typeface="Yu Gothic"/>
+              </a:rPr>
+              <a:t>▸ 論文管理用に自作</a:t>
+            </a:r>
+          </a:p>
+          <a:p>
+            <a:pPr algn="l">
+              <a:spcBef>
+                <a:spcPts val="200"/>
+              </a:spcBef>
+            </a:pPr>
+            <a:r>
+              <a:rPr sz="1300" b="0">
+                <a:solidFill>
+                  <a:srgbClr val="1A202C"/>
+                </a:solidFill>
+                <a:latin typeface="Yu Gothic"/>
+              </a:rPr>
+              <a:t>▸ センターのプロジェクト管理に活用</a:t>
+            </a:r>
+          </a:p>
+          <a:p>
+            <a:pPr algn="l">
+              <a:spcBef>
+                <a:spcPts val="200"/>
+              </a:spcBef>
+            </a:pPr>
+            <a:r>
+              <a:rPr sz="1300" b="0">
+                <a:solidFill>
+                  <a:srgbClr val="1A202C"/>
+                </a:solidFill>
+                <a:latin typeface="Yu Gothic"/>
+              </a:rPr>
+              <a:t>▸ 目標：論文100本</a:t>
+            </a:r>
+          </a:p>
+        </p:txBody>
+      </p:sp>
+      <p:sp>
+        <p:nvSpPr>
+          <p:cNvPr id="7" name="Rounded Rectangle 6"/>
+          <p:cNvSpPr/>
+          <p:nvPr/>
+        </p:nvSpPr>
+        <p:spPr>
+          <a:xfrm>
+            <a:off x="731520" y="5029200"/>
+            <a:ext cx="630936" cy="274320"/>
+          </a:xfrm>
+          <a:prstGeom prst="roundRect">
             <a:avLst/>
           </a:prstGeom>
           <a:solidFill>
@@ -7210,145 +6325,22 @@
           </a:fontRef>
         </p:style>
         <p:txBody>
-          <a:bodyPr rtlCol="0" anchor="ctr"/>
-          <a:lstStyle/>
-          <a:p>
-            <a:pPr algn="ctr"/>
-          </a:p>
-        </p:txBody>
-      </p:sp>
-      <p:sp>
-        <p:nvSpPr>
-          <p:cNvPr id="6" name="TextBox 5"/>
-          <p:cNvSpPr txBox="1"/>
-          <p:nvPr/>
-        </p:nvSpPr>
-        <p:spPr>
-          <a:xfrm>
-            <a:off x="914400" y="1371600"/>
-            <a:ext cx="3108960" cy="365760"/>
-          </a:xfrm>
-          <a:prstGeom prst="rect">
-            <a:avLst/>
-          </a:prstGeom>
-          <a:noFill/>
-        </p:spPr>
-        <p:txBody>
-          <a:bodyPr wrap="square">
-            <a:spAutoFit/>
-          </a:bodyPr>
-          <a:lstStyle/>
-          <a:p>
-            <a:pPr algn="l">
-              <a:defRPr sz="1700" b="1">
-                <a:solidFill>
-                  <a:srgbClr val="1A365D"/>
-                </a:solidFill>
-                <a:latin typeface="Yu Gothic"/>
-              </a:defRPr>
-            </a:pPr>
-            <a:r>
-              <a:t>シフト作成の最適化</a:t>
-            </a:r>
-          </a:p>
-        </p:txBody>
-      </p:sp>
-      <p:sp>
-        <p:nvSpPr>
-          <p:cNvPr id="7" name="TextBox 6"/>
-          <p:cNvSpPr txBox="1"/>
-          <p:nvPr/>
-        </p:nvSpPr>
-        <p:spPr>
-          <a:xfrm>
-            <a:off x="914400" y="1828800"/>
-            <a:ext cx="3108960" cy="2286000"/>
-          </a:xfrm>
-          <a:prstGeom prst="rect">
-            <a:avLst/>
-          </a:prstGeom>
-          <a:noFill/>
-        </p:spPr>
-        <p:txBody>
-          <a:bodyPr wrap="square">
-            <a:spAutoFit/>
-          </a:bodyPr>
-          <a:lstStyle/>
-          <a:p/>
-          <a:p>
-            <a:pPr>
-              <a:spcBef>
-                <a:spcPts val="400"/>
-              </a:spcBef>
-              <a:spcAft>
-                <a:spcPts val="300"/>
-              </a:spcAft>
-            </a:pPr>
-            <a:r>
-              <a:rPr sz="1300" b="0">
-                <a:solidFill>
-                  <a:srgbClr val="1A202C"/>
-                </a:solidFill>
-                <a:latin typeface="Yu Gothic"/>
-              </a:rPr>
-              <a:t>▸ 手法：数値最適化</a:t>
-            </a:r>
-          </a:p>
-          <a:p>
-            <a:pPr>
-              <a:spcBef>
-                <a:spcPts val="400"/>
-              </a:spcBef>
-              <a:spcAft>
-                <a:spcPts val="300"/>
-              </a:spcAft>
-            </a:pPr>
-            <a:r>
-              <a:rPr sz="1300" b="0">
-                <a:solidFill>
-                  <a:srgbClr val="1A202C"/>
-                </a:solidFill>
-                <a:latin typeface="Yu Gothic"/>
-              </a:rPr>
-              <a:t>▸ 実績：導入済 ✓</a:t>
-            </a:r>
-          </a:p>
-          <a:p>
-            <a:pPr>
-              <a:spcBef>
-                <a:spcPts val="400"/>
-              </a:spcBef>
-              <a:spcAft>
-                <a:spcPts val="300"/>
-              </a:spcAft>
-            </a:pPr>
-            <a:r>
-              <a:rPr sz="1300" b="0">
-                <a:solidFill>
-                  <a:srgbClr val="1A202C"/>
-                </a:solidFill>
-                <a:latin typeface="Yu Gothic"/>
-              </a:rPr>
-              <a:t>▸ 公平性・連続勤務制限</a:t>
-            </a:r>
-          </a:p>
-          <a:p>
-            <a:pPr>
-              <a:spcBef>
-                <a:spcPts val="400"/>
-              </a:spcBef>
-              <a:spcAft>
-                <a:spcPts val="300"/>
-              </a:spcAft>
-            </a:pPr>
-            <a:r>
-              <a:rPr sz="1300" b="0">
-                <a:solidFill>
-                  <a:srgbClr val="1A202C"/>
-                </a:solidFill>
-                <a:latin typeface="Yu Gothic"/>
-              </a:rPr>
-              <a:t>▸ コスト削減 + 満足度両立</a:t>
+          <a:bodyPr rtlCol="0" anchor="ctr" wrap="square" lIns="137160" rIns="137160" tIns="73152" bIns="73152"/>
+          <a:lstStyle/>
+          <a:p>
+            <a:pPr algn="ctr">
+              <a:spcBef>
+                <a:spcPts val="200"/>
+              </a:spcBef>
+            </a:pPr>
+            <a:r>
+              <a:rPr sz="1000" b="1">
+                <a:solidFill>
+                  <a:srgbClr val="FFFFFF"/>
+                </a:solidFill>
+                <a:latin typeface="Yu Gothic"/>
+              </a:rPr>
+              <a:t>最適化</a:t>
             </a:r>
           </a:p>
         </p:txBody>
@@ -7361,8 +6353,8 @@
         </p:nvSpPr>
         <p:spPr>
           <a:xfrm>
-            <a:off x="914400" y="4114800"/>
-            <a:ext cx="630936" cy="274320"/>
+            <a:off x="1435608" y="5029200"/>
+            <a:ext cx="475488" cy="274320"/>
           </a:xfrm>
           <a:prstGeom prst="roundRect">
             <a:avLst/>
@@ -7389,185 +6381,38 @@
           </a:fontRef>
         </p:style>
         <p:txBody>
-          <a:bodyPr rtlCol="0" anchor="ctr"/>
-          <a:lstStyle/>
-          <a:p>
-            <a:pPr algn="ctr"/>
-          </a:p>
-        </p:txBody>
-      </p:sp>
-      <p:sp>
-        <p:nvSpPr>
-          <p:cNvPr id="9" name="TextBox 8"/>
-          <p:cNvSpPr txBox="1"/>
-          <p:nvPr/>
-        </p:nvSpPr>
-        <p:spPr>
-          <a:xfrm>
-            <a:off x="914400" y="4123944"/>
-            <a:ext cx="630936" cy="256032"/>
-          </a:xfrm>
-          <a:prstGeom prst="rect">
-            <a:avLst/>
-          </a:prstGeom>
-          <a:noFill/>
-        </p:spPr>
-        <p:txBody>
-          <a:bodyPr wrap="square">
-            <a:spAutoFit/>
-          </a:bodyPr>
+          <a:bodyPr rtlCol="0" anchor="ctr" wrap="square" lIns="137160" rIns="137160" tIns="73152" bIns="73152"/>
           <a:lstStyle/>
           <a:p>
             <a:pPr algn="ctr">
-              <a:defRPr sz="1000" b="1">
+              <a:spcBef>
+                <a:spcPts val="200"/>
+              </a:spcBef>
+            </a:pPr>
+            <a:r>
+              <a:rPr sz="1000" b="1">
                 <a:solidFill>
                   <a:srgbClr val="FFFFFF"/>
                 </a:solidFill>
                 <a:latin typeface="Yu Gothic"/>
-              </a:defRPr>
-            </a:pPr>
-            <a:r>
-              <a:t>最適化</a:t>
-            </a:r>
-          </a:p>
-        </p:txBody>
-      </p:sp>
-      <p:sp>
-        <p:nvSpPr>
-          <p:cNvPr id="10" name="Rounded Rectangle 9"/>
+              </a:rPr>
+              <a:t>OR</a:t>
+            </a:r>
+          </a:p>
+        </p:txBody>
+      </p:sp>
+      <p:sp>
+        <p:nvSpPr>
+          <p:cNvPr id="9" name="Rounded Rectangle 8"/>
           <p:cNvSpPr/>
           <p:nvPr/>
         </p:nvSpPr>
         <p:spPr>
           <a:xfrm>
-            <a:off x="1618488" y="4114800"/>
+            <a:off x="4480560" y="5029200"/>
             <a:ext cx="475488" cy="274320"/>
           </a:xfrm>
           <a:prstGeom prst="roundRect">
-            <a:avLst/>
-          </a:prstGeom>
-          <a:solidFill>
-            <a:srgbClr val="2B6CB0"/>
-          </a:solidFill>
-          <a:ln>
-            <a:noFill/>
-          </a:ln>
-        </p:spPr>
-        <p:style>
-          <a:lnRef idx="1">
-            <a:schemeClr val="accent1"/>
-          </a:lnRef>
-          <a:fillRef idx="3">
-            <a:schemeClr val="accent1"/>
-          </a:fillRef>
-          <a:effectRef idx="2">
-            <a:schemeClr val="accent1"/>
-          </a:effectRef>
-          <a:fontRef idx="minor">
-            <a:schemeClr val="lt1"/>
-          </a:fontRef>
-        </p:style>
-        <p:txBody>
-          <a:bodyPr rtlCol="0" anchor="ctr"/>
-          <a:lstStyle/>
-          <a:p>
-            <a:pPr algn="ctr"/>
-          </a:p>
-        </p:txBody>
-      </p:sp>
-      <p:sp>
-        <p:nvSpPr>
-          <p:cNvPr id="11" name="TextBox 10"/>
-          <p:cNvSpPr txBox="1"/>
-          <p:nvPr/>
-        </p:nvSpPr>
-        <p:spPr>
-          <a:xfrm>
-            <a:off x="1618488" y="4123944"/>
-            <a:ext cx="475488" cy="256032"/>
-          </a:xfrm>
-          <a:prstGeom prst="rect">
-            <a:avLst/>
-          </a:prstGeom>
-          <a:noFill/>
-        </p:spPr>
-        <p:txBody>
-          <a:bodyPr wrap="square">
-            <a:spAutoFit/>
-          </a:bodyPr>
-          <a:lstStyle/>
-          <a:p>
-            <a:pPr algn="ctr">
-              <a:defRPr sz="1000" b="1">
-                <a:solidFill>
-                  <a:srgbClr val="FFFFFF"/>
-                </a:solidFill>
-                <a:latin typeface="Yu Gothic"/>
-              </a:defRPr>
-            </a:pPr>
-            <a:r>
-              <a:t>OR</a:t>
-            </a:r>
-          </a:p>
-        </p:txBody>
-      </p:sp>
-      <p:sp>
-        <p:nvSpPr>
-          <p:cNvPr id="12" name="Rounded Rectangle 11"/>
-          <p:cNvSpPr/>
-          <p:nvPr/>
-        </p:nvSpPr>
-        <p:spPr>
-          <a:xfrm>
-            <a:off x="4480560" y="1188720"/>
-            <a:ext cx="3474720" cy="3657600"/>
-          </a:xfrm>
-          <a:prstGeom prst="roundRect">
-            <a:avLst/>
-          </a:prstGeom>
-          <a:solidFill>
-            <a:srgbClr val="FFFFFF"/>
-          </a:solidFill>
-          <a:ln w="25400">
-            <a:solidFill>
-              <a:srgbClr val="E2E8F0"/>
-            </a:solidFill>
-          </a:ln>
-        </p:spPr>
-        <p:style>
-          <a:lnRef idx="1">
-            <a:schemeClr val="accent1"/>
-          </a:lnRef>
-          <a:fillRef idx="3">
-            <a:schemeClr val="accent1"/>
-          </a:fillRef>
-          <a:effectRef idx="2">
-            <a:schemeClr val="accent1"/>
-          </a:effectRef>
-          <a:fontRef idx="minor">
-            <a:schemeClr val="lt1"/>
-          </a:fontRef>
-        </p:style>
-        <p:txBody>
-          <a:bodyPr rtlCol="0" anchor="ctr"/>
-          <a:lstStyle/>
-          <a:p>
-            <a:pPr algn="ctr"/>
-          </a:p>
-        </p:txBody>
-      </p:sp>
-      <p:sp>
-        <p:nvSpPr>
-          <p:cNvPr id="13" name="Rectangle 12"/>
-          <p:cNvSpPr/>
-          <p:nvPr/>
-        </p:nvSpPr>
-        <p:spPr>
-          <a:xfrm>
-            <a:off x="4480560" y="1188720"/>
-            <a:ext cx="63500" cy="3657600"/>
-          </a:xfrm>
-          <a:prstGeom prst="rect">
             <a:avLst/>
           </a:prstGeom>
           <a:solidFill>
@@ -7592,159 +6437,36 @@
           </a:fontRef>
         </p:style>
         <p:txBody>
-          <a:bodyPr rtlCol="0" anchor="ctr"/>
-          <a:lstStyle/>
-          <a:p>
-            <a:pPr algn="ctr"/>
-          </a:p>
-        </p:txBody>
-      </p:sp>
-      <p:sp>
-        <p:nvSpPr>
-          <p:cNvPr id="14" name="TextBox 13"/>
-          <p:cNvSpPr txBox="1"/>
-          <p:nvPr/>
-        </p:nvSpPr>
-        <p:spPr>
-          <a:xfrm>
-            <a:off x="4663440" y="1371600"/>
-            <a:ext cx="3108960" cy="365760"/>
-          </a:xfrm>
-          <a:prstGeom prst="rect">
-            <a:avLst/>
-          </a:prstGeom>
-          <a:noFill/>
-        </p:spPr>
-        <p:txBody>
-          <a:bodyPr wrap="square">
-            <a:spAutoFit/>
-          </a:bodyPr>
-          <a:lstStyle/>
-          <a:p>
-            <a:pPr algn="l">
-              <a:defRPr sz="1700" b="1">
-                <a:solidFill>
-                  <a:srgbClr val="1A365D"/>
-                </a:solidFill>
-                <a:latin typeface="Yu Gothic"/>
-              </a:defRPr>
-            </a:pPr>
-            <a:r>
-              <a:t>学術支援</a:t>
-            </a:r>
-          </a:p>
-        </p:txBody>
-      </p:sp>
-      <p:sp>
-        <p:nvSpPr>
-          <p:cNvPr id="15" name="TextBox 14"/>
-          <p:cNvSpPr txBox="1"/>
-          <p:nvPr/>
-        </p:nvSpPr>
-        <p:spPr>
-          <a:xfrm>
-            <a:off x="4663440" y="1828800"/>
-            <a:ext cx="3108960" cy="2286000"/>
-          </a:xfrm>
-          <a:prstGeom prst="rect">
-            <a:avLst/>
-          </a:prstGeom>
-          <a:noFill/>
-        </p:spPr>
-        <p:txBody>
-          <a:bodyPr wrap="square">
-            <a:spAutoFit/>
-          </a:bodyPr>
-          <a:lstStyle/>
-          <a:p/>
-          <a:p>
-            <a:pPr>
-              <a:spcBef>
-                <a:spcPts val="400"/>
-              </a:spcBef>
-              <a:spcAft>
-                <a:spcPts val="300"/>
-              </a:spcAft>
-            </a:pPr>
-            <a:r>
-              <a:rPr sz="1300" b="0">
-                <a:solidFill>
-                  <a:srgbClr val="1A202C"/>
-                </a:solidFill>
-                <a:latin typeface="Yu Gothic"/>
-              </a:rPr>
-              <a:t>▸ 実績：導入済 ✓</a:t>
-            </a:r>
-          </a:p>
-          <a:p>
-            <a:pPr>
-              <a:spcBef>
-                <a:spcPts val="400"/>
-              </a:spcBef>
-              <a:spcAft>
-                <a:spcPts val="300"/>
-              </a:spcAft>
-            </a:pPr>
-            <a:r>
-              <a:rPr sz="1300" b="0">
-                <a:solidFill>
-                  <a:srgbClr val="1A202C"/>
-                </a:solidFill>
-                <a:latin typeface="Yu Gothic"/>
-              </a:rPr>
-              <a:t>▸ 論文執筆・データ解析</a:t>
-            </a:r>
-          </a:p>
-          <a:p>
-            <a:pPr>
-              <a:spcBef>
-                <a:spcPts val="400"/>
-              </a:spcBef>
-              <a:spcAft>
-                <a:spcPts val="300"/>
-              </a:spcAft>
-            </a:pPr>
-            <a:r>
-              <a:rPr sz="1300" b="0">
-                <a:solidFill>
-                  <a:srgbClr val="1A202C"/>
-                </a:solidFill>
-                <a:latin typeface="Yu Gothic"/>
-              </a:rPr>
-              <a:t>▸ 統計コンサルティング</a:t>
-            </a:r>
-          </a:p>
-          <a:p>
-            <a:pPr>
-              <a:spcBef>
-                <a:spcPts val="400"/>
-              </a:spcBef>
-              <a:spcAft>
-                <a:spcPts val="300"/>
-              </a:spcAft>
-            </a:pPr>
-            <a:r>
-              <a:rPr sz="1300" b="0">
-                <a:solidFill>
-                  <a:srgbClr val="1A202C"/>
-                </a:solidFill>
-                <a:latin typeface="Yu Gothic"/>
-              </a:rPr>
-              <a:t>▸ 研究デザイン助言</a:t>
-            </a:r>
-          </a:p>
-        </p:txBody>
-      </p:sp>
-      <p:sp>
-        <p:nvSpPr>
-          <p:cNvPr id="16" name="Rounded Rectangle 15"/>
+          <a:bodyPr rtlCol="0" anchor="ctr" wrap="square" lIns="137160" rIns="137160" tIns="73152" bIns="73152"/>
+          <a:lstStyle/>
+          <a:p>
+            <a:pPr algn="ctr">
+              <a:spcBef>
+                <a:spcPts val="200"/>
+              </a:spcBef>
+            </a:pPr>
+            <a:r>
+              <a:rPr sz="1000" b="1">
+                <a:solidFill>
+                  <a:srgbClr val="FFFFFF"/>
+                </a:solidFill>
+                <a:latin typeface="Yu Gothic"/>
+              </a:rPr>
+              <a:t>統計</a:t>
+            </a:r>
+          </a:p>
+        </p:txBody>
+      </p:sp>
+      <p:sp>
+        <p:nvSpPr>
+          <p:cNvPr id="10" name="Rounded Rectangle 9"/>
           <p:cNvSpPr/>
           <p:nvPr/>
         </p:nvSpPr>
         <p:spPr>
           <a:xfrm>
-            <a:off x="4663440" y="4114800"/>
-            <a:ext cx="475488" cy="274320"/>
+            <a:off x="5029200" y="5029200"/>
+            <a:ext cx="786384" cy="274320"/>
           </a:xfrm>
           <a:prstGeom prst="roundRect">
             <a:avLst/>
@@ -7771,185 +6493,38 @@
           </a:fontRef>
         </p:style>
         <p:txBody>
-          <a:bodyPr rtlCol="0" anchor="ctr"/>
-          <a:lstStyle/>
-          <a:p>
-            <a:pPr algn="ctr"/>
-          </a:p>
-        </p:txBody>
-      </p:sp>
-      <p:sp>
-        <p:nvSpPr>
-          <p:cNvPr id="17" name="TextBox 16"/>
-          <p:cNvSpPr txBox="1"/>
-          <p:nvPr/>
-        </p:nvSpPr>
-        <p:spPr>
-          <a:xfrm>
-            <a:off x="4663440" y="4123944"/>
-            <a:ext cx="475488" cy="256032"/>
-          </a:xfrm>
-          <a:prstGeom prst="rect">
-            <a:avLst/>
-          </a:prstGeom>
-          <a:noFill/>
-        </p:spPr>
-        <p:txBody>
-          <a:bodyPr wrap="square">
-            <a:spAutoFit/>
-          </a:bodyPr>
+          <a:bodyPr rtlCol="0" anchor="ctr" wrap="square" lIns="137160" rIns="137160" tIns="73152" bIns="73152"/>
           <a:lstStyle/>
           <a:p>
             <a:pPr algn="ctr">
-              <a:defRPr sz="1000" b="1">
+              <a:spcBef>
+                <a:spcPts val="200"/>
+              </a:spcBef>
+            </a:pPr>
+            <a:r>
+              <a:rPr sz="1000" b="1">
                 <a:solidFill>
                   <a:srgbClr val="FFFFFF"/>
                 </a:solidFill>
                 <a:latin typeface="Yu Gothic"/>
-              </a:defRPr>
-            </a:pPr>
-            <a:r>
-              <a:t>統計</a:t>
-            </a:r>
-          </a:p>
-        </p:txBody>
-      </p:sp>
-      <p:sp>
-        <p:nvSpPr>
-          <p:cNvPr id="18" name="Rounded Rectangle 17"/>
+              </a:rPr>
+              <a:t>論文支援</a:t>
+            </a:r>
+          </a:p>
+        </p:txBody>
+      </p:sp>
+      <p:sp>
+        <p:nvSpPr>
+          <p:cNvPr id="11" name="Rounded Rectangle 10"/>
           <p:cNvSpPr/>
           <p:nvPr/>
         </p:nvSpPr>
         <p:spPr>
           <a:xfrm>
-            <a:off x="5212080" y="4114800"/>
-            <a:ext cx="786384" cy="274320"/>
+            <a:off x="8229600" y="5029200"/>
+            <a:ext cx="941832" cy="274320"/>
           </a:xfrm>
           <a:prstGeom prst="roundRect">
-            <a:avLst/>
-          </a:prstGeom>
-          <a:solidFill>
-            <a:srgbClr val="276749"/>
-          </a:solidFill>
-          <a:ln>
-            <a:noFill/>
-          </a:ln>
-        </p:spPr>
-        <p:style>
-          <a:lnRef idx="1">
-            <a:schemeClr val="accent1"/>
-          </a:lnRef>
-          <a:fillRef idx="3">
-            <a:schemeClr val="accent1"/>
-          </a:fillRef>
-          <a:effectRef idx="2">
-            <a:schemeClr val="accent1"/>
-          </a:effectRef>
-          <a:fontRef idx="minor">
-            <a:schemeClr val="lt1"/>
-          </a:fontRef>
-        </p:style>
-        <p:txBody>
-          <a:bodyPr rtlCol="0" anchor="ctr"/>
-          <a:lstStyle/>
-          <a:p>
-            <a:pPr algn="ctr"/>
-          </a:p>
-        </p:txBody>
-      </p:sp>
-      <p:sp>
-        <p:nvSpPr>
-          <p:cNvPr id="19" name="TextBox 18"/>
-          <p:cNvSpPr txBox="1"/>
-          <p:nvPr/>
-        </p:nvSpPr>
-        <p:spPr>
-          <a:xfrm>
-            <a:off x="5212080" y="4123944"/>
-            <a:ext cx="786384" cy="256032"/>
-          </a:xfrm>
-          <a:prstGeom prst="rect">
-            <a:avLst/>
-          </a:prstGeom>
-          <a:noFill/>
-        </p:spPr>
-        <p:txBody>
-          <a:bodyPr wrap="square">
-            <a:spAutoFit/>
-          </a:bodyPr>
-          <a:lstStyle/>
-          <a:p>
-            <a:pPr algn="ctr">
-              <a:defRPr sz="1000" b="1">
-                <a:solidFill>
-                  <a:srgbClr val="FFFFFF"/>
-                </a:solidFill>
-                <a:latin typeface="Yu Gothic"/>
-              </a:defRPr>
-            </a:pPr>
-            <a:r>
-              <a:t>論文支援</a:t>
-            </a:r>
-          </a:p>
-        </p:txBody>
-      </p:sp>
-      <p:sp>
-        <p:nvSpPr>
-          <p:cNvPr id="20" name="Rounded Rectangle 19"/>
-          <p:cNvSpPr/>
-          <p:nvPr/>
-        </p:nvSpPr>
-        <p:spPr>
-          <a:xfrm>
-            <a:off x="8229600" y="1188720"/>
-            <a:ext cx="3474720" cy="3657600"/>
-          </a:xfrm>
-          <a:prstGeom prst="roundRect">
-            <a:avLst/>
-          </a:prstGeom>
-          <a:solidFill>
-            <a:srgbClr val="FFFFFF"/>
-          </a:solidFill>
-          <a:ln w="25400">
-            <a:solidFill>
-              <a:srgbClr val="E2E8F0"/>
-            </a:solidFill>
-          </a:ln>
-        </p:spPr>
-        <p:style>
-          <a:lnRef idx="1">
-            <a:schemeClr val="accent1"/>
-          </a:lnRef>
-          <a:fillRef idx="3">
-            <a:schemeClr val="accent1"/>
-          </a:fillRef>
-          <a:effectRef idx="2">
-            <a:schemeClr val="accent1"/>
-          </a:effectRef>
-          <a:fontRef idx="minor">
-            <a:schemeClr val="lt1"/>
-          </a:fontRef>
-        </p:style>
-        <p:txBody>
-          <a:bodyPr rtlCol="0" anchor="ctr"/>
-          <a:lstStyle/>
-          <a:p>
-            <a:pPr algn="ctr"/>
-          </a:p>
-        </p:txBody>
-      </p:sp>
-      <p:sp>
-        <p:nvSpPr>
-          <p:cNvPr id="21" name="Rectangle 20"/>
-          <p:cNvSpPr/>
-          <p:nvPr/>
-        </p:nvSpPr>
-        <p:spPr>
-          <a:xfrm>
-            <a:off x="8229600" y="1188720"/>
-            <a:ext cx="63500" cy="3657600"/>
-          </a:xfrm>
-          <a:prstGeom prst="rect">
             <a:avLst/>
           </a:prstGeom>
           <a:solidFill>
@@ -7974,149 +6549,47 @@
           </a:fontRef>
         </p:style>
         <p:txBody>
-          <a:bodyPr rtlCol="0" anchor="ctr"/>
-          <a:lstStyle/>
-          <a:p>
-            <a:pPr algn="ctr"/>
-          </a:p>
-        </p:txBody>
-      </p:sp>
-      <p:sp>
-        <p:nvSpPr>
-          <p:cNvPr id="22" name="TextBox 21"/>
-          <p:cNvSpPr txBox="1"/>
-          <p:nvPr/>
-        </p:nvSpPr>
-        <p:spPr>
-          <a:xfrm>
-            <a:off x="8412480" y="1371600"/>
-            <a:ext cx="3108960" cy="365760"/>
-          </a:xfrm>
-          <a:prstGeom prst="rect">
-            <a:avLst/>
-          </a:prstGeom>
-          <a:noFill/>
-        </p:spPr>
-        <p:txBody>
-          <a:bodyPr wrap="square">
-            <a:spAutoFit/>
-          </a:bodyPr>
-          <a:lstStyle/>
-          <a:p>
-            <a:pPr algn="l">
-              <a:defRPr sz="1700" b="1">
-                <a:solidFill>
-                  <a:srgbClr val="1A365D"/>
-                </a:solidFill>
-                <a:latin typeface="Yu Gothic"/>
-              </a:defRPr>
-            </a:pPr>
-            <a:r>
-              <a:t>論文ダッシュボード</a:t>
-            </a:r>
-          </a:p>
-        </p:txBody>
-      </p:sp>
-      <p:sp>
-        <p:nvSpPr>
-          <p:cNvPr id="23" name="TextBox 22"/>
-          <p:cNvSpPr txBox="1"/>
-          <p:nvPr/>
-        </p:nvSpPr>
-        <p:spPr>
-          <a:xfrm>
-            <a:off x="8412480" y="1828800"/>
-            <a:ext cx="3108960" cy="2286000"/>
-          </a:xfrm>
-          <a:prstGeom prst="rect">
-            <a:avLst/>
-          </a:prstGeom>
-          <a:noFill/>
-        </p:spPr>
-        <p:txBody>
-          <a:bodyPr wrap="square">
-            <a:spAutoFit/>
-          </a:bodyPr>
-          <a:lstStyle/>
-          <a:p/>
-          <a:p>
-            <a:pPr>
-              <a:spcBef>
-                <a:spcPts val="400"/>
-              </a:spcBef>
-              <a:spcAft>
-                <a:spcPts val="300"/>
-              </a:spcAft>
-            </a:pPr>
-            <a:r>
-              <a:rPr sz="1300" b="0">
-                <a:solidFill>
-                  <a:srgbClr val="1A202C"/>
-                </a:solidFill>
-                <a:latin typeface="Yu Gothic"/>
-              </a:rPr>
-              <a:t>▸ 論文管理用に自作</a:t>
-            </a:r>
-          </a:p>
-          <a:p>
-            <a:pPr>
-              <a:spcBef>
-                <a:spcPts val="400"/>
-              </a:spcBef>
-              <a:spcAft>
-                <a:spcPts val="300"/>
-              </a:spcAft>
-            </a:pPr>
-            <a:r>
-              <a:rPr sz="1300" b="0">
-                <a:solidFill>
-                  <a:srgbClr val="1A202C"/>
-                </a:solidFill>
-                <a:latin typeface="Yu Gothic"/>
-              </a:rPr>
-              <a:t>▸ センターのプロジェクト管理に活用</a:t>
-            </a:r>
-          </a:p>
-          <a:p>
-            <a:pPr>
-              <a:spcBef>
-                <a:spcPts val="400"/>
-              </a:spcBef>
-              <a:spcAft>
-                <a:spcPts val="300"/>
-              </a:spcAft>
-            </a:pPr>
-            <a:r>
-              <a:rPr sz="1300" b="0">
-                <a:solidFill>
-                  <a:srgbClr val="1A202C"/>
-                </a:solidFill>
-                <a:latin typeface="Yu Gothic"/>
-              </a:rPr>
-              <a:t>▸ 目標：論文100本</a:t>
-            </a:r>
-          </a:p>
-        </p:txBody>
-      </p:sp>
-      <p:sp>
-        <p:nvSpPr>
-          <p:cNvPr id="24" name="Rounded Rectangle 23"/>
+          <a:bodyPr rtlCol="0" anchor="ctr" wrap="square" lIns="137160" rIns="137160" tIns="73152" bIns="73152"/>
+          <a:lstStyle/>
+          <a:p>
+            <a:pPr algn="ctr">
+              <a:spcBef>
+                <a:spcPts val="200"/>
+              </a:spcBef>
+            </a:pPr>
+            <a:r>
+              <a:rPr sz="1000" b="1">
+                <a:solidFill>
+                  <a:srgbClr val="FFFFFF"/>
+                </a:solidFill>
+                <a:latin typeface="Yu Gothic"/>
+              </a:rPr>
+              <a:t>管理ツール</a:t>
+            </a:r>
+          </a:p>
+        </p:txBody>
+      </p:sp>
+      <p:sp>
+        <p:nvSpPr>
+          <p:cNvPr id="12" name="Rounded Rectangle 11"/>
           <p:cNvSpPr/>
           <p:nvPr/>
         </p:nvSpPr>
         <p:spPr>
           <a:xfrm>
-            <a:off x="8412480" y="4114800"/>
-            <a:ext cx="941832" cy="274320"/>
+            <a:off x="731520" y="5486400"/>
+            <a:ext cx="10698480" cy="731520"/>
           </a:xfrm>
           <a:prstGeom prst="roundRect">
             <a:avLst/>
           </a:prstGeom>
           <a:solidFill>
-            <a:srgbClr val="553C9A"/>
+            <a:srgbClr val="C6F6D5"/>
           </a:solidFill>
-          <a:ln>
-            <a:noFill/>
+          <a:ln w="25400">
+            <a:solidFill>
+              <a:srgbClr val="276749"/>
+            </a:solidFill>
           </a:ln>
         </p:spPr>
         <p:style>
@@ -8134,23 +6607,52 @@
           </a:fontRef>
         </p:style>
         <p:txBody>
-          <a:bodyPr rtlCol="0" anchor="ctr"/>
-          <a:lstStyle/>
-          <a:p>
-            <a:pPr algn="ctr"/>
-          </a:p>
-        </p:txBody>
-      </p:sp>
-      <p:sp>
-        <p:nvSpPr>
-          <p:cNvPr id="25" name="TextBox 24"/>
+          <a:bodyPr rtlCol="0" anchor="ctr" wrap="square" lIns="137160" rIns="137160" tIns="73152" bIns="73152"/>
+          <a:lstStyle/>
+          <a:p>
+            <a:pPr algn="l">
+              <a:spcBef>
+                <a:spcPts val="200"/>
+              </a:spcBef>
+            </a:pPr>
+            <a:r>
+              <a:rPr sz="1000" b="1">
+                <a:solidFill>
+                  <a:srgbClr val="276749"/>
+                </a:solidFill>
+                <a:latin typeface="Yu Gothic"/>
+              </a:rPr>
+              <a:t>目標</a:t>
+            </a:r>
+          </a:p>
+          <a:p>
+            <a:pPr algn="l">
+              <a:spcBef>
+                <a:spcPts val="200"/>
+              </a:spcBef>
+            </a:pPr>
+            <a:r>
+              <a:rPr sz="1400" b="0">
+                <a:solidFill>
+                  <a:srgbClr val="1A202C"/>
+                </a:solidFill>
+                <a:latin typeface="Yu Gothic"/>
+              </a:rPr>
+              <a:t>導入実績のあるシフト最適化・学術支援を基盤に学内外へ展開。論文ダッシュボードでセンター業務を効率化。</a:t>
+            </a:r>
+          </a:p>
+        </p:txBody>
+      </p:sp>
+      <p:sp>
+        <p:nvSpPr>
+          <p:cNvPr id="13" name="TextBox 12"/>
           <p:cNvSpPr txBox="1"/>
           <p:nvPr/>
         </p:nvSpPr>
         <p:spPr>
           <a:xfrm>
-            <a:off x="8412480" y="4123944"/>
-            <a:ext cx="941832" cy="256032"/>
+            <a:off x="365760" y="6400800"/>
+            <a:ext cx="914400" cy="274320"/>
           </a:xfrm>
           <a:prstGeom prst="rect">
             <a:avLst/>
@@ -8163,209 +6665,14 @@
           </a:bodyPr>
           <a:lstStyle/>
           <a:p>
-            <a:pPr algn="ctr">
-              <a:defRPr sz="1000" b="1">
-                <a:solidFill>
-                  <a:srgbClr val="FFFFFF"/>
-                </a:solidFill>
-                <a:latin typeface="Yu Gothic"/>
-              </a:defRPr>
-            </a:pPr>
-            <a:r>
-              <a:t>管理ツール</a:t>
-            </a:r>
-          </a:p>
-        </p:txBody>
-      </p:sp>
-      <p:sp>
-        <p:nvSpPr>
-          <p:cNvPr id="26" name="Rounded Rectangle 25"/>
-          <p:cNvSpPr/>
-          <p:nvPr/>
-        </p:nvSpPr>
-        <p:spPr>
-          <a:xfrm>
-            <a:off x="731520" y="5120640"/>
-            <a:ext cx="10698480" cy="731520"/>
-          </a:xfrm>
-          <a:prstGeom prst="roundRect">
-            <a:avLst/>
-          </a:prstGeom>
-          <a:solidFill>
-            <a:srgbClr val="C6F6D5"/>
-          </a:solidFill>
-          <a:ln>
-            <a:noFill/>
-          </a:ln>
-        </p:spPr>
-        <p:style>
-          <a:lnRef idx="1">
-            <a:schemeClr val="accent1"/>
-          </a:lnRef>
-          <a:fillRef idx="3">
-            <a:schemeClr val="accent1"/>
-          </a:fillRef>
-          <a:effectRef idx="2">
-            <a:schemeClr val="accent1"/>
-          </a:effectRef>
-          <a:fontRef idx="minor">
-            <a:schemeClr val="lt1"/>
-          </a:fontRef>
-        </p:style>
-        <p:txBody>
-          <a:bodyPr rtlCol="0" anchor="ctr"/>
-          <a:lstStyle/>
-          <a:p>
-            <a:pPr algn="ctr"/>
-          </a:p>
-        </p:txBody>
-      </p:sp>
-      <p:sp>
-        <p:nvSpPr>
-          <p:cNvPr id="27" name="Rectangle 26"/>
-          <p:cNvSpPr/>
-          <p:nvPr/>
-        </p:nvSpPr>
-        <p:spPr>
-          <a:xfrm>
-            <a:off x="731520" y="5120640"/>
-            <a:ext cx="63500" cy="731520"/>
-          </a:xfrm>
-          <a:prstGeom prst="rect">
-            <a:avLst/>
-          </a:prstGeom>
-          <a:solidFill>
-            <a:srgbClr val="276749"/>
-          </a:solidFill>
-          <a:ln>
-            <a:noFill/>
-          </a:ln>
-        </p:spPr>
-        <p:style>
-          <a:lnRef idx="1">
-            <a:schemeClr val="accent1"/>
-          </a:lnRef>
-          <a:fillRef idx="3">
-            <a:schemeClr val="accent1"/>
-          </a:fillRef>
-          <a:effectRef idx="2">
-            <a:schemeClr val="accent1"/>
-          </a:effectRef>
-          <a:fontRef idx="minor">
-            <a:schemeClr val="lt1"/>
-          </a:fontRef>
-        </p:style>
-        <p:txBody>
-          <a:bodyPr rtlCol="0" anchor="ctr"/>
-          <a:lstStyle/>
-          <a:p>
-            <a:pPr algn="ctr"/>
-          </a:p>
-        </p:txBody>
-      </p:sp>
-      <p:sp>
-        <p:nvSpPr>
-          <p:cNvPr id="28" name="TextBox 27"/>
-          <p:cNvSpPr txBox="1"/>
-          <p:nvPr/>
-        </p:nvSpPr>
-        <p:spPr>
-          <a:xfrm>
-            <a:off x="960120" y="5193792"/>
-            <a:ext cx="10424160" cy="228600"/>
-          </a:xfrm>
-          <a:prstGeom prst="rect">
-            <a:avLst/>
-          </a:prstGeom>
-          <a:noFill/>
-        </p:spPr>
-        <p:txBody>
-          <a:bodyPr wrap="square">
-            <a:spAutoFit/>
-          </a:bodyPr>
-          <a:lstStyle/>
-          <a:p>
-            <a:pPr algn="l">
-              <a:defRPr sz="1000" b="1">
-                <a:solidFill>
-                  <a:srgbClr val="276749"/>
-                </a:solidFill>
-                <a:latin typeface="Yu Gothic"/>
-              </a:defRPr>
-            </a:pPr>
-            <a:r>
-              <a:t>目標</a:t>
-            </a:r>
-          </a:p>
-        </p:txBody>
-      </p:sp>
-      <p:sp>
-        <p:nvSpPr>
-          <p:cNvPr id="29" name="TextBox 28"/>
-          <p:cNvSpPr txBox="1"/>
-          <p:nvPr/>
-        </p:nvSpPr>
-        <p:spPr>
-          <a:xfrm>
-            <a:off x="960120" y="5394960"/>
-            <a:ext cx="10424160" cy="411480"/>
-          </a:xfrm>
-          <a:prstGeom prst="rect">
-            <a:avLst/>
-          </a:prstGeom>
-          <a:noFill/>
-        </p:spPr>
-        <p:txBody>
-          <a:bodyPr wrap="square">
-            <a:spAutoFit/>
-          </a:bodyPr>
-          <a:lstStyle/>
-          <a:p>
-            <a:pPr algn="l">
-              <a:defRPr sz="1500" b="0">
-                <a:solidFill>
-                  <a:srgbClr val="1A202C"/>
-                </a:solidFill>
-                <a:latin typeface="Yu Gothic"/>
-              </a:defRPr>
-            </a:pPr>
-            <a:r>
-              <a:t>導入実績のあるシフト最適化・学術支援を基盤に学内外へ展開。論文ダッシュボードでセンター業務を効率化。</a:t>
-            </a:r>
-          </a:p>
-        </p:txBody>
-      </p:sp>
-      <p:sp>
-        <p:nvSpPr>
-          <p:cNvPr id="30" name="TextBox 29"/>
-          <p:cNvSpPr txBox="1"/>
-          <p:nvPr/>
-        </p:nvSpPr>
-        <p:spPr>
-          <a:xfrm>
-            <a:off x="365760" y="6400800"/>
-            <a:ext cx="914400" cy="274320"/>
-          </a:xfrm>
-          <a:prstGeom prst="rect">
-            <a:avLst/>
-          </a:prstGeom>
-          <a:noFill/>
-        </p:spPr>
-        <p:txBody>
-          <a:bodyPr wrap="square">
-            <a:spAutoFit/>
-          </a:bodyPr>
-          <a:lstStyle/>
-          <a:p>
-            <a:pPr algn="l">
-              <a:defRPr sz="1000" b="0">
+            <a:pPr algn="l"/>
+            <a:r>
+              <a:rPr sz="1000" b="0">
                 <a:solidFill>
                   <a:srgbClr val="4A5568"/>
                 </a:solidFill>
                 <a:latin typeface="Yu Gothic"/>
-              </a:defRPr>
-            </a:pPr>
-            <a:r>
+              </a:rPr>
               <a:t>14 / 16</a:t>
             </a:r>
           </a:p>
@@ -8419,15 +6726,14 @@
           </a:bodyPr>
           <a:lstStyle/>
           <a:p>
-            <a:pPr algn="l">
-              <a:defRPr sz="3200" b="1">
+            <a:pPr algn="l"/>
+            <a:r>
+              <a:rPr sz="3200" b="1">
                 <a:solidFill>
                   <a:srgbClr val="1A365D"/>
                 </a:solidFill>
                 <a:latin typeface="Yu Gothic"/>
-              </a:defRPr>
-            </a:pPr>
-            <a:r>
+              </a:rPr>
               <a:t>研究上の方針</a:t>
             </a:r>
           </a:p>
@@ -8493,8 +6799,10 @@
           <a:solidFill>
             <a:srgbClr val="FED7D7"/>
           </a:solidFill>
-          <a:ln>
-            <a:noFill/>
+          <a:ln w="25400">
+            <a:solidFill>
+              <a:srgbClr val="9B2C2C"/>
+            </a:solidFill>
           </a:ln>
         </p:spPr>
         <p:style>
@@ -8512,66 +6820,52 @@
           </a:fontRef>
         </p:style>
         <p:txBody>
-          <a:bodyPr rtlCol="0" anchor="ctr"/>
-          <a:lstStyle/>
-          <a:p>
-            <a:pPr algn="ctr"/>
-          </a:p>
-        </p:txBody>
-      </p:sp>
-      <p:sp>
-        <p:nvSpPr>
-          <p:cNvPr id="5" name="Rectangle 4"/>
-          <p:cNvSpPr/>
-          <p:nvPr/>
-        </p:nvSpPr>
-        <p:spPr>
-          <a:xfrm>
-            <a:off x="731520" y="1645920"/>
-            <a:ext cx="63500" cy="914400"/>
-          </a:xfrm>
-          <a:prstGeom prst="rect">
-            <a:avLst/>
-          </a:prstGeom>
-          <a:solidFill>
-            <a:srgbClr val="9B2C2C"/>
-          </a:solidFill>
-          <a:ln>
-            <a:noFill/>
-          </a:ln>
-        </p:spPr>
-        <p:style>
-          <a:lnRef idx="1">
-            <a:schemeClr val="accent1"/>
-          </a:lnRef>
-          <a:fillRef idx="3">
-            <a:schemeClr val="accent1"/>
-          </a:fillRef>
-          <a:effectRef idx="2">
-            <a:schemeClr val="accent1"/>
-          </a:effectRef>
-          <a:fontRef idx="minor">
-            <a:schemeClr val="lt1"/>
-          </a:fontRef>
-        </p:style>
-        <p:txBody>
-          <a:bodyPr rtlCol="0" anchor="ctr"/>
-          <a:lstStyle/>
-          <a:p>
-            <a:pPr algn="ctr"/>
-          </a:p>
-        </p:txBody>
-      </p:sp>
-      <p:sp>
-        <p:nvSpPr>
-          <p:cNvPr id="6" name="TextBox 5"/>
+          <a:bodyPr rtlCol="0" anchor="ctr" wrap="square" lIns="137160" rIns="137160" tIns="73152" bIns="73152"/>
+          <a:lstStyle/>
+          <a:p>
+            <a:pPr algn="l">
+              <a:spcBef>
+                <a:spcPts val="200"/>
+              </a:spcBef>
+            </a:pPr>
+            <a:r>
+              <a:rPr sz="1000" b="1">
+                <a:solidFill>
+                  <a:srgbClr val="9B2C2C"/>
+                </a:solidFill>
+                <a:latin typeface="Yu Gothic"/>
+              </a:rPr>
+              <a:t>留意事項</a:t>
+            </a:r>
+          </a:p>
+          <a:p>
+            <a:pPr algn="l">
+              <a:spcBef>
+                <a:spcPts val="200"/>
+              </a:spcBef>
+            </a:pPr>
+            <a:r>
+              <a:rPr sz="1400" b="0">
+                <a:solidFill>
+                  <a:srgbClr val="1A202C"/>
+                </a:solidFill>
+                <a:latin typeface="Yu Gothic"/>
+              </a:rPr>
+              <a:t>特定の研究者（佐藤俊哉氏）との共同研究は行わない方針</a:t>
+            </a:r>
+          </a:p>
+        </p:txBody>
+      </p:sp>
+      <p:sp>
+        <p:nvSpPr>
+          <p:cNvPr id="5" name="TextBox 4"/>
           <p:cNvSpPr txBox="1"/>
           <p:nvPr/>
         </p:nvSpPr>
         <p:spPr>
           <a:xfrm>
-            <a:off x="960120" y="1719072"/>
-            <a:ext cx="10241280" cy="228600"/>
+            <a:off x="914400" y="2926080"/>
+            <a:ext cx="10058400" cy="2743200"/>
           </a:xfrm>
           <a:prstGeom prst="rect">
             <a:avLst/>
@@ -8583,31 +6877,89 @@
             <a:spAutoFit/>
           </a:bodyPr>
           <a:lstStyle/>
-          <a:p>
-            <a:pPr algn="l">
-              <a:defRPr sz="1000" b="1">
-                <a:solidFill>
-                  <a:srgbClr val="9B2C2C"/>
-                </a:solidFill>
-                <a:latin typeface="Yu Gothic"/>
-              </a:defRPr>
-            </a:pPr>
-            <a:r>
-              <a:t>留意事項</a:t>
-            </a:r>
-          </a:p>
-        </p:txBody>
-      </p:sp>
-      <p:sp>
-        <p:nvSpPr>
-          <p:cNvPr id="7" name="TextBox 6"/>
+          <a:p/>
+          <a:p>
+            <a:pPr>
+              <a:spcBef>
+                <a:spcPts val="400"/>
+              </a:spcBef>
+              <a:spcAft>
+                <a:spcPts val="300"/>
+              </a:spcAft>
+            </a:pPr>
+            <a:r>
+              <a:rPr sz="1800" b="0">
+                <a:solidFill>
+                  <a:srgbClr val="1A202C"/>
+                </a:solidFill>
+                <a:latin typeface="Yu Gothic"/>
+              </a:rPr>
+              <a:t>◆ 独自の研究ラインを確立・維持する</a:t>
+            </a:r>
+          </a:p>
+          <a:p>
+            <a:pPr>
+              <a:spcBef>
+                <a:spcPts val="100"/>
+              </a:spcBef>
+            </a:pPr>
+            <a:r>
+              <a:rPr sz="1300" b="0">
+                <a:solidFill>
+                  <a:srgbClr val="4A5568"/>
+                </a:solidFill>
+                <a:latin typeface="Yu Gothic"/>
+              </a:rPr>
+              <a:t>    研究の独立性と方向性を自ら決定</a:t>
+            </a:r>
+          </a:p>
+          <a:p>
+            <a:pPr>
+              <a:spcBef>
+                <a:spcPts val="400"/>
+              </a:spcBef>
+              <a:spcAft>
+                <a:spcPts val="300"/>
+              </a:spcAft>
+            </a:pPr>
+            <a:r>
+              <a:rPr sz="1800" b="0">
+                <a:solidFill>
+                  <a:srgbClr val="1A202C"/>
+                </a:solidFill>
+                <a:latin typeface="Yu Gothic"/>
+              </a:rPr>
+              <a:t>◆ 共同研究は研究ビジョンが合致する相手と進める</a:t>
+            </a:r>
+          </a:p>
+          <a:p>
+            <a:pPr>
+              <a:spcBef>
+                <a:spcPts val="100"/>
+              </a:spcBef>
+            </a:pPr>
+            <a:r>
+              <a:rPr sz="1300" b="0">
+                <a:solidFill>
+                  <a:srgbClr val="4A5568"/>
+                </a:solidFill>
+                <a:latin typeface="Yu Gothic"/>
+              </a:rPr>
+              <a:t>    相互補完的で建設的なパートナーシップを重視</a:t>
+            </a:r>
+          </a:p>
+        </p:txBody>
+      </p:sp>
+      <p:sp>
+        <p:nvSpPr>
+          <p:cNvPr id="6" name="TextBox 5"/>
           <p:cNvSpPr txBox="1"/>
           <p:nvPr/>
         </p:nvSpPr>
         <p:spPr>
           <a:xfrm>
-            <a:off x="960120" y="1920240"/>
-            <a:ext cx="10241280" cy="594360"/>
+            <a:off x="365760" y="6400800"/>
+            <a:ext cx="914400" cy="274320"/>
           </a:xfrm>
           <a:prstGeom prst="rect">
             <a:avLst/>
@@ -8620,145 +6972,14 @@
           </a:bodyPr>
           <a:lstStyle/>
           <a:p>
-            <a:pPr algn="l">
-              <a:defRPr sz="1500" b="0">
-                <a:solidFill>
-                  <a:srgbClr val="1A202C"/>
-                </a:solidFill>
-                <a:latin typeface="Yu Gothic"/>
-              </a:defRPr>
-            </a:pPr>
-            <a:r>
-              <a:t>特定の研究者（佐藤俊哉氏）との共同研究は行わない方針</a:t>
-            </a:r>
-          </a:p>
-        </p:txBody>
-      </p:sp>
-      <p:sp>
-        <p:nvSpPr>
-          <p:cNvPr id="8" name="TextBox 7"/>
-          <p:cNvSpPr txBox="1"/>
-          <p:nvPr/>
-        </p:nvSpPr>
-        <p:spPr>
-          <a:xfrm>
-            <a:off x="914400" y="2926080"/>
-            <a:ext cx="10058400" cy="2743200"/>
-          </a:xfrm>
-          <a:prstGeom prst="rect">
-            <a:avLst/>
-          </a:prstGeom>
-          <a:noFill/>
-        </p:spPr>
-        <p:txBody>
-          <a:bodyPr wrap="square">
-            <a:spAutoFit/>
-          </a:bodyPr>
-          <a:lstStyle/>
-          <a:p/>
-          <a:p>
-            <a:pPr>
-              <a:spcBef>
-                <a:spcPts val="400"/>
-              </a:spcBef>
-              <a:spcAft>
-                <a:spcPts val="300"/>
-              </a:spcAft>
-            </a:pPr>
-            <a:r>
-              <a:rPr sz="1800" b="0">
-                <a:solidFill>
-                  <a:srgbClr val="1A202C"/>
-                </a:solidFill>
-                <a:latin typeface="Yu Gothic"/>
-              </a:rPr>
-              <a:t>独自の研究ラインを確立・維持する</a:t>
-            </a:r>
-          </a:p>
-          <a:p>
-            <a:pPr>
-              <a:spcBef>
-                <a:spcPts val="100"/>
-              </a:spcBef>
-            </a:pPr>
-            <a:r>
-              <a:rPr sz="1300">
+            <a:pPr algn="l"/>
+            <a:r>
+              <a:rPr sz="1000" b="0">
                 <a:solidFill>
                   <a:srgbClr val="4A5568"/>
                 </a:solidFill>
                 <a:latin typeface="Yu Gothic"/>
               </a:rPr>
-              <a:t>    研究の独立性と方向性を自ら決定</a:t>
-            </a:r>
-          </a:p>
-          <a:p>
-            <a:pPr>
-              <a:spcBef>
-                <a:spcPts val="400"/>
-              </a:spcBef>
-              <a:spcAft>
-                <a:spcPts val="300"/>
-              </a:spcAft>
-            </a:pPr>
-            <a:r>
-              <a:rPr sz="1800" b="0">
-                <a:solidFill>
-                  <a:srgbClr val="1A202C"/>
-                </a:solidFill>
-                <a:latin typeface="Yu Gothic"/>
-              </a:rPr>
-              <a:t>共同研究は研究ビジョンが合致する相手と進める</a:t>
-            </a:r>
-          </a:p>
-          <a:p>
-            <a:pPr>
-              <a:spcBef>
-                <a:spcPts val="100"/>
-              </a:spcBef>
-            </a:pPr>
-            <a:r>
-              <a:rPr sz="1300">
-                <a:solidFill>
-                  <a:srgbClr val="4A5568"/>
-                </a:solidFill>
-                <a:latin typeface="Yu Gothic"/>
-              </a:rPr>
-              <a:t>    相互補完的で建設的なパートナーシップを重視</a:t>
-            </a:r>
-          </a:p>
-        </p:txBody>
-      </p:sp>
-      <p:sp>
-        <p:nvSpPr>
-          <p:cNvPr id="9" name="TextBox 8"/>
-          <p:cNvSpPr txBox="1"/>
-          <p:nvPr/>
-        </p:nvSpPr>
-        <p:spPr>
-          <a:xfrm>
-            <a:off x="365760" y="6400800"/>
-            <a:ext cx="914400" cy="274320"/>
-          </a:xfrm>
-          <a:prstGeom prst="rect">
-            <a:avLst/>
-          </a:prstGeom>
-          <a:noFill/>
-        </p:spPr>
-        <p:txBody>
-          <a:bodyPr wrap="square">
-            <a:spAutoFit/>
-          </a:bodyPr>
-          <a:lstStyle/>
-          <a:p>
-            <a:pPr algn="l">
-              <a:defRPr sz="1000" b="0">
-                <a:solidFill>
-                  <a:srgbClr val="4A5568"/>
-                </a:solidFill>
-                <a:latin typeface="Yu Gothic"/>
-              </a:defRPr>
-            </a:pPr>
-            <a:r>
               <a:t>15 / 16</a:t>
             </a:r>
           </a:p>
@@ -8812,15 +7033,14 @@
           </a:bodyPr>
           <a:lstStyle/>
           <a:p>
-            <a:pPr algn="ctr">
-              <a:defRPr sz="4200" b="1">
+            <a:pPr algn="ctr"/>
+            <a:r>
+              <a:rPr sz="4200" b="1">
                 <a:solidFill>
                   <a:srgbClr val="FFFFFF"/>
                 </a:solidFill>
                 <a:latin typeface="Yu Gothic"/>
-              </a:defRPr>
-            </a:pPr>
-            <a:r>
+              </a:rPr>
               <a:t>まとめ</a:t>
             </a:r>
           </a:p>
@@ -9029,15 +7249,14 @@
           </a:bodyPr>
           <a:lstStyle/>
           <a:p>
-            <a:pPr algn="ctr">
-              <a:defRPr sz="1600" b="0">
+            <a:pPr algn="ctr"/>
+            <a:r>
+              <a:rPr sz="1600" b="0">
                 <a:solidFill>
                   <a:srgbClr val="999999"/>
                 </a:solidFill>
                 <a:latin typeface="Yu Gothic"/>
-              </a:defRPr>
-            </a:pPr>
-            <a:r>
+              </a:rPr>
               <a:t>ご清聴ありがとうございました</a:t>
             </a:r>
           </a:p>
@@ -9065,15 +7284,14 @@
           </a:bodyPr>
           <a:lstStyle/>
           <a:p>
-            <a:pPr algn="l">
-              <a:defRPr sz="1000" b="0">
+            <a:pPr algn="l"/>
+            <a:r>
+              <a:rPr sz="1000" b="0">
                 <a:solidFill>
                   <a:srgbClr val="4A5568"/>
                 </a:solidFill>
                 <a:latin typeface="Yu Gothic"/>
-              </a:defRPr>
-            </a:pPr>
-            <a:r>
+              </a:rPr>
               <a:t>16 / 16</a:t>
             </a:r>
           </a:p>
@@ -9127,15 +7345,14 @@
           </a:bodyPr>
           <a:lstStyle/>
           <a:p>
-            <a:pPr algn="l">
-              <a:defRPr sz="3200" b="1">
+            <a:pPr algn="l"/>
+            <a:r>
+              <a:rPr sz="3200" b="1">
                 <a:solidFill>
                   <a:srgbClr val="1A365D"/>
                 </a:solidFill>
                 <a:latin typeface="Yu Gothic"/>
-              </a:defRPr>
-            </a:pPr>
-            <a:r>
+              </a:rPr>
               <a:t>本日のアジェンダ</a:t>
             </a:r>
           </a:p>
@@ -9382,15 +7599,14 @@
           </a:bodyPr>
           <a:lstStyle/>
           <a:p>
-            <a:pPr algn="l">
-              <a:defRPr sz="1000" b="0">
+            <a:pPr algn="l"/>
+            <a:r>
+              <a:rPr sz="1000" b="0">
                 <a:solidFill>
                   <a:srgbClr val="4A5568"/>
                 </a:solidFill>
                 <a:latin typeface="Yu Gothic"/>
-              </a:defRPr>
-            </a:pPr>
-            <a:r>
+              </a:rPr>
               <a:t>2 / 16</a:t>
             </a:r>
           </a:p>
@@ -9444,15 +7660,14 @@
           </a:bodyPr>
           <a:lstStyle/>
           <a:p>
-            <a:pPr algn="l">
-              <a:defRPr sz="3200" b="1">
+            <a:pPr algn="l"/>
+            <a:r>
+              <a:rPr sz="3200" b="1">
                 <a:solidFill>
                   <a:srgbClr val="1A365D"/>
                 </a:solidFill>
                 <a:latin typeface="Yu Gothic"/>
-              </a:defRPr>
-            </a:pPr>
-            <a:r>
+              </a:rPr>
               <a:t>キャリア概要</a:t>
             </a:r>
           </a:p>
@@ -9537,120 +7752,54 @@
           </a:fontRef>
         </p:style>
         <p:txBody>
-          <a:bodyPr rtlCol="0" anchor="ctr"/>
-          <a:lstStyle/>
-          <a:p>
-            <a:pPr algn="ctr"/>
-          </a:p>
-        </p:txBody>
-      </p:sp>
-      <p:sp>
-        <p:nvSpPr>
-          <p:cNvPr id="5" name="TextBox 4"/>
-          <p:cNvSpPr txBox="1"/>
-          <p:nvPr/>
-        </p:nvSpPr>
-        <p:spPr>
-          <a:xfrm>
-            <a:off x="731520" y="1417320"/>
-            <a:ext cx="2011680" cy="228600"/>
-          </a:xfrm>
-          <a:prstGeom prst="rect">
-            <a:avLst/>
-          </a:prstGeom>
-          <a:noFill/>
-        </p:spPr>
-        <p:txBody>
-          <a:bodyPr wrap="square">
-            <a:spAutoFit/>
-          </a:bodyPr>
+          <a:bodyPr rtlCol="0" anchor="ctr" wrap="square" lIns="137160" rIns="137160" tIns="73152" bIns="73152"/>
           <a:lstStyle/>
           <a:p>
             <a:pPr algn="ctr">
-              <a:defRPr sz="900" b="1">
+              <a:spcBef>
+                <a:spcPts val="200"/>
+              </a:spcBef>
+            </a:pPr>
+            <a:r>
+              <a:rPr sz="900" b="1">
                 <a:solidFill>
                   <a:srgbClr val="DDDDDD"/>
                 </a:solidFill>
                 <a:latin typeface="Yu Gothic"/>
-              </a:defRPr>
-            </a:pPr>
-            <a:r>
+              </a:rPr>
               <a:t>Phase 1</a:t>
             </a:r>
           </a:p>
-        </p:txBody>
-      </p:sp>
-      <p:sp>
-        <p:nvSpPr>
-          <p:cNvPr id="6" name="TextBox 5"/>
-          <p:cNvSpPr txBox="1"/>
-          <p:nvPr/>
-        </p:nvSpPr>
-        <p:spPr>
-          <a:xfrm>
-            <a:off x="731520" y="1645920"/>
-            <a:ext cx="2011680" cy="548640"/>
-          </a:xfrm>
-          <a:prstGeom prst="rect">
-            <a:avLst/>
-          </a:prstGeom>
-          <a:noFill/>
-        </p:spPr>
-        <p:txBody>
-          <a:bodyPr wrap="square">
-            <a:spAutoFit/>
-          </a:bodyPr>
-          <a:lstStyle/>
           <a:p>
             <a:pPr algn="ctr">
-              <a:defRPr sz="1400" b="1">
+              <a:spcBef>
+                <a:spcPts val="200"/>
+              </a:spcBef>
+            </a:pPr>
+            <a:r>
+              <a:rPr sz="1400" b="1">
                 <a:solidFill>
                   <a:srgbClr val="FFFFFF"/>
                 </a:solidFill>
                 <a:latin typeface="Yu Gothic"/>
-              </a:defRPr>
-            </a:pPr>
-            <a:r>
-              <a:t>医学部</a:t>
-            </a:r>
-            <a:br/>
-            <a:r>
-              <a:t>麻酔科臨床</a:t>
-            </a:r>
-          </a:p>
-        </p:txBody>
-      </p:sp>
-      <p:sp>
-        <p:nvSpPr>
-          <p:cNvPr id="7" name="TextBox 6"/>
-          <p:cNvSpPr txBox="1"/>
-          <p:nvPr/>
-        </p:nvSpPr>
-        <p:spPr>
-          <a:xfrm>
-            <a:off x="731520" y="2194560"/>
-            <a:ext cx="2011680" cy="274320"/>
-          </a:xfrm>
-          <a:prstGeom prst="rect">
-            <a:avLst/>
-          </a:prstGeom>
-          <a:noFill/>
-        </p:spPr>
-        <p:txBody>
-          <a:bodyPr wrap="square">
-            <a:spAutoFit/>
-          </a:bodyPr>
-          <a:lstStyle/>
+              </a:rPr>
+              <a:t>医学部
+麻酔科臨床</a:t>
+            </a:r>
+          </a:p>
           <a:p>
             <a:pPr algn="ctr">
-              <a:defRPr sz="1000" b="0">
+              <a:spcBef>
+                <a:spcPts val="200"/>
+              </a:spcBef>
+            </a:pPr>
+            <a:r>
+              <a:rPr sz="1000" b="0">
                 <a:solidFill>
                   <a:srgbClr val="DDDDDD"/>
                 </a:solidFill>
                 <a:latin typeface="Yu Gothic"/>
-              </a:defRPr>
-            </a:pPr>
-            <a:r>
+              </a:rPr>
               <a:t>1-1〜1-5</a:t>
             </a:r>
           </a:p>
@@ -9658,7 +7807,7 @@
       </p:sp>
       <p:sp>
         <p:nvSpPr>
-          <p:cNvPr id="8" name="Rounded Rectangle 7"/>
+          <p:cNvPr id="5" name="Rounded Rectangle 4"/>
           <p:cNvSpPr/>
           <p:nvPr/>
         </p:nvSpPr>
@@ -9692,116 +7841,53 @@
           </a:fontRef>
         </p:style>
         <p:txBody>
-          <a:bodyPr rtlCol="0" anchor="ctr"/>
-          <a:lstStyle/>
-          <a:p>
-            <a:pPr algn="ctr"/>
-          </a:p>
-        </p:txBody>
-      </p:sp>
-      <p:sp>
-        <p:nvSpPr>
-          <p:cNvPr id="9" name="TextBox 8"/>
-          <p:cNvSpPr txBox="1"/>
-          <p:nvPr/>
-        </p:nvSpPr>
-        <p:spPr>
-          <a:xfrm>
-            <a:off x="2971800" y="1417320"/>
-            <a:ext cx="2011680" cy="228600"/>
-          </a:xfrm>
-          <a:prstGeom prst="rect">
-            <a:avLst/>
-          </a:prstGeom>
-          <a:noFill/>
-        </p:spPr>
-        <p:txBody>
-          <a:bodyPr wrap="square">
-            <a:spAutoFit/>
-          </a:bodyPr>
+          <a:bodyPr rtlCol="0" anchor="ctr" wrap="square" lIns="137160" rIns="137160" tIns="73152" bIns="73152"/>
           <a:lstStyle/>
           <a:p>
             <a:pPr algn="ctr">
-              <a:defRPr sz="900" b="1">
+              <a:spcBef>
+                <a:spcPts val="200"/>
+              </a:spcBef>
+            </a:pPr>
+            <a:r>
+              <a:rPr sz="900" b="1">
                 <a:solidFill>
                   <a:srgbClr val="DDDDDD"/>
                 </a:solidFill>
                 <a:latin typeface="Yu Gothic"/>
-              </a:defRPr>
-            </a:pPr>
-            <a:r>
+              </a:rPr>
               <a:t>Phase 2</a:t>
             </a:r>
           </a:p>
-        </p:txBody>
-      </p:sp>
-      <p:sp>
-        <p:nvSpPr>
-          <p:cNvPr id="10" name="TextBox 9"/>
-          <p:cNvSpPr txBox="1"/>
-          <p:nvPr/>
-        </p:nvSpPr>
-        <p:spPr>
-          <a:xfrm>
-            <a:off x="2971800" y="1645920"/>
-            <a:ext cx="2011680" cy="548640"/>
-          </a:xfrm>
-          <a:prstGeom prst="rect">
-            <a:avLst/>
-          </a:prstGeom>
-          <a:noFill/>
-        </p:spPr>
-        <p:txBody>
-          <a:bodyPr wrap="square">
-            <a:spAutoFit/>
-          </a:bodyPr>
-          <a:lstStyle/>
           <a:p>
             <a:pPr algn="ctr">
-              <a:defRPr sz="1400" b="1">
+              <a:spcBef>
+                <a:spcPts val="200"/>
+              </a:spcBef>
+            </a:pPr>
+            <a:r>
+              <a:rPr sz="1400" b="1">
                 <a:solidFill>
                   <a:srgbClr val="FFFFFF"/>
                 </a:solidFill>
                 <a:latin typeface="Yu Gothic"/>
-              </a:defRPr>
-            </a:pPr>
-            <a:r>
+              </a:rPr>
               <a:t>医工連携</a:t>
             </a:r>
           </a:p>
-        </p:txBody>
-      </p:sp>
-      <p:sp>
-        <p:nvSpPr>
-          <p:cNvPr id="11" name="TextBox 10"/>
-          <p:cNvSpPr txBox="1"/>
-          <p:nvPr/>
-        </p:nvSpPr>
-        <p:spPr>
-          <a:xfrm>
-            <a:off x="2971800" y="2194560"/>
-            <a:ext cx="2011680" cy="274320"/>
-          </a:xfrm>
-          <a:prstGeom prst="rect">
-            <a:avLst/>
-          </a:prstGeom>
-          <a:noFill/>
-        </p:spPr>
-        <p:txBody>
-          <a:bodyPr wrap="square">
-            <a:spAutoFit/>
-          </a:bodyPr>
-          <a:lstStyle/>
           <a:p>
             <a:pPr algn="ctr">
-              <a:defRPr sz="1000" b="0">
+              <a:spcBef>
+                <a:spcPts val="200"/>
+              </a:spcBef>
+            </a:pPr>
+            <a:r>
+              <a:rPr sz="1000" b="0">
                 <a:solidFill>
                   <a:srgbClr val="DDDDDD"/>
                 </a:solidFill>
                 <a:latin typeface="Yu Gothic"/>
-              </a:defRPr>
-            </a:pPr>
-            <a:r>
+              </a:rPr>
               <a:t>2-1〜2-3</a:t>
             </a:r>
           </a:p>
@@ -9809,7 +7895,7 @@
       </p:sp>
       <p:sp>
         <p:nvSpPr>
-          <p:cNvPr id="12" name="Rounded Rectangle 11"/>
+          <p:cNvPr id="6" name="Rounded Rectangle 5"/>
           <p:cNvSpPr/>
           <p:nvPr/>
         </p:nvSpPr>
@@ -9843,120 +7929,54 @@
           </a:fontRef>
         </p:style>
         <p:txBody>
-          <a:bodyPr rtlCol="0" anchor="ctr"/>
-          <a:lstStyle/>
-          <a:p>
-            <a:pPr algn="ctr"/>
-          </a:p>
-        </p:txBody>
-      </p:sp>
-      <p:sp>
-        <p:nvSpPr>
-          <p:cNvPr id="13" name="TextBox 12"/>
-          <p:cNvSpPr txBox="1"/>
-          <p:nvPr/>
-        </p:nvSpPr>
-        <p:spPr>
-          <a:xfrm>
-            <a:off x="5212080" y="1417320"/>
-            <a:ext cx="2011680" cy="228600"/>
-          </a:xfrm>
-          <a:prstGeom prst="rect">
-            <a:avLst/>
-          </a:prstGeom>
-          <a:noFill/>
-        </p:spPr>
-        <p:txBody>
-          <a:bodyPr wrap="square">
-            <a:spAutoFit/>
-          </a:bodyPr>
+          <a:bodyPr rtlCol="0" anchor="ctr" wrap="square" lIns="137160" rIns="137160" tIns="73152" bIns="73152"/>
           <a:lstStyle/>
           <a:p>
             <a:pPr algn="ctr">
-              <a:defRPr sz="900" b="1">
+              <a:spcBef>
+                <a:spcPts val="200"/>
+              </a:spcBef>
+            </a:pPr>
+            <a:r>
+              <a:rPr sz="900" b="1">
                 <a:solidFill>
                   <a:srgbClr val="DDDDDD"/>
                 </a:solidFill>
                 <a:latin typeface="Yu Gothic"/>
-              </a:defRPr>
-            </a:pPr>
-            <a:r>
+              </a:rPr>
               <a:t>Phase 3</a:t>
             </a:r>
           </a:p>
-        </p:txBody>
-      </p:sp>
-      <p:sp>
-        <p:nvSpPr>
-          <p:cNvPr id="14" name="TextBox 13"/>
-          <p:cNvSpPr txBox="1"/>
-          <p:nvPr/>
-        </p:nvSpPr>
-        <p:spPr>
-          <a:xfrm>
-            <a:off x="5212080" y="1645920"/>
-            <a:ext cx="2011680" cy="548640"/>
-          </a:xfrm>
-          <a:prstGeom prst="rect">
-            <a:avLst/>
-          </a:prstGeom>
-          <a:noFill/>
-        </p:spPr>
-        <p:txBody>
-          <a:bodyPr wrap="square">
-            <a:spAutoFit/>
-          </a:bodyPr>
-          <a:lstStyle/>
           <a:p>
             <a:pPr algn="ctr">
-              <a:defRPr sz="1400" b="1">
+              <a:spcBef>
+                <a:spcPts val="200"/>
+              </a:spcBef>
+            </a:pPr>
+            <a:r>
+              <a:rPr sz="1400" b="1">
                 <a:solidFill>
                   <a:srgbClr val="FFFFFF"/>
                 </a:solidFill>
                 <a:latin typeface="Yu Gothic"/>
-              </a:defRPr>
-            </a:pPr>
-            <a:r>
-              <a:t>公衆衛生</a:t>
-            </a:r>
-            <a:br/>
-            <a:r>
-              <a:t>学位取得</a:t>
-            </a:r>
-          </a:p>
-        </p:txBody>
-      </p:sp>
-      <p:sp>
-        <p:nvSpPr>
-          <p:cNvPr id="15" name="TextBox 14"/>
-          <p:cNvSpPr txBox="1"/>
-          <p:nvPr/>
-        </p:nvSpPr>
-        <p:spPr>
-          <a:xfrm>
-            <a:off x="5212080" y="2194560"/>
-            <a:ext cx="2011680" cy="274320"/>
-          </a:xfrm>
-          <a:prstGeom prst="rect">
-            <a:avLst/>
-          </a:prstGeom>
-          <a:noFill/>
-        </p:spPr>
-        <p:txBody>
-          <a:bodyPr wrap="square">
-            <a:spAutoFit/>
-          </a:bodyPr>
-          <a:lstStyle/>
+              </a:rPr>
+              <a:t>公衆衛生
+学位取得</a:t>
+            </a:r>
+          </a:p>
           <a:p>
             <a:pPr algn="ctr">
-              <a:defRPr sz="1000" b="0">
+              <a:spcBef>
+                <a:spcPts val="200"/>
+              </a:spcBef>
+            </a:pPr>
+            <a:r>
+              <a:rPr sz="1000" b="0">
                 <a:solidFill>
                   <a:srgbClr val="DDDDDD"/>
                 </a:solidFill>
                 <a:latin typeface="Yu Gothic"/>
-              </a:defRPr>
-            </a:pPr>
-            <a:r>
+              </a:rPr>
               <a:t>3-1〜3-3</a:t>
             </a:r>
           </a:p>
@@ -9964,7 +7984,7 @@
       </p:sp>
       <p:sp>
         <p:nvSpPr>
-          <p:cNvPr id="16" name="Rounded Rectangle 15"/>
+          <p:cNvPr id="7" name="Rounded Rectangle 6"/>
           <p:cNvSpPr/>
           <p:nvPr/>
         </p:nvSpPr>
@@ -9998,120 +8018,54 @@
           </a:fontRef>
         </p:style>
         <p:txBody>
-          <a:bodyPr rtlCol="0" anchor="ctr"/>
-          <a:lstStyle/>
-          <a:p>
-            <a:pPr algn="ctr"/>
-          </a:p>
-        </p:txBody>
-      </p:sp>
-      <p:sp>
-        <p:nvSpPr>
-          <p:cNvPr id="17" name="TextBox 16"/>
-          <p:cNvSpPr txBox="1"/>
-          <p:nvPr/>
-        </p:nvSpPr>
-        <p:spPr>
-          <a:xfrm>
-            <a:off x="7452360" y="1417320"/>
-            <a:ext cx="2011680" cy="228600"/>
-          </a:xfrm>
-          <a:prstGeom prst="rect">
-            <a:avLst/>
-          </a:prstGeom>
-          <a:noFill/>
-        </p:spPr>
-        <p:txBody>
-          <a:bodyPr wrap="square">
-            <a:spAutoFit/>
-          </a:bodyPr>
+          <a:bodyPr rtlCol="0" anchor="ctr" wrap="square" lIns="137160" rIns="137160" tIns="73152" bIns="73152"/>
           <a:lstStyle/>
           <a:p>
             <a:pPr algn="ctr">
-              <a:defRPr sz="900" b="1">
+              <a:spcBef>
+                <a:spcPts val="200"/>
+              </a:spcBef>
+            </a:pPr>
+            <a:r>
+              <a:rPr sz="900" b="1">
                 <a:solidFill>
                   <a:srgbClr val="DDDDDD"/>
                 </a:solidFill>
                 <a:latin typeface="Yu Gothic"/>
-              </a:defRPr>
-            </a:pPr>
-            <a:r>
+              </a:rPr>
               <a:t>Phase 4</a:t>
             </a:r>
           </a:p>
-        </p:txBody>
-      </p:sp>
-      <p:sp>
-        <p:nvSpPr>
-          <p:cNvPr id="18" name="TextBox 17"/>
-          <p:cNvSpPr txBox="1"/>
-          <p:nvPr/>
-        </p:nvSpPr>
-        <p:spPr>
-          <a:xfrm>
-            <a:off x="7452360" y="1645920"/>
-            <a:ext cx="2011680" cy="548640"/>
-          </a:xfrm>
-          <a:prstGeom prst="rect">
-            <a:avLst/>
-          </a:prstGeom>
-          <a:noFill/>
-        </p:spPr>
-        <p:txBody>
-          <a:bodyPr wrap="square">
-            <a:spAutoFit/>
-          </a:bodyPr>
-          <a:lstStyle/>
           <a:p>
             <a:pPr algn="ctr">
-              <a:defRPr sz="1400" b="1">
+              <a:spcBef>
+                <a:spcPts val="200"/>
+              </a:spcBef>
+            </a:pPr>
+            <a:r>
+              <a:rPr sz="1400" b="1">
                 <a:solidFill>
                   <a:srgbClr val="FFFFFF"/>
                 </a:solidFill>
                 <a:latin typeface="Yu Gothic"/>
-              </a:defRPr>
-            </a:pPr>
-            <a:r>
-              <a:t>起業</a:t>
-            </a:r>
-            <a:br/>
-            <a:r>
-              <a:t>国際連携</a:t>
-            </a:r>
-          </a:p>
-        </p:txBody>
-      </p:sp>
-      <p:sp>
-        <p:nvSpPr>
-          <p:cNvPr id="19" name="TextBox 18"/>
-          <p:cNvSpPr txBox="1"/>
-          <p:nvPr/>
-        </p:nvSpPr>
-        <p:spPr>
-          <a:xfrm>
-            <a:off x="7452360" y="2194560"/>
-            <a:ext cx="2011680" cy="274320"/>
-          </a:xfrm>
-          <a:prstGeom prst="rect">
-            <a:avLst/>
-          </a:prstGeom>
-          <a:noFill/>
-        </p:spPr>
-        <p:txBody>
-          <a:bodyPr wrap="square">
-            <a:spAutoFit/>
-          </a:bodyPr>
-          <a:lstStyle/>
+              </a:rPr>
+              <a:t>起業
+国際連携</a:t>
+            </a:r>
+          </a:p>
           <a:p>
             <a:pPr algn="ctr">
-              <a:defRPr sz="1000" b="0">
+              <a:spcBef>
+                <a:spcPts val="200"/>
+              </a:spcBef>
+            </a:pPr>
+            <a:r>
+              <a:rPr sz="1000" b="0">
                 <a:solidFill>
                   <a:srgbClr val="DDDDDD"/>
                 </a:solidFill>
                 <a:latin typeface="Yu Gothic"/>
-              </a:defRPr>
-            </a:pPr>
-            <a:r>
+              </a:rPr>
               <a:t>4-1〜4-6</a:t>
             </a:r>
           </a:p>
@@ -10119,7 +8073,7 @@
       </p:sp>
       <p:sp>
         <p:nvSpPr>
-          <p:cNvPr id="20" name="Rounded Rectangle 19"/>
+          <p:cNvPr id="8" name="Rounded Rectangle 7"/>
           <p:cNvSpPr/>
           <p:nvPr/>
         </p:nvSpPr>
@@ -10153,120 +8107,54 @@
           </a:fontRef>
         </p:style>
         <p:txBody>
-          <a:bodyPr rtlCol="0" anchor="ctr"/>
-          <a:lstStyle/>
-          <a:p>
-            <a:pPr algn="ctr"/>
-          </a:p>
-        </p:txBody>
-      </p:sp>
-      <p:sp>
-        <p:nvSpPr>
-          <p:cNvPr id="21" name="TextBox 20"/>
-          <p:cNvSpPr txBox="1"/>
-          <p:nvPr/>
-        </p:nvSpPr>
-        <p:spPr>
-          <a:xfrm>
-            <a:off x="9692640" y="1417320"/>
-            <a:ext cx="2011680" cy="228600"/>
-          </a:xfrm>
-          <a:prstGeom prst="rect">
-            <a:avLst/>
-          </a:prstGeom>
-          <a:noFill/>
-        </p:spPr>
-        <p:txBody>
-          <a:bodyPr wrap="square">
-            <a:spAutoFit/>
-          </a:bodyPr>
+          <a:bodyPr rtlCol="0" anchor="ctr" wrap="square" lIns="137160" rIns="137160" tIns="73152" bIns="73152"/>
           <a:lstStyle/>
           <a:p>
             <a:pPr algn="ctr">
-              <a:defRPr sz="900" b="1">
+              <a:spcBef>
+                <a:spcPts val="200"/>
+              </a:spcBef>
+            </a:pPr>
+            <a:r>
+              <a:rPr sz="900" b="1">
                 <a:solidFill>
                   <a:srgbClr val="DDDDDD"/>
                 </a:solidFill>
                 <a:latin typeface="Yu Gothic"/>
-              </a:defRPr>
-            </a:pPr>
-            <a:r>
+              </a:rPr>
               <a:t>Phase 5</a:t>
             </a:r>
           </a:p>
-        </p:txBody>
-      </p:sp>
-      <p:sp>
-        <p:nvSpPr>
-          <p:cNvPr id="22" name="TextBox 21"/>
-          <p:cNvSpPr txBox="1"/>
-          <p:nvPr/>
-        </p:nvSpPr>
-        <p:spPr>
-          <a:xfrm>
-            <a:off x="9692640" y="1645920"/>
-            <a:ext cx="2011680" cy="548640"/>
-          </a:xfrm>
-          <a:prstGeom prst="rect">
-            <a:avLst/>
-          </a:prstGeom>
-          <a:noFill/>
-        </p:spPr>
-        <p:txBody>
-          <a:bodyPr wrap="square">
-            <a:spAutoFit/>
-          </a:bodyPr>
-          <a:lstStyle/>
           <a:p>
             <a:pPr algn="ctr">
-              <a:defRPr sz="1400" b="1">
+              <a:spcBef>
+                <a:spcPts val="200"/>
+              </a:spcBef>
+            </a:pPr>
+            <a:r>
+              <a:rPr sz="1400" b="1">
                 <a:solidFill>
                   <a:srgbClr val="FFFFFF"/>
                 </a:solidFill>
                 <a:latin typeface="Yu Gothic"/>
-              </a:defRPr>
-            </a:pPr>
-            <a:r>
-              <a:t>データ</a:t>
-            </a:r>
-            <a:br/>
-            <a:r>
-              <a:t>サイエンティスト</a:t>
-            </a:r>
-          </a:p>
-        </p:txBody>
-      </p:sp>
-      <p:sp>
-        <p:nvSpPr>
-          <p:cNvPr id="23" name="TextBox 22"/>
-          <p:cNvSpPr txBox="1"/>
-          <p:nvPr/>
-        </p:nvSpPr>
-        <p:spPr>
-          <a:xfrm>
-            <a:off x="9692640" y="2194560"/>
-            <a:ext cx="2011680" cy="274320"/>
-          </a:xfrm>
-          <a:prstGeom prst="rect">
-            <a:avLst/>
-          </a:prstGeom>
-          <a:noFill/>
-        </p:spPr>
-        <p:txBody>
-          <a:bodyPr wrap="square">
-            <a:spAutoFit/>
-          </a:bodyPr>
-          <a:lstStyle/>
+              </a:rPr>
+              <a:t>データ
+サイエンティスト</a:t>
+            </a:r>
+          </a:p>
           <a:p>
             <a:pPr algn="ctr">
-              <a:defRPr sz="1000" b="0">
+              <a:spcBef>
+                <a:spcPts val="200"/>
+              </a:spcBef>
+            </a:pPr>
+            <a:r>
+              <a:rPr sz="1000" b="0">
                 <a:solidFill>
                   <a:srgbClr val="DDDDDD"/>
                 </a:solidFill>
                 <a:latin typeface="Yu Gothic"/>
-              </a:defRPr>
-            </a:pPr>
-            <a:r>
+              </a:rPr>
               <a:t>5-1〜5-5</a:t>
             </a:r>
           </a:p>
@@ -10274,7 +8162,7 @@
       </p:sp>
       <p:sp>
         <p:nvSpPr>
-          <p:cNvPr id="24" name="Rounded Rectangle 23"/>
+          <p:cNvPr id="9" name="Rounded Rectangle 8"/>
           <p:cNvSpPr/>
           <p:nvPr/>
         </p:nvSpPr>
@@ -10289,8 +8177,10 @@
           <a:solidFill>
             <a:srgbClr val="EBF8FF"/>
           </a:solidFill>
-          <a:ln>
-            <a:noFill/>
+          <a:ln w="25400">
+            <a:solidFill>
+              <a:srgbClr val="2B6CB0"/>
+            </a:solidFill>
           </a:ln>
         </p:spPr>
         <p:style>
@@ -10308,32 +8198,63 @@
           </a:fontRef>
         </p:style>
         <p:txBody>
-          <a:bodyPr rtlCol="0" anchor="ctr"/>
-          <a:lstStyle/>
-          <a:p>
-            <a:pPr algn="ctr"/>
-          </a:p>
-        </p:txBody>
-      </p:sp>
-      <p:sp>
-        <p:nvSpPr>
-          <p:cNvPr id="25" name="Rectangle 24"/>
+          <a:bodyPr rtlCol="0" anchor="ctr" wrap="square" lIns="137160" rIns="137160" tIns="73152" bIns="73152"/>
+          <a:lstStyle/>
+          <a:p>
+            <a:pPr algn="l">
+              <a:spcBef>
+                <a:spcPts val="200"/>
+              </a:spcBef>
+            </a:pPr>
+            <a:r>
+              <a:rPr sz="1000" b="1">
+                <a:solidFill>
+                  <a:srgbClr val="2B6CB0"/>
+                </a:solidFill>
+                <a:latin typeface="Yu Gothic"/>
+              </a:rPr>
+              <a:t>専門</a:t>
+            </a:r>
+          </a:p>
+          <a:p>
+            <a:pPr algn="l">
+              <a:spcBef>
+                <a:spcPts val="200"/>
+              </a:spcBef>
+            </a:pPr>
+            <a:r>
+              <a:rPr sz="1400" b="0">
+                <a:solidFill>
+                  <a:srgbClr val="1A202C"/>
+                </a:solidFill>
+                <a:latin typeface="Yu Gothic"/>
+              </a:rPr>
+              <a:t>「好奇心」</a:t>
+            </a:r>
+          </a:p>
+        </p:txBody>
+      </p:sp>
+      <p:sp>
+        <p:nvSpPr>
+          <p:cNvPr id="10" name="Rounded Rectangle 9"/>
           <p:cNvSpPr/>
           <p:nvPr/>
         </p:nvSpPr>
         <p:spPr>
           <a:xfrm>
-            <a:off x="731520" y="2926080"/>
-            <a:ext cx="63500" cy="914400"/>
-          </a:xfrm>
-          <a:prstGeom prst="rect">
+            <a:off x="6126480" y="2926080"/>
+            <a:ext cx="5303520" cy="914400"/>
+          </a:xfrm>
+          <a:prstGeom prst="roundRect">
             <a:avLst/>
           </a:prstGeom>
           <a:solidFill>
-            <a:srgbClr val="2B6CB0"/>
+            <a:srgbClr val="FEFCBF"/>
           </a:solidFill>
-          <a:ln>
-            <a:noFill/>
+          <a:ln w="25400">
+            <a:solidFill>
+              <a:srgbClr val="B7791F"/>
+            </a:solidFill>
           </a:ln>
         </p:spPr>
         <p:style>
@@ -10351,104 +8272,64 @@
           </a:fontRef>
         </p:style>
         <p:txBody>
-          <a:bodyPr rtlCol="0" anchor="ctr"/>
-          <a:lstStyle/>
-          <a:p>
-            <a:pPr algn="ctr"/>
-          </a:p>
-        </p:txBody>
-      </p:sp>
-      <p:sp>
-        <p:nvSpPr>
-          <p:cNvPr id="26" name="TextBox 25"/>
-          <p:cNvSpPr txBox="1"/>
-          <p:nvPr/>
-        </p:nvSpPr>
-        <p:spPr>
-          <a:xfrm>
-            <a:off x="960120" y="2999232"/>
-            <a:ext cx="4754880" cy="228600"/>
-          </a:xfrm>
-          <a:prstGeom prst="rect">
-            <a:avLst/>
-          </a:prstGeom>
-          <a:noFill/>
-        </p:spPr>
-        <p:txBody>
-          <a:bodyPr wrap="square">
-            <a:spAutoFit/>
-          </a:bodyPr>
+          <a:bodyPr rtlCol="0" anchor="ctr" wrap="square" lIns="137160" rIns="137160" tIns="73152" bIns="73152"/>
           <a:lstStyle/>
           <a:p>
             <a:pPr algn="l">
-              <a:defRPr sz="1000" b="1">
-                <a:solidFill>
-                  <a:srgbClr val="2B6CB0"/>
-                </a:solidFill>
-                <a:latin typeface="Yu Gothic"/>
-              </a:defRPr>
-            </a:pPr>
-            <a:r>
-              <a:t>専門</a:t>
-            </a:r>
-          </a:p>
-        </p:txBody>
-      </p:sp>
-      <p:sp>
-        <p:nvSpPr>
-          <p:cNvPr id="27" name="TextBox 26"/>
-          <p:cNvSpPr txBox="1"/>
-          <p:nvPr/>
-        </p:nvSpPr>
-        <p:spPr>
-          <a:xfrm>
-            <a:off x="960120" y="3200400"/>
-            <a:ext cx="4754880" cy="594360"/>
-          </a:xfrm>
-          <a:prstGeom prst="rect">
-            <a:avLst/>
-          </a:prstGeom>
-          <a:noFill/>
-        </p:spPr>
-        <p:txBody>
-          <a:bodyPr wrap="square">
-            <a:spAutoFit/>
-          </a:bodyPr>
-          <a:lstStyle/>
+              <a:spcBef>
+                <a:spcPts val="200"/>
+              </a:spcBef>
+            </a:pPr>
+            <a:r>
+              <a:rPr sz="1000" b="1">
+                <a:solidFill>
+                  <a:srgbClr val="B7791F"/>
+                </a:solidFill>
+                <a:latin typeface="Yu Gothic"/>
+              </a:rPr>
+              <a:t>座右の銘</a:t>
+            </a:r>
+          </a:p>
           <a:p>
             <a:pPr algn="l">
-              <a:defRPr sz="1500" b="0">
+              <a:spcBef>
+                <a:spcPts val="200"/>
+              </a:spcBef>
+            </a:pPr>
+            <a:r>
+              <a:rPr sz="1400" b="0">
                 <a:solidFill>
                   <a:srgbClr val="1A202C"/>
                 </a:solidFill>
                 <a:latin typeface="Yu Gothic"/>
-              </a:defRPr>
-            </a:pPr>
-            <a:r>
-              <a:t>「好奇心」</a:t>
-            </a:r>
-          </a:p>
-        </p:txBody>
-      </p:sp>
-      <p:sp>
-        <p:nvSpPr>
-          <p:cNvPr id="28" name="Rounded Rectangle 27"/>
+              </a:rPr>
+              <a:t>「大隠朝市」
+「未解決の課題は他の分野では90%解決されている」</a:t>
+            </a:r>
+          </a:p>
+        </p:txBody>
+      </p:sp>
+      <p:sp>
+        <p:nvSpPr>
+          <p:cNvPr id="11" name="Rounded Rectangle 10"/>
           <p:cNvSpPr/>
           <p:nvPr/>
         </p:nvSpPr>
         <p:spPr>
           <a:xfrm>
-            <a:off x="6126480" y="2926080"/>
-            <a:ext cx="5303520" cy="914400"/>
+            <a:off x="731520" y="4114800"/>
+            <a:ext cx="10698480" cy="822960"/>
           </a:xfrm>
           <a:prstGeom prst="roundRect">
             <a:avLst/>
           </a:prstGeom>
           <a:solidFill>
-            <a:srgbClr val="FEFCBF"/>
+            <a:srgbClr val="E9D8FD"/>
           </a:solidFill>
-          <a:ln>
-            <a:noFill/>
+          <a:ln w="25400">
+            <a:solidFill>
+              <a:srgbClr val="553C9A"/>
+            </a:solidFill>
           </a:ln>
         </p:spPr>
         <p:style>
@@ -10466,66 +8347,52 @@
           </a:fontRef>
         </p:style>
         <p:txBody>
-          <a:bodyPr rtlCol="0" anchor="ctr"/>
-          <a:lstStyle/>
-          <a:p>
-            <a:pPr algn="ctr"/>
-          </a:p>
-        </p:txBody>
-      </p:sp>
-      <p:sp>
-        <p:nvSpPr>
-          <p:cNvPr id="29" name="Rectangle 28"/>
-          <p:cNvSpPr/>
-          <p:nvPr/>
-        </p:nvSpPr>
-        <p:spPr>
-          <a:xfrm>
-            <a:off x="6126480" y="2926080"/>
-            <a:ext cx="63500" cy="914400"/>
-          </a:xfrm>
-          <a:prstGeom prst="rect">
-            <a:avLst/>
-          </a:prstGeom>
-          <a:solidFill>
-            <a:srgbClr val="B7791F"/>
-          </a:solidFill>
-          <a:ln>
-            <a:noFill/>
-          </a:ln>
-        </p:spPr>
-        <p:style>
-          <a:lnRef idx="1">
-            <a:schemeClr val="accent1"/>
-          </a:lnRef>
-          <a:fillRef idx="3">
-            <a:schemeClr val="accent1"/>
-          </a:fillRef>
-          <a:effectRef idx="2">
-            <a:schemeClr val="accent1"/>
-          </a:effectRef>
-          <a:fontRef idx="minor">
-            <a:schemeClr val="lt1"/>
-          </a:fontRef>
-        </p:style>
-        <p:txBody>
-          <a:bodyPr rtlCol="0" anchor="ctr"/>
-          <a:lstStyle/>
-          <a:p>
-            <a:pPr algn="ctr"/>
-          </a:p>
-        </p:txBody>
-      </p:sp>
-      <p:sp>
-        <p:nvSpPr>
-          <p:cNvPr id="30" name="TextBox 29"/>
+          <a:bodyPr rtlCol="0" anchor="ctr" wrap="square" lIns="137160" rIns="137160" tIns="73152" bIns="73152"/>
+          <a:lstStyle/>
+          <a:p>
+            <a:pPr algn="l">
+              <a:spcBef>
+                <a:spcPts val="200"/>
+              </a:spcBef>
+            </a:pPr>
+            <a:r>
+              <a:rPr sz="1000" b="1">
+                <a:solidFill>
+                  <a:srgbClr val="553C9A"/>
+                </a:solidFill>
+                <a:latin typeface="Yu Gothic"/>
+              </a:rPr>
+              <a:t>研究者としての目標</a:t>
+            </a:r>
+          </a:p>
+          <a:p>
+            <a:pPr algn="l">
+              <a:spcBef>
+                <a:spcPts val="200"/>
+              </a:spcBef>
+            </a:pPr>
+            <a:r>
+              <a:rPr sz="1400" b="0">
+                <a:solidFill>
+                  <a:srgbClr val="1A202C"/>
+                </a:solidFill>
+                <a:latin typeface="Yu Gothic"/>
+              </a:rPr>
+              <a:t>蝋人形になること — 後世に残る研究業績を確立し、不朽の存在として認知される</a:t>
+            </a:r>
+          </a:p>
+        </p:txBody>
+      </p:sp>
+      <p:sp>
+        <p:nvSpPr>
+          <p:cNvPr id="12" name="TextBox 11"/>
           <p:cNvSpPr txBox="1"/>
           <p:nvPr/>
         </p:nvSpPr>
         <p:spPr>
           <a:xfrm>
-            <a:off x="6355080" y="2999232"/>
-            <a:ext cx="5029200" cy="228600"/>
+            <a:off x="365760" y="6400800"/>
+            <a:ext cx="914400" cy="274320"/>
           </a:xfrm>
           <a:prstGeom prst="rect">
             <a:avLst/>
@@ -10538,249 +8405,14 @@
           </a:bodyPr>
           <a:lstStyle/>
           <a:p>
-            <a:pPr algn="l">
-              <a:defRPr sz="1000" b="1">
-                <a:solidFill>
-                  <a:srgbClr val="B7791F"/>
-                </a:solidFill>
-                <a:latin typeface="Yu Gothic"/>
-              </a:defRPr>
-            </a:pPr>
-            <a:r>
-              <a:t>座右の銘</a:t>
-            </a:r>
-          </a:p>
-        </p:txBody>
-      </p:sp>
-      <p:sp>
-        <p:nvSpPr>
-          <p:cNvPr id="31" name="TextBox 30"/>
-          <p:cNvSpPr txBox="1"/>
-          <p:nvPr/>
-        </p:nvSpPr>
-        <p:spPr>
-          <a:xfrm>
-            <a:off x="6355080" y="3200400"/>
-            <a:ext cx="5029200" cy="594360"/>
-          </a:xfrm>
-          <a:prstGeom prst="rect">
-            <a:avLst/>
-          </a:prstGeom>
-          <a:noFill/>
-        </p:spPr>
-        <p:txBody>
-          <a:bodyPr wrap="square">
-            <a:spAutoFit/>
-          </a:bodyPr>
-          <a:lstStyle/>
-          <a:p>
-            <a:pPr algn="l">
-              <a:defRPr sz="1500" b="0">
-                <a:solidFill>
-                  <a:srgbClr val="1A202C"/>
-                </a:solidFill>
-                <a:latin typeface="Yu Gothic"/>
-              </a:defRPr>
-            </a:pPr>
-            <a:r>
-              <a:t>「大隠朝市」</a:t>
-            </a:r>
-            <a:br/>
-            <a:r>
-              <a:t>「未解決の課題は他の分野では90%解決されている」</a:t>
-            </a:r>
-          </a:p>
-        </p:txBody>
-      </p:sp>
-      <p:sp>
-        <p:nvSpPr>
-          <p:cNvPr id="32" name="Rounded Rectangle 31"/>
-          <p:cNvSpPr/>
-          <p:nvPr/>
-        </p:nvSpPr>
-        <p:spPr>
-          <a:xfrm>
-            <a:off x="731520" y="4114800"/>
-            <a:ext cx="10698480" cy="822960"/>
-          </a:xfrm>
-          <a:prstGeom prst="roundRect">
-            <a:avLst/>
-          </a:prstGeom>
-          <a:solidFill>
-            <a:srgbClr val="E9D8FD"/>
-          </a:solidFill>
-          <a:ln>
-            <a:noFill/>
-          </a:ln>
-        </p:spPr>
-        <p:style>
-          <a:lnRef idx="1">
-            <a:schemeClr val="accent1"/>
-          </a:lnRef>
-          <a:fillRef idx="3">
-            <a:schemeClr val="accent1"/>
-          </a:fillRef>
-          <a:effectRef idx="2">
-            <a:schemeClr val="accent1"/>
-          </a:effectRef>
-          <a:fontRef idx="minor">
-            <a:schemeClr val="lt1"/>
-          </a:fontRef>
-        </p:style>
-        <p:txBody>
-          <a:bodyPr rtlCol="0" anchor="ctr"/>
-          <a:lstStyle/>
-          <a:p>
-            <a:pPr algn="ctr"/>
-          </a:p>
-        </p:txBody>
-      </p:sp>
-      <p:sp>
-        <p:nvSpPr>
-          <p:cNvPr id="33" name="Rectangle 32"/>
-          <p:cNvSpPr/>
-          <p:nvPr/>
-        </p:nvSpPr>
-        <p:spPr>
-          <a:xfrm>
-            <a:off x="731520" y="4114800"/>
-            <a:ext cx="63500" cy="822960"/>
-          </a:xfrm>
-          <a:prstGeom prst="rect">
-            <a:avLst/>
-          </a:prstGeom>
-          <a:solidFill>
-            <a:srgbClr val="553C9A"/>
-          </a:solidFill>
-          <a:ln>
-            <a:noFill/>
-          </a:ln>
-        </p:spPr>
-        <p:style>
-          <a:lnRef idx="1">
-            <a:schemeClr val="accent1"/>
-          </a:lnRef>
-          <a:fillRef idx="3">
-            <a:schemeClr val="accent1"/>
-          </a:fillRef>
-          <a:effectRef idx="2">
-            <a:schemeClr val="accent1"/>
-          </a:effectRef>
-          <a:fontRef idx="minor">
-            <a:schemeClr val="lt1"/>
-          </a:fontRef>
-        </p:style>
-        <p:txBody>
-          <a:bodyPr rtlCol="0" anchor="ctr"/>
-          <a:lstStyle/>
-          <a:p>
-            <a:pPr algn="ctr"/>
-          </a:p>
-        </p:txBody>
-      </p:sp>
-      <p:sp>
-        <p:nvSpPr>
-          <p:cNvPr id="34" name="TextBox 33"/>
-          <p:cNvSpPr txBox="1"/>
-          <p:nvPr/>
-        </p:nvSpPr>
-        <p:spPr>
-          <a:xfrm>
-            <a:off x="960120" y="4187952"/>
-            <a:ext cx="10424160" cy="228600"/>
-          </a:xfrm>
-          <a:prstGeom prst="rect">
-            <a:avLst/>
-          </a:prstGeom>
-          <a:noFill/>
-        </p:spPr>
-        <p:txBody>
-          <a:bodyPr wrap="square">
-            <a:spAutoFit/>
-          </a:bodyPr>
-          <a:lstStyle/>
-          <a:p>
-            <a:pPr algn="l">
-              <a:defRPr sz="1000" b="1">
-                <a:solidFill>
-                  <a:srgbClr val="553C9A"/>
-                </a:solidFill>
-                <a:latin typeface="Yu Gothic"/>
-              </a:defRPr>
-            </a:pPr>
-            <a:r>
-              <a:t>研究者としての目標</a:t>
-            </a:r>
-          </a:p>
-        </p:txBody>
-      </p:sp>
-      <p:sp>
-        <p:nvSpPr>
-          <p:cNvPr id="35" name="TextBox 34"/>
-          <p:cNvSpPr txBox="1"/>
-          <p:nvPr/>
-        </p:nvSpPr>
-        <p:spPr>
-          <a:xfrm>
-            <a:off x="960120" y="4389120"/>
-            <a:ext cx="10424160" cy="502920"/>
-          </a:xfrm>
-          <a:prstGeom prst="rect">
-            <a:avLst/>
-          </a:prstGeom>
-          <a:noFill/>
-        </p:spPr>
-        <p:txBody>
-          <a:bodyPr wrap="square">
-            <a:spAutoFit/>
-          </a:bodyPr>
-          <a:lstStyle/>
-          <a:p>
-            <a:pPr algn="l">
-              <a:defRPr sz="1500" b="0">
-                <a:solidFill>
-                  <a:srgbClr val="1A202C"/>
-                </a:solidFill>
-                <a:latin typeface="Yu Gothic"/>
-              </a:defRPr>
-            </a:pPr>
-            <a:r>
-              <a:t>蝋人形になること — 後世に残る研究業績を確立し、不朽の存在として認知される</a:t>
-            </a:r>
-          </a:p>
-        </p:txBody>
-      </p:sp>
-      <p:sp>
-        <p:nvSpPr>
-          <p:cNvPr id="36" name="TextBox 35"/>
-          <p:cNvSpPr txBox="1"/>
-          <p:nvPr/>
-        </p:nvSpPr>
-        <p:spPr>
-          <a:xfrm>
-            <a:off x="365760" y="6400800"/>
-            <a:ext cx="914400" cy="274320"/>
-          </a:xfrm>
-          <a:prstGeom prst="rect">
-            <a:avLst/>
-          </a:prstGeom>
-          <a:noFill/>
-        </p:spPr>
-        <p:txBody>
-          <a:bodyPr wrap="square">
-            <a:spAutoFit/>
-          </a:bodyPr>
-          <a:lstStyle/>
-          <a:p>
-            <a:pPr algn="l">
-              <a:defRPr sz="1000" b="0">
+            <a:pPr algn="l"/>
+            <a:r>
+              <a:rPr sz="1000" b="0">
                 <a:solidFill>
                   <a:srgbClr val="4A5568"/>
                 </a:solidFill>
                 <a:latin typeface="Yu Gothic"/>
-              </a:defRPr>
-            </a:pPr>
-            <a:r>
+              </a:rPr>
               <a:t>3 / 16</a:t>
             </a:r>
           </a:p>
@@ -10834,15 +8466,14 @@
           </a:bodyPr>
           <a:lstStyle/>
           <a:p>
-            <a:pPr algn="l">
-              <a:defRPr sz="3200" b="1">
+            <a:pPr algn="l"/>
+            <a:r>
+              <a:rPr sz="3200" b="1">
                 <a:solidFill>
                   <a:srgbClr val="1A365D"/>
                 </a:solidFill>
                 <a:latin typeface="Yu Gothic"/>
-              </a:defRPr>
-            </a:pPr>
-            <a:r>
+              </a:rPr>
               <a:t>Phase 1：麻酔科臨床期</a:t>
             </a:r>
           </a:p>
@@ -10929,7 +8560,7 @@
               <a:t>1-1  </a:t>
             </a:r>
             <a:r>
-              <a:rPr sz="1600">
+              <a:rPr sz="1600" b="0">
                 <a:solidFill>
                   <a:srgbClr val="1A202C"/>
                 </a:solidFill>
@@ -10954,7 +8585,7 @@
               <a:t>1-2  </a:t>
             </a:r>
             <a:r>
-              <a:rPr sz="1600">
+              <a:rPr sz="1600" b="0">
                 <a:solidFill>
                   <a:srgbClr val="1A202C"/>
                 </a:solidFill>
@@ -10970,7 +8601,7 @@
               </a:spcBef>
             </a:pPr>
             <a:r>
-              <a:rPr sz="1200">
+              <a:rPr sz="1200" b="0">
                 <a:solidFill>
                   <a:srgbClr val="4A5568"/>
                 </a:solidFill>
@@ -10995,7 +8626,7 @@
               <a:t>1-3  </a:t>
             </a:r>
             <a:r>
-              <a:rPr sz="1600">
+              <a:rPr sz="1600" b="0">
                 <a:solidFill>
                   <a:srgbClr val="1A202C"/>
                 </a:solidFill>
@@ -11020,7 +8651,7 @@
               <a:t>1-4  </a:t>
             </a:r>
             <a:r>
-              <a:rPr sz="1600">
+              <a:rPr sz="1600" b="0">
                 <a:solidFill>
                   <a:srgbClr val="1A202C"/>
                 </a:solidFill>
@@ -11045,7 +8676,7 @@
               <a:t>1-5  </a:t>
             </a:r>
             <a:r>
-              <a:rPr sz="1600">
+              <a:rPr sz="1600" b="0">
                 <a:solidFill>
                   <a:srgbClr val="1A202C"/>
                 </a:solidFill>
@@ -11102,15 +8733,14 @@
           </a:bodyPr>
           <a:lstStyle/>
           <a:p>
-            <a:pPr algn="l">
-              <a:defRPr sz="1000" b="0">
+            <a:pPr algn="l"/>
+            <a:r>
+              <a:rPr sz="1000" b="0">
                 <a:solidFill>
                   <a:srgbClr val="4A5568"/>
                 </a:solidFill>
                 <a:latin typeface="Yu Gothic"/>
-              </a:defRPr>
-            </a:pPr>
-            <a:r>
+              </a:rPr>
               <a:t>4 / 16</a:t>
             </a:r>
           </a:p>
@@ -11164,15 +8794,14 @@
           </a:bodyPr>
           <a:lstStyle/>
           <a:p>
-            <a:pPr algn="l">
-              <a:defRPr sz="3200" b="1">
+            <a:pPr algn="l"/>
+            <a:r>
+              <a:rPr sz="3200" b="1">
                 <a:solidFill>
                   <a:srgbClr val="1A365D"/>
                 </a:solidFill>
                 <a:latin typeface="Yu Gothic"/>
-              </a:defRPr>
-            </a:pPr>
-            <a:r>
+              </a:rPr>
               <a:t>Phase 1：「天才麻酔科医」の紹介</a:t>
             </a:r>
           </a:p>
@@ -11254,7 +8883,7 @@
         <p:spPr>
           <a:xfrm>
             <a:off x="6400800" y="1371600"/>
-            <a:ext cx="5303520" cy="1828800"/>
+            <a:ext cx="5303520" cy="2011680"/>
           </a:xfrm>
           <a:prstGeom prst="roundRect">
             <a:avLst/>
@@ -11262,8 +8891,10 @@
           <a:solidFill>
             <a:srgbClr val="EBF8FF"/>
           </a:solidFill>
-          <a:ln>
-            <a:noFill/>
+          <a:ln w="25400">
+            <a:solidFill>
+              <a:srgbClr val="2B6CB0"/>
+            </a:solidFill>
           </a:ln>
         </p:spPr>
         <p:style>
@@ -11281,32 +8912,65 @@
           </a:fontRef>
         </p:style>
         <p:txBody>
-          <a:bodyPr rtlCol="0" anchor="ctr"/>
-          <a:lstStyle/>
-          <a:p>
-            <a:pPr algn="ctr"/>
-          </a:p>
-        </p:txBody>
-      </p:sp>
-      <p:sp>
-        <p:nvSpPr>
-          <p:cNvPr id="6" name="Rectangle 5"/>
+          <a:bodyPr rtlCol="0" anchor="ctr" wrap="square" lIns="137160" rIns="137160" tIns="73152" bIns="73152"/>
+          <a:lstStyle/>
+          <a:p>
+            <a:pPr algn="l">
+              <a:spcBef>
+                <a:spcPts val="200"/>
+              </a:spcBef>
+            </a:pPr>
+            <a:r>
+              <a:rPr sz="1000" b="1">
+                <a:solidFill>
+                  <a:srgbClr val="2B6CB0"/>
+                </a:solidFill>
+                <a:latin typeface="Yu Gothic"/>
+              </a:rPr>
+              <a:t>書籍より引用</a:t>
+            </a:r>
+          </a:p>
+          <a:p>
+            <a:pPr algn="l">
+              <a:spcBef>
+                <a:spcPts val="200"/>
+              </a:spcBef>
+            </a:pPr>
+            <a:r>
+              <a:rPr sz="1400" b="0">
+                <a:solidFill>
+                  <a:srgbClr val="1A202C"/>
+                </a:solidFill>
+                <a:latin typeface="Yu Gothic"/>
+              </a:rPr>
+              <a:t>「例えば東京の市中病院で働く天才麻酔科医はおるのだが…」
+— 酒井哲郎先生
+『麻酔科診療にみる医学留学へのパスポート』</a:t>
+            </a:r>
+          </a:p>
+        </p:txBody>
+      </p:sp>
+      <p:sp>
+        <p:nvSpPr>
+          <p:cNvPr id="6" name="Rounded Rectangle 5"/>
           <p:cNvSpPr/>
           <p:nvPr/>
         </p:nvSpPr>
         <p:spPr>
           <a:xfrm>
-            <a:off x="6400800" y="1371600"/>
-            <a:ext cx="63500" cy="1828800"/>
-          </a:xfrm>
-          <a:prstGeom prst="rect">
+            <a:off x="6400800" y="3657600"/>
+            <a:ext cx="5303520" cy="1371600"/>
+          </a:xfrm>
+          <a:prstGeom prst="roundRect">
             <a:avLst/>
           </a:prstGeom>
           <a:solidFill>
-            <a:srgbClr val="2B6CB0"/>
+            <a:srgbClr val="FEFCBF"/>
           </a:solidFill>
-          <a:ln>
-            <a:noFill/>
+          <a:ln w="25400">
+            <a:solidFill>
+              <a:srgbClr val="B7791F"/>
+            </a:solidFill>
           </a:ln>
         </p:spPr>
         <p:style>
@@ -11324,10 +8988,40 @@
           </a:fontRef>
         </p:style>
         <p:txBody>
-          <a:bodyPr rtlCol="0" anchor="ctr"/>
-          <a:lstStyle/>
-          <a:p>
-            <a:pPr algn="ctr"/>
+          <a:bodyPr rtlCol="0" anchor="ctr" wrap="square" lIns="137160" rIns="137160" tIns="73152" bIns="73152"/>
+          <a:lstStyle/>
+          <a:p>
+            <a:pPr algn="l">
+              <a:spcBef>
+                <a:spcPts val="200"/>
+              </a:spcBef>
+            </a:pPr>
+            <a:r>
+              <a:rPr sz="1000" b="1">
+                <a:solidFill>
+                  <a:srgbClr val="B7791F"/>
+                </a:solidFill>
+                <a:latin typeface="Yu Gothic"/>
+              </a:rPr>
+              <a:t>天野篤先生との関係</a:t>
+            </a:r>
+          </a:p>
+          <a:p>
+            <a:pPr algn="l">
+              <a:spcBef>
+                <a:spcPts val="200"/>
+              </a:spcBef>
+            </a:pPr>
+            <a:r>
+              <a:rPr sz="1400" b="0">
+                <a:solidFill>
+                  <a:srgbClr val="1A202C"/>
+                </a:solidFill>
+                <a:latin typeface="Yu Gothic"/>
+              </a:rPr>
+              <a:t>天野篤先生（上皇の心臓バイパス手術執刀医）から
+お見合いを紹介されるほどの信頼関係</a:t>
+            </a:r>
           </a:p>
         </p:txBody>
       </p:sp>
@@ -11339,8 +9033,8 @@
         </p:nvSpPr>
         <p:spPr>
           <a:xfrm>
-            <a:off x="6629400" y="1444752"/>
-            <a:ext cx="5029200" cy="228600"/>
+            <a:off x="365760" y="6400800"/>
+            <a:ext cx="914400" cy="274320"/>
           </a:xfrm>
           <a:prstGeom prst="rect">
             <a:avLst/>
@@ -11353,258 +9047,14 @@
           </a:bodyPr>
           <a:lstStyle/>
           <a:p>
-            <a:pPr algn="l">
-              <a:defRPr sz="1000" b="1">
-                <a:solidFill>
-                  <a:srgbClr val="2B6CB0"/>
-                </a:solidFill>
-                <a:latin typeface="Yu Gothic"/>
-              </a:defRPr>
-            </a:pPr>
-            <a:r>
-              <a:t>書籍より引用</a:t>
-            </a:r>
-          </a:p>
-        </p:txBody>
-      </p:sp>
-      <p:sp>
-        <p:nvSpPr>
-          <p:cNvPr id="8" name="TextBox 7"/>
-          <p:cNvSpPr txBox="1"/>
-          <p:nvPr/>
-        </p:nvSpPr>
-        <p:spPr>
-          <a:xfrm>
-            <a:off x="6629400" y="1645920"/>
-            <a:ext cx="5029200" cy="1508760"/>
-          </a:xfrm>
-          <a:prstGeom prst="rect">
-            <a:avLst/>
-          </a:prstGeom>
-          <a:noFill/>
-        </p:spPr>
-        <p:txBody>
-          <a:bodyPr wrap="square">
-            <a:spAutoFit/>
-          </a:bodyPr>
-          <a:lstStyle/>
-          <a:p>
-            <a:pPr algn="l">
-              <a:defRPr sz="1500" b="0">
-                <a:solidFill>
-                  <a:srgbClr val="1A202C"/>
-                </a:solidFill>
-                <a:latin typeface="Yu Gothic"/>
-              </a:defRPr>
-            </a:pPr>
-            <a:r>
-              <a:t>「例えば東京の市中病院で働く天才麻酔科医はおるのだが…」</a:t>
-            </a:r>
-            <a:br/>
-            <a:br/>
-            <a:r>
-              <a:t>— 酒井哲郎先生</a:t>
-            </a:r>
-            <a:br/>
-            <a:r>
-              <a:t>『麻酔科診療にみる医学留学へのパスポート』</a:t>
-            </a:r>
-          </a:p>
-        </p:txBody>
-      </p:sp>
-      <p:sp>
-        <p:nvSpPr>
-          <p:cNvPr id="9" name="Rounded Rectangle 8"/>
-          <p:cNvSpPr/>
-          <p:nvPr/>
-        </p:nvSpPr>
-        <p:spPr>
-          <a:xfrm>
-            <a:off x="6400800" y="3474720"/>
-            <a:ext cx="5303520" cy="1371600"/>
-          </a:xfrm>
-          <a:prstGeom prst="roundRect">
-            <a:avLst/>
-          </a:prstGeom>
-          <a:solidFill>
-            <a:srgbClr val="FEFCBF"/>
-          </a:solidFill>
-          <a:ln>
-            <a:noFill/>
-          </a:ln>
-        </p:spPr>
-        <p:style>
-          <a:lnRef idx="1">
-            <a:schemeClr val="accent1"/>
-          </a:lnRef>
-          <a:fillRef idx="3">
-            <a:schemeClr val="accent1"/>
-          </a:fillRef>
-          <a:effectRef idx="2">
-            <a:schemeClr val="accent1"/>
-          </a:effectRef>
-          <a:fontRef idx="minor">
-            <a:schemeClr val="lt1"/>
-          </a:fontRef>
-        </p:style>
-        <p:txBody>
-          <a:bodyPr rtlCol="0" anchor="ctr"/>
-          <a:lstStyle/>
-          <a:p>
-            <a:pPr algn="ctr"/>
-          </a:p>
-        </p:txBody>
-      </p:sp>
-      <p:sp>
-        <p:nvSpPr>
-          <p:cNvPr id="10" name="Rectangle 9"/>
-          <p:cNvSpPr/>
-          <p:nvPr/>
-        </p:nvSpPr>
-        <p:spPr>
-          <a:xfrm>
-            <a:off x="6400800" y="3474720"/>
-            <a:ext cx="63500" cy="1371600"/>
-          </a:xfrm>
-          <a:prstGeom prst="rect">
-            <a:avLst/>
-          </a:prstGeom>
-          <a:solidFill>
-            <a:srgbClr val="B7791F"/>
-          </a:solidFill>
-          <a:ln>
-            <a:noFill/>
-          </a:ln>
-        </p:spPr>
-        <p:style>
-          <a:lnRef idx="1">
-            <a:schemeClr val="accent1"/>
-          </a:lnRef>
-          <a:fillRef idx="3">
-            <a:schemeClr val="accent1"/>
-          </a:fillRef>
-          <a:effectRef idx="2">
-            <a:schemeClr val="accent1"/>
-          </a:effectRef>
-          <a:fontRef idx="minor">
-            <a:schemeClr val="lt1"/>
-          </a:fontRef>
-        </p:style>
-        <p:txBody>
-          <a:bodyPr rtlCol="0" anchor="ctr"/>
-          <a:lstStyle/>
-          <a:p>
-            <a:pPr algn="ctr"/>
-          </a:p>
-        </p:txBody>
-      </p:sp>
-      <p:sp>
-        <p:nvSpPr>
-          <p:cNvPr id="11" name="TextBox 10"/>
-          <p:cNvSpPr txBox="1"/>
-          <p:nvPr/>
-        </p:nvSpPr>
-        <p:spPr>
-          <a:xfrm>
-            <a:off x="6629400" y="3547872"/>
-            <a:ext cx="5029200" cy="228600"/>
-          </a:xfrm>
-          <a:prstGeom prst="rect">
-            <a:avLst/>
-          </a:prstGeom>
-          <a:noFill/>
-        </p:spPr>
-        <p:txBody>
-          <a:bodyPr wrap="square">
-            <a:spAutoFit/>
-          </a:bodyPr>
-          <a:lstStyle/>
-          <a:p>
-            <a:pPr algn="l">
-              <a:defRPr sz="1000" b="1">
-                <a:solidFill>
-                  <a:srgbClr val="B7791F"/>
-                </a:solidFill>
-                <a:latin typeface="Yu Gothic"/>
-              </a:defRPr>
-            </a:pPr>
-            <a:r>
-              <a:t>天野篤先生との関係</a:t>
-            </a:r>
-          </a:p>
-        </p:txBody>
-      </p:sp>
-      <p:sp>
-        <p:nvSpPr>
-          <p:cNvPr id="12" name="TextBox 11"/>
-          <p:cNvSpPr txBox="1"/>
-          <p:nvPr/>
-        </p:nvSpPr>
-        <p:spPr>
-          <a:xfrm>
-            <a:off x="6629400" y="3749040"/>
-            <a:ext cx="5029200" cy="1051560"/>
-          </a:xfrm>
-          <a:prstGeom prst="rect">
-            <a:avLst/>
-          </a:prstGeom>
-          <a:noFill/>
-        </p:spPr>
-        <p:txBody>
-          <a:bodyPr wrap="square">
-            <a:spAutoFit/>
-          </a:bodyPr>
-          <a:lstStyle/>
-          <a:p>
-            <a:pPr algn="l">
-              <a:defRPr sz="1500" b="0">
-                <a:solidFill>
-                  <a:srgbClr val="1A202C"/>
-                </a:solidFill>
-                <a:latin typeface="Yu Gothic"/>
-              </a:defRPr>
-            </a:pPr>
-            <a:r>
-              <a:t>天野篤先生（上皇の心臓バイパス手術執刀医）から</a:t>
-            </a:r>
-            <a:br/>
-            <a:r>
-              <a:t>お見合いを紹介されるほどの信頼関係</a:t>
-            </a:r>
-          </a:p>
-        </p:txBody>
-      </p:sp>
-      <p:sp>
-        <p:nvSpPr>
-          <p:cNvPr id="13" name="TextBox 12"/>
-          <p:cNvSpPr txBox="1"/>
-          <p:nvPr/>
-        </p:nvSpPr>
-        <p:spPr>
-          <a:xfrm>
-            <a:off x="365760" y="6400800"/>
-            <a:ext cx="914400" cy="274320"/>
-          </a:xfrm>
-          <a:prstGeom prst="rect">
-            <a:avLst/>
-          </a:prstGeom>
-          <a:noFill/>
-        </p:spPr>
-        <p:txBody>
-          <a:bodyPr wrap="square">
-            <a:spAutoFit/>
-          </a:bodyPr>
-          <a:lstStyle/>
-          <a:p>
-            <a:pPr algn="l">
-              <a:defRPr sz="1000" b="0">
+            <a:pPr algn="l"/>
+            <a:r>
+              <a:rPr sz="1000" b="0">
                 <a:solidFill>
                   <a:srgbClr val="4A5568"/>
                 </a:solidFill>
                 <a:latin typeface="Yu Gothic"/>
-              </a:defRPr>
-            </a:pPr>
-            <a:r>
+              </a:rPr>
               <a:t>5 / 16</a:t>
             </a:r>
           </a:p>
@@ -11658,15 +9108,14 @@
           </a:bodyPr>
           <a:lstStyle/>
           <a:p>
-            <a:pPr algn="l">
-              <a:defRPr sz="3200" b="1">
+            <a:pPr algn="l"/>
+            <a:r>
+              <a:rPr sz="3200" b="1">
                 <a:solidFill>
                   <a:srgbClr val="1A365D"/>
                 </a:solidFill>
                 <a:latin typeface="Yu Gothic"/>
-              </a:defRPr>
-            </a:pPr>
-            <a:r>
+              </a:rPr>
               <a:t>Phase 2：医工連携期</a:t>
             </a:r>
           </a:p>
@@ -11724,7 +9173,7 @@
         <p:spPr>
           <a:xfrm>
             <a:off x="731520" y="1188720"/>
-            <a:ext cx="10515600" cy="1828800"/>
+            <a:ext cx="10515600" cy="1463040"/>
           </a:xfrm>
           <a:prstGeom prst="rect">
             <a:avLst/>
@@ -11753,7 +9202,7 @@
               <a:t>2-1  </a:t>
             </a:r>
             <a:r>
-              <a:rPr sz="1600">
+              <a:rPr sz="1600" b="0">
                 <a:solidFill>
                   <a:srgbClr val="1A202C"/>
                 </a:solidFill>
@@ -11778,7 +9227,7 @@
               <a:t>2-2  </a:t>
             </a:r>
             <a:r>
-              <a:rPr sz="1600">
+              <a:rPr sz="1600" b="0">
                 <a:solidFill>
                   <a:srgbClr val="1A202C"/>
                 </a:solidFill>
@@ -11803,7 +9252,7 @@
               <a:t>2-3  </a:t>
             </a:r>
             <a:r>
-              <a:rPr sz="1600">
+              <a:rPr sz="1600" b="0">
                 <a:solidFill>
                   <a:srgbClr val="1A202C"/>
                 </a:solidFill>
@@ -11822,7 +9271,7 @@
         </p:nvSpPr>
         <p:spPr>
           <a:xfrm>
-            <a:off x="731520" y="2743200"/>
+            <a:off x="731520" y="2926080"/>
             <a:ext cx="10515600" cy="1097280"/>
           </a:xfrm>
           <a:prstGeom prst="roundRect">
@@ -11831,8 +9280,10 @@
           <a:solidFill>
             <a:srgbClr val="E6FFFA"/>
           </a:solidFill>
-          <a:ln>
-            <a:noFill/>
+          <a:ln w="25400">
+            <a:solidFill>
+              <a:srgbClr val="2C7A7B"/>
+            </a:solidFill>
           </a:ln>
         </p:spPr>
         <p:style>
@@ -11850,142 +9301,53 @@
           </a:fontRef>
         </p:style>
         <p:txBody>
-          <a:bodyPr rtlCol="0" anchor="ctr"/>
-          <a:lstStyle/>
-          <a:p>
-            <a:pPr algn="ctr"/>
-          </a:p>
-        </p:txBody>
-      </p:sp>
-      <p:sp>
-        <p:nvSpPr>
-          <p:cNvPr id="6" name="Rectangle 5"/>
+          <a:bodyPr rtlCol="0" anchor="ctr" wrap="square" lIns="137160" rIns="137160" tIns="73152" bIns="73152"/>
+          <a:lstStyle/>
+          <a:p>
+            <a:pPr algn="l">
+              <a:spcBef>
+                <a:spcPts val="200"/>
+              </a:spcBef>
+            </a:pPr>
+            <a:r>
+              <a:rPr sz="1000" b="1">
+                <a:solidFill>
+                  <a:srgbClr val="2C7A7B"/>
+                </a:solidFill>
+                <a:latin typeface="Yu Gothic"/>
+              </a:rPr>
+              <a:t>麻酔科の特異性</a:t>
+            </a:r>
+          </a:p>
+          <a:p>
+            <a:pPr algn="l">
+              <a:spcBef>
+                <a:spcPts val="200"/>
+              </a:spcBef>
+            </a:pPr>
+            <a:r>
+              <a:rPr sz="1400" b="0">
+                <a:solidFill>
+                  <a:srgbClr val="1A202C"/>
+                </a:solidFill>
+                <a:latin typeface="Yu Gothic"/>
+              </a:rPr>
+              <a:t>全身麻酔の効く仕組みには十分な科学的根拠がまだない。
+医学部を持たない京都工業繊維大学の研究が最も核心に迫っている — 分野横断的アプローチの重要性</a:t>
+            </a:r>
+          </a:p>
+        </p:txBody>
+      </p:sp>
+      <p:sp>
+        <p:nvSpPr>
+          <p:cNvPr id="6" name="Rounded Rectangle 5"/>
           <p:cNvSpPr/>
           <p:nvPr/>
         </p:nvSpPr>
         <p:spPr>
           <a:xfrm>
-            <a:off x="731520" y="2743200"/>
-            <a:ext cx="63500" cy="1097280"/>
-          </a:xfrm>
-          <a:prstGeom prst="rect">
-            <a:avLst/>
-          </a:prstGeom>
-          <a:solidFill>
-            <a:srgbClr val="2C7A7B"/>
-          </a:solidFill>
-          <a:ln>
-            <a:noFill/>
-          </a:ln>
-        </p:spPr>
-        <p:style>
-          <a:lnRef idx="1">
-            <a:schemeClr val="accent1"/>
-          </a:lnRef>
-          <a:fillRef idx="3">
-            <a:schemeClr val="accent1"/>
-          </a:fillRef>
-          <a:effectRef idx="2">
-            <a:schemeClr val="accent1"/>
-          </a:effectRef>
-          <a:fontRef idx="minor">
-            <a:schemeClr val="lt1"/>
-          </a:fontRef>
-        </p:style>
-        <p:txBody>
-          <a:bodyPr rtlCol="0" anchor="ctr"/>
-          <a:lstStyle/>
-          <a:p>
-            <a:pPr algn="ctr"/>
-          </a:p>
-        </p:txBody>
-      </p:sp>
-      <p:sp>
-        <p:nvSpPr>
-          <p:cNvPr id="7" name="TextBox 6"/>
-          <p:cNvSpPr txBox="1"/>
-          <p:nvPr/>
-        </p:nvSpPr>
-        <p:spPr>
-          <a:xfrm>
-            <a:off x="960120" y="2816352"/>
-            <a:ext cx="10241280" cy="228600"/>
-          </a:xfrm>
-          <a:prstGeom prst="rect">
-            <a:avLst/>
-          </a:prstGeom>
-          <a:noFill/>
-        </p:spPr>
-        <p:txBody>
-          <a:bodyPr wrap="square">
-            <a:spAutoFit/>
-          </a:bodyPr>
-          <a:lstStyle/>
-          <a:p>
-            <a:pPr algn="l">
-              <a:defRPr sz="1000" b="1">
-                <a:solidFill>
-                  <a:srgbClr val="2C7A7B"/>
-                </a:solidFill>
-                <a:latin typeface="Yu Gothic"/>
-              </a:defRPr>
-            </a:pPr>
-            <a:r>
-              <a:t>麻酔科の特異性</a:t>
-            </a:r>
-          </a:p>
-        </p:txBody>
-      </p:sp>
-      <p:sp>
-        <p:nvSpPr>
-          <p:cNvPr id="8" name="TextBox 7"/>
-          <p:cNvSpPr txBox="1"/>
-          <p:nvPr/>
-        </p:nvSpPr>
-        <p:spPr>
-          <a:xfrm>
-            <a:off x="960120" y="3017520"/>
-            <a:ext cx="10241280" cy="777240"/>
-          </a:xfrm>
-          <a:prstGeom prst="rect">
-            <a:avLst/>
-          </a:prstGeom>
-          <a:noFill/>
-        </p:spPr>
-        <p:txBody>
-          <a:bodyPr wrap="square">
-            <a:spAutoFit/>
-          </a:bodyPr>
-          <a:lstStyle/>
-          <a:p>
-            <a:pPr algn="l">
-              <a:defRPr sz="1500" b="0">
-                <a:solidFill>
-                  <a:srgbClr val="1A202C"/>
-                </a:solidFill>
-                <a:latin typeface="Yu Gothic"/>
-              </a:defRPr>
-            </a:pPr>
-            <a:r>
-              <a:t>全身麻酔の効く仕組みには十分な科学的根拠がまだない。</a:t>
-            </a:r>
-            <a:br/>
-            <a:r>
-              <a:t>医学部を持たない京都工業繊維大学の研究が最も核心に迫っている — 分野横断的アプローチの重要性</a:t>
-            </a:r>
-          </a:p>
-        </p:txBody>
-      </p:sp>
-      <p:sp>
-        <p:nvSpPr>
-          <p:cNvPr id="9" name="Rounded Rectangle 8"/>
-          <p:cNvSpPr/>
-          <p:nvPr/>
-        </p:nvSpPr>
-        <p:spPr>
-          <a:xfrm>
-            <a:off x="731520" y="4114800"/>
-            <a:ext cx="5029200" cy="2286000"/>
+            <a:off x="731520" y="4297680"/>
+            <a:ext cx="5029200" cy="2103120"/>
           </a:xfrm>
           <a:prstGeom prst="roundRect">
             <a:avLst/>
@@ -12014,82 +9376,32 @@
           </a:fontRef>
         </p:style>
         <p:txBody>
-          <a:bodyPr rtlCol="0" anchor="ctr"/>
-          <a:lstStyle/>
-          <a:p>
-            <a:pPr algn="ctr"/>
-          </a:p>
-        </p:txBody>
-      </p:sp>
-      <p:sp>
-        <p:nvSpPr>
-          <p:cNvPr id="10" name="TextBox 9"/>
-          <p:cNvSpPr txBox="1"/>
-          <p:nvPr/>
-        </p:nvSpPr>
-        <p:spPr>
-          <a:xfrm>
-            <a:off x="1005840" y="4297680"/>
-            <a:ext cx="4572000" cy="365760"/>
-          </a:xfrm>
-          <a:prstGeom prst="rect">
-            <a:avLst/>
-          </a:prstGeom>
-          <a:noFill/>
-        </p:spPr>
-        <p:txBody>
-          <a:bodyPr wrap="square">
-            <a:spAutoFit/>
-          </a:bodyPr>
+          <a:bodyPr rtlCol="0" anchor="ctr" wrap="square" lIns="137160" rIns="137160" tIns="73152" bIns="73152"/>
           <a:lstStyle/>
           <a:p>
             <a:pPr algn="l">
-              <a:defRPr sz="1800" b="1">
+              <a:spcBef>
+                <a:spcPts val="200"/>
+              </a:spcBef>
+            </a:pPr>
+            <a:r>
+              <a:rPr sz="1600" b="1">
                 <a:solidFill>
                   <a:srgbClr val="1A365D"/>
                 </a:solidFill>
                 <a:latin typeface="Yu Gothic"/>
-              </a:defRPr>
-            </a:pPr>
-            <a:r>
+              </a:rPr>
               <a:t>臨床面の特徴</a:t>
             </a:r>
           </a:p>
-        </p:txBody>
-      </p:sp>
-      <p:sp>
-        <p:nvSpPr>
-          <p:cNvPr id="11" name="TextBox 10"/>
-          <p:cNvSpPr txBox="1"/>
-          <p:nvPr/>
-        </p:nvSpPr>
-        <p:spPr>
-          <a:xfrm>
-            <a:off x="1005840" y="4754880"/>
-            <a:ext cx="4572000" cy="1371600"/>
-          </a:xfrm>
-          <a:prstGeom prst="rect">
-            <a:avLst/>
-          </a:prstGeom>
-          <a:noFill/>
-        </p:spPr>
-        <p:txBody>
-          <a:bodyPr wrap="square">
-            <a:spAutoFit/>
-          </a:bodyPr>
-          <a:lstStyle/>
-          <a:p/>
-          <a:p>
-            <a:pPr>
-              <a:spcBef>
-                <a:spcPts val="400"/>
-              </a:spcBef>
-              <a:spcAft>
-                <a:spcPts val="300"/>
-              </a:spcAft>
-            </a:pPr>
-            <a:r>
-              <a:rPr sz="1400" b="0">
+          <a:p>
+            <a:pPr algn="l">
+              <a:spcBef>
+                <a:spcPts val="200"/>
+              </a:spcBef>
+            </a:pPr>
+            <a:r>
+              <a:rPr sz="1300" b="0">
                 <a:solidFill>
                   <a:srgbClr val="1A202C"/>
                 </a:solidFill>
@@ -12099,16 +9411,13 @@
             </a:r>
           </a:p>
           <a:p>
-            <a:pPr>
-              <a:spcBef>
-                <a:spcPts val="400"/>
-              </a:spcBef>
-              <a:spcAft>
-                <a:spcPts val="300"/>
-              </a:spcAft>
-            </a:pPr>
-            <a:r>
-              <a:rPr sz="1400" b="0">
+            <a:pPr algn="l">
+              <a:spcBef>
+                <a:spcPts val="200"/>
+              </a:spcBef>
+            </a:pPr>
+            <a:r>
+              <a:rPr sz="1300" b="0">
                 <a:solidFill>
                   <a:srgbClr val="1A202C"/>
                 </a:solidFill>
@@ -12118,16 +9427,13 @@
             </a:r>
           </a:p>
           <a:p>
-            <a:pPr>
-              <a:spcBef>
-                <a:spcPts val="400"/>
-              </a:spcBef>
-              <a:spcAft>
-                <a:spcPts val="300"/>
-              </a:spcAft>
-            </a:pPr>
-            <a:r>
-              <a:rPr sz="1400" b="0">
+            <a:pPr algn="l">
+              <a:spcBef>
+                <a:spcPts val="200"/>
+              </a:spcBef>
+            </a:pPr>
+            <a:r>
+              <a:rPr sz="1300" b="0">
                 <a:solidFill>
                   <a:srgbClr val="1A202C"/>
                 </a:solidFill>
@@ -12140,14 +9446,14 @@
       </p:sp>
       <p:sp>
         <p:nvSpPr>
-          <p:cNvPr id="12" name="Rounded Rectangle 11"/>
+          <p:cNvPr id="7" name="Rounded Rectangle 6"/>
           <p:cNvSpPr/>
           <p:nvPr/>
         </p:nvSpPr>
         <p:spPr>
           <a:xfrm>
-            <a:off x="6126480" y="4114800"/>
-            <a:ext cx="5303520" cy="2286000"/>
+            <a:off x="6126480" y="4297680"/>
+            <a:ext cx="5303520" cy="2103120"/>
           </a:xfrm>
           <a:prstGeom prst="roundRect">
             <a:avLst/>
@@ -12176,23 +9482,84 @@
           </a:fontRef>
         </p:style>
         <p:txBody>
-          <a:bodyPr rtlCol="0" anchor="ctr"/>
-          <a:lstStyle/>
-          <a:p>
-            <a:pPr algn="ctr"/>
-          </a:p>
-        </p:txBody>
-      </p:sp>
-      <p:sp>
-        <p:nvSpPr>
-          <p:cNvPr id="13" name="TextBox 12"/>
+          <a:bodyPr rtlCol="0" anchor="ctr" wrap="square" lIns="137160" rIns="137160" tIns="73152" bIns="73152"/>
+          <a:lstStyle/>
+          <a:p>
+            <a:pPr algn="l">
+              <a:spcBef>
+                <a:spcPts val="200"/>
+              </a:spcBef>
+            </a:pPr>
+            <a:r>
+              <a:rPr sz="1600" b="1">
+                <a:solidFill>
+                  <a:srgbClr val="1A365D"/>
+                </a:solidFill>
+                <a:latin typeface="Yu Gothic"/>
+              </a:rPr>
+              <a:t>研究面の特徴</a:t>
+            </a:r>
+          </a:p>
+          <a:p>
+            <a:pPr algn="l">
+              <a:spcBef>
+                <a:spcPts val="200"/>
+              </a:spcBef>
+            </a:pPr>
+            <a:r>
+              <a:rPr sz="1300" b="0">
+                <a:solidFill>
+                  <a:srgbClr val="1A202C"/>
+                </a:solidFill>
+                <a:latin typeface="Yu Gothic"/>
+              </a:rPr>
+              <a:t>▸ 数理モデル・シミュレーション需要大</a:t>
+            </a:r>
+          </a:p>
+          <a:p>
+            <a:pPr algn="l">
+              <a:spcBef>
+                <a:spcPts val="200"/>
+              </a:spcBef>
+            </a:pPr>
+            <a:r>
+              <a:rPr sz="1300" b="0">
+                <a:solidFill>
+                  <a:srgbClr val="1A202C"/>
+                </a:solidFill>
+                <a:latin typeface="Yu Gothic"/>
+              </a:rPr>
+              <a:t>▸ 多変量時系列データの宝庫</a:t>
+            </a:r>
+          </a:p>
+          <a:p>
+            <a:pPr algn="l">
+              <a:spcBef>
+                <a:spcPts val="200"/>
+              </a:spcBef>
+            </a:pPr>
+            <a:r>
+              <a:rPr sz="1300" b="0">
+                <a:solidFill>
+                  <a:srgbClr val="1A202C"/>
+                </a:solidFill>
+                <a:latin typeface="Yu Gothic"/>
+              </a:rPr>
+              <a:t>▸ シフト制勤務 → 最適化問題と直結</a:t>
+            </a:r>
+          </a:p>
+        </p:txBody>
+      </p:sp>
+      <p:sp>
+        <p:nvSpPr>
+          <p:cNvPr id="8" name="TextBox 7"/>
           <p:cNvSpPr txBox="1"/>
           <p:nvPr/>
         </p:nvSpPr>
         <p:spPr>
           <a:xfrm>
-            <a:off x="6400800" y="4297680"/>
-            <a:ext cx="4572000" cy="365760"/>
+            <a:off x="365760" y="6400800"/>
+            <a:ext cx="914400" cy="274320"/>
           </a:xfrm>
           <a:prstGeom prst="rect">
             <a:avLst/>
@@ -12205,132 +9572,14 @@
           </a:bodyPr>
           <a:lstStyle/>
           <a:p>
-            <a:pPr algn="l">
-              <a:defRPr sz="1800" b="1">
-                <a:solidFill>
-                  <a:srgbClr val="1A365D"/>
-                </a:solidFill>
-                <a:latin typeface="Yu Gothic"/>
-              </a:defRPr>
-            </a:pPr>
-            <a:r>
-              <a:t>研究面の特徴</a:t>
-            </a:r>
-          </a:p>
-        </p:txBody>
-      </p:sp>
-      <p:sp>
-        <p:nvSpPr>
-          <p:cNvPr id="14" name="TextBox 13"/>
-          <p:cNvSpPr txBox="1"/>
-          <p:nvPr/>
-        </p:nvSpPr>
-        <p:spPr>
-          <a:xfrm>
-            <a:off x="6400800" y="4754880"/>
-            <a:ext cx="4572000" cy="1371600"/>
-          </a:xfrm>
-          <a:prstGeom prst="rect">
-            <a:avLst/>
-          </a:prstGeom>
-          <a:noFill/>
-        </p:spPr>
-        <p:txBody>
-          <a:bodyPr wrap="square">
-            <a:spAutoFit/>
-          </a:bodyPr>
-          <a:lstStyle/>
-          <a:p/>
-          <a:p>
-            <a:pPr>
-              <a:spcBef>
-                <a:spcPts val="400"/>
-              </a:spcBef>
-              <a:spcAft>
-                <a:spcPts val="300"/>
-              </a:spcAft>
-            </a:pPr>
-            <a:r>
-              <a:rPr sz="1400" b="0">
-                <a:solidFill>
-                  <a:srgbClr val="1A202C"/>
-                </a:solidFill>
-                <a:latin typeface="Yu Gothic"/>
-              </a:rPr>
-              <a:t>▸ 数理モデル・シミュレーション需要大</a:t>
-            </a:r>
-          </a:p>
-          <a:p>
-            <a:pPr>
-              <a:spcBef>
-                <a:spcPts val="400"/>
-              </a:spcBef>
-              <a:spcAft>
-                <a:spcPts val="300"/>
-              </a:spcAft>
-            </a:pPr>
-            <a:r>
-              <a:rPr sz="1400" b="0">
-                <a:solidFill>
-                  <a:srgbClr val="1A202C"/>
-                </a:solidFill>
-                <a:latin typeface="Yu Gothic"/>
-              </a:rPr>
-              <a:t>▸ 多変量時系列データの宝庫</a:t>
-            </a:r>
-          </a:p>
-          <a:p>
-            <a:pPr>
-              <a:spcBef>
-                <a:spcPts val="400"/>
-              </a:spcBef>
-              <a:spcAft>
-                <a:spcPts val="300"/>
-              </a:spcAft>
-            </a:pPr>
-            <a:r>
-              <a:rPr sz="1400" b="0">
-                <a:solidFill>
-                  <a:srgbClr val="1A202C"/>
-                </a:solidFill>
-                <a:latin typeface="Yu Gothic"/>
-              </a:rPr>
-              <a:t>▸ シフト制勤務 → 最適化問題と直結</a:t>
-            </a:r>
-          </a:p>
-        </p:txBody>
-      </p:sp>
-      <p:sp>
-        <p:nvSpPr>
-          <p:cNvPr id="15" name="TextBox 14"/>
-          <p:cNvSpPr txBox="1"/>
-          <p:nvPr/>
-        </p:nvSpPr>
-        <p:spPr>
-          <a:xfrm>
-            <a:off x="365760" y="6400800"/>
-            <a:ext cx="914400" cy="274320"/>
-          </a:xfrm>
-          <a:prstGeom prst="rect">
-            <a:avLst/>
-          </a:prstGeom>
-          <a:noFill/>
-        </p:spPr>
-        <p:txBody>
-          <a:bodyPr wrap="square">
-            <a:spAutoFit/>
-          </a:bodyPr>
-          <a:lstStyle/>
-          <a:p>
-            <a:pPr algn="l">
-              <a:defRPr sz="1000" b="0">
+            <a:pPr algn="l"/>
+            <a:r>
+              <a:rPr sz="1000" b="0">
                 <a:solidFill>
                   <a:srgbClr val="4A5568"/>
                 </a:solidFill>
                 <a:latin typeface="Yu Gothic"/>
-              </a:defRPr>
-            </a:pPr>
-            <a:r>
+              </a:rPr>
               <a:t>6 / 16</a:t>
             </a:r>
           </a:p>
@@ -12384,15 +9633,14 @@
           </a:bodyPr>
           <a:lstStyle/>
           <a:p>
-            <a:pPr algn="l">
-              <a:defRPr sz="3200" b="1">
+            <a:pPr algn="l"/>
+            <a:r>
+              <a:rPr sz="3200" b="1">
                 <a:solidFill>
                   <a:srgbClr val="1A365D"/>
                 </a:solidFill>
                 <a:latin typeface="Yu Gothic"/>
-              </a:defRPr>
-            </a:pPr>
-            <a:r>
+              </a:rPr>
               <a:t>Phase 3：公衆衛生・学位取得期</a:t>
             </a:r>
           </a:p>
@@ -12479,7 +9727,7 @@
               <a:t>3-1  </a:t>
             </a:r>
             <a:r>
-              <a:rPr sz="1600">
+              <a:rPr sz="1600" b="0">
                 <a:solidFill>
                   <a:srgbClr val="1A202C"/>
                 </a:solidFill>
@@ -12495,7 +9743,7 @@
               </a:spcBef>
             </a:pPr>
             <a:r>
-              <a:rPr sz="1200">
+              <a:rPr sz="1200" b="0">
                 <a:solidFill>
                   <a:srgbClr val="4A5568"/>
                 </a:solidFill>
@@ -12520,7 +9768,7 @@
               <a:t>3-2  </a:t>
             </a:r>
             <a:r>
-              <a:rPr sz="1600">
+              <a:rPr sz="1600" b="0">
                 <a:solidFill>
                   <a:srgbClr val="1A202C"/>
                 </a:solidFill>
@@ -12545,7 +9793,7 @@
               <a:t>3-3  </a:t>
             </a:r>
             <a:r>
-              <a:rPr sz="1600">
+              <a:rPr sz="1600" b="0">
                 <a:solidFill>
                   <a:srgbClr val="1A202C"/>
                 </a:solidFill>
@@ -12561,7 +9809,7 @@
               </a:spcBef>
             </a:pPr>
             <a:r>
-              <a:rPr sz="1200">
+              <a:rPr sz="1200" b="0">
                 <a:solidFill>
                   <a:srgbClr val="4A5568"/>
                 </a:solidFill>
@@ -12589,8 +9837,10 @@
           <a:solidFill>
             <a:srgbClr val="C6F6D5"/>
           </a:solidFill>
-          <a:ln>
-            <a:noFill/>
+          <a:ln w="25400">
+            <a:solidFill>
+              <a:srgbClr val="276749"/>
+            </a:solidFill>
           </a:ln>
         </p:spPr>
         <p:style>
@@ -12608,32 +9858,64 @@
           </a:fontRef>
         </p:style>
         <p:txBody>
-          <a:bodyPr rtlCol="0" anchor="ctr"/>
-          <a:lstStyle/>
-          <a:p>
-            <a:pPr algn="ctr"/>
-          </a:p>
-        </p:txBody>
-      </p:sp>
-      <p:sp>
-        <p:nvSpPr>
-          <p:cNvPr id="6" name="Rectangle 5"/>
+          <a:bodyPr rtlCol="0" anchor="ctr" wrap="square" lIns="137160" rIns="137160" tIns="73152" bIns="73152"/>
+          <a:lstStyle/>
+          <a:p>
+            <a:pPr algn="l">
+              <a:spcBef>
+                <a:spcPts val="200"/>
+              </a:spcBef>
+            </a:pPr>
+            <a:r>
+              <a:rPr sz="1000" b="1">
+                <a:solidFill>
+                  <a:srgbClr val="276749"/>
+                </a:solidFill>
+                <a:latin typeface="Yu Gothic"/>
+              </a:rPr>
+              <a:t>通訳者としての役割</a:t>
+            </a:r>
+          </a:p>
+          <a:p>
+            <a:pPr algn="l">
+              <a:spcBef>
+                <a:spcPts val="200"/>
+              </a:spcBef>
+            </a:pPr>
+            <a:r>
+              <a:rPr sz="1400" b="0">
+                <a:solidFill>
+                  <a:srgbClr val="1A202C"/>
+                </a:solidFill>
+                <a:latin typeface="Yu Gothic"/>
+              </a:rPr>
+              <a:t>データサイエンス（滋賀大学）× 臨床医学（滋賀医科大学）
+両大学の間でドメイン知識による橋渡しができる稀有なポジション</a:t>
+            </a:r>
+          </a:p>
+        </p:txBody>
+      </p:sp>
+      <p:sp>
+        <p:nvSpPr>
+          <p:cNvPr id="6" name="Rounded Rectangle 5"/>
           <p:cNvSpPr/>
           <p:nvPr/>
         </p:nvSpPr>
         <p:spPr>
           <a:xfrm>
-            <a:off x="731520" y="3657600"/>
-            <a:ext cx="63500" cy="1097280"/>
-          </a:xfrm>
-          <a:prstGeom prst="rect">
+            <a:off x="731520" y="5029200"/>
+            <a:ext cx="10515600" cy="1097280"/>
+          </a:xfrm>
+          <a:prstGeom prst="roundRect">
             <a:avLst/>
           </a:prstGeom>
           <a:solidFill>
-            <a:srgbClr val="276749"/>
+            <a:srgbClr val="EBF8FF"/>
           </a:solidFill>
-          <a:ln>
-            <a:noFill/>
+          <a:ln w="25400">
+            <a:solidFill>
+              <a:srgbClr val="2B6CB0"/>
+            </a:solidFill>
           </a:ln>
         </p:spPr>
         <p:style>
@@ -12651,10 +9933,40 @@
           </a:fontRef>
         </p:style>
         <p:txBody>
-          <a:bodyPr rtlCol="0" anchor="ctr"/>
-          <a:lstStyle/>
-          <a:p>
-            <a:pPr algn="ctr"/>
+          <a:bodyPr rtlCol="0" anchor="ctr" wrap="square" lIns="137160" rIns="137160" tIns="73152" bIns="73152"/>
+          <a:lstStyle/>
+          <a:p>
+            <a:pPr algn="l">
+              <a:spcBef>
+                <a:spcPts val="200"/>
+              </a:spcBef>
+            </a:pPr>
+            <a:r>
+              <a:rPr sz="1000" b="1">
+                <a:solidFill>
+                  <a:srgbClr val="2B6CB0"/>
+                </a:solidFill>
+                <a:latin typeface="Yu Gothic"/>
+              </a:rPr>
+              <a:t>倫理と研究加速</a:t>
+            </a:r>
+          </a:p>
+          <a:p>
+            <a:pPr algn="l">
+              <a:spcBef>
+                <a:spcPts val="200"/>
+              </a:spcBef>
+            </a:pPr>
+            <a:r>
+              <a:rPr sz="1400" b="0">
+                <a:solidFill>
+                  <a:srgbClr val="1A202C"/>
+                </a:solidFill>
+                <a:latin typeface="Yu Gothic"/>
+              </a:rPr>
+              <a:t>研究において倫理は再現性のパーツであるに過ぎないのに過大視されている。
+オープンデータを活用して研究を加速させるほうが生産的</a:t>
+            </a:r>
           </a:p>
         </p:txBody>
       </p:sp>
@@ -12666,8 +9978,8 @@
         </p:nvSpPr>
         <p:spPr>
           <a:xfrm>
-            <a:off x="960120" y="3730752"/>
-            <a:ext cx="10241280" cy="228600"/>
+            <a:off x="365760" y="6400800"/>
+            <a:ext cx="914400" cy="274320"/>
           </a:xfrm>
           <a:prstGeom prst="rect">
             <a:avLst/>
@@ -12680,253 +9992,14 @@
           </a:bodyPr>
           <a:lstStyle/>
           <a:p>
-            <a:pPr algn="l">
-              <a:defRPr sz="1000" b="1">
-                <a:solidFill>
-                  <a:srgbClr val="276749"/>
-                </a:solidFill>
-                <a:latin typeface="Yu Gothic"/>
-              </a:defRPr>
-            </a:pPr>
-            <a:r>
-              <a:t>通訳者としての役割</a:t>
-            </a:r>
-          </a:p>
-        </p:txBody>
-      </p:sp>
-      <p:sp>
-        <p:nvSpPr>
-          <p:cNvPr id="8" name="TextBox 7"/>
-          <p:cNvSpPr txBox="1"/>
-          <p:nvPr/>
-        </p:nvSpPr>
-        <p:spPr>
-          <a:xfrm>
-            <a:off x="960120" y="3931920"/>
-            <a:ext cx="10241280" cy="777240"/>
-          </a:xfrm>
-          <a:prstGeom prst="rect">
-            <a:avLst/>
-          </a:prstGeom>
-          <a:noFill/>
-        </p:spPr>
-        <p:txBody>
-          <a:bodyPr wrap="square">
-            <a:spAutoFit/>
-          </a:bodyPr>
-          <a:lstStyle/>
-          <a:p>
-            <a:pPr algn="l">
-              <a:defRPr sz="1500" b="0">
-                <a:solidFill>
-                  <a:srgbClr val="1A202C"/>
-                </a:solidFill>
-                <a:latin typeface="Yu Gothic"/>
-              </a:defRPr>
-            </a:pPr>
-            <a:r>
-              <a:t>データサイエンス（滋賀大学）× 臨床医学（滋賀医科大学）</a:t>
-            </a:r>
-            <a:br/>
-            <a:r>
-              <a:t>両大学の間でドメイン知識による橋渡しができる稀有なポジション</a:t>
-            </a:r>
-          </a:p>
-        </p:txBody>
-      </p:sp>
-      <p:sp>
-        <p:nvSpPr>
-          <p:cNvPr id="9" name="Rounded Rectangle 8"/>
-          <p:cNvSpPr/>
-          <p:nvPr/>
-        </p:nvSpPr>
-        <p:spPr>
-          <a:xfrm>
-            <a:off x="731520" y="5029200"/>
-            <a:ext cx="10515600" cy="1097280"/>
-          </a:xfrm>
-          <a:prstGeom prst="roundRect">
-            <a:avLst/>
-          </a:prstGeom>
-          <a:solidFill>
-            <a:srgbClr val="EBF8FF"/>
-          </a:solidFill>
-          <a:ln>
-            <a:noFill/>
-          </a:ln>
-        </p:spPr>
-        <p:style>
-          <a:lnRef idx="1">
-            <a:schemeClr val="accent1"/>
-          </a:lnRef>
-          <a:fillRef idx="3">
-            <a:schemeClr val="accent1"/>
-          </a:fillRef>
-          <a:effectRef idx="2">
-            <a:schemeClr val="accent1"/>
-          </a:effectRef>
-          <a:fontRef idx="minor">
-            <a:schemeClr val="lt1"/>
-          </a:fontRef>
-        </p:style>
-        <p:txBody>
-          <a:bodyPr rtlCol="0" anchor="ctr"/>
-          <a:lstStyle/>
-          <a:p>
-            <a:pPr algn="ctr"/>
-          </a:p>
-        </p:txBody>
-      </p:sp>
-      <p:sp>
-        <p:nvSpPr>
-          <p:cNvPr id="10" name="Rectangle 9"/>
-          <p:cNvSpPr/>
-          <p:nvPr/>
-        </p:nvSpPr>
-        <p:spPr>
-          <a:xfrm>
-            <a:off x="731520" y="5029200"/>
-            <a:ext cx="63500" cy="1097280"/>
-          </a:xfrm>
-          <a:prstGeom prst="rect">
-            <a:avLst/>
-          </a:prstGeom>
-          <a:solidFill>
-            <a:srgbClr val="2B6CB0"/>
-          </a:solidFill>
-          <a:ln>
-            <a:noFill/>
-          </a:ln>
-        </p:spPr>
-        <p:style>
-          <a:lnRef idx="1">
-            <a:schemeClr val="accent1"/>
-          </a:lnRef>
-          <a:fillRef idx="3">
-            <a:schemeClr val="accent1"/>
-          </a:fillRef>
-          <a:effectRef idx="2">
-            <a:schemeClr val="accent1"/>
-          </a:effectRef>
-          <a:fontRef idx="minor">
-            <a:schemeClr val="lt1"/>
-          </a:fontRef>
-        </p:style>
-        <p:txBody>
-          <a:bodyPr rtlCol="0" anchor="ctr"/>
-          <a:lstStyle/>
-          <a:p>
-            <a:pPr algn="ctr"/>
-          </a:p>
-        </p:txBody>
-      </p:sp>
-      <p:sp>
-        <p:nvSpPr>
-          <p:cNvPr id="11" name="TextBox 10"/>
-          <p:cNvSpPr txBox="1"/>
-          <p:nvPr/>
-        </p:nvSpPr>
-        <p:spPr>
-          <a:xfrm>
-            <a:off x="960120" y="5102352"/>
-            <a:ext cx="10241280" cy="228600"/>
-          </a:xfrm>
-          <a:prstGeom prst="rect">
-            <a:avLst/>
-          </a:prstGeom>
-          <a:noFill/>
-        </p:spPr>
-        <p:txBody>
-          <a:bodyPr wrap="square">
-            <a:spAutoFit/>
-          </a:bodyPr>
-          <a:lstStyle/>
-          <a:p>
-            <a:pPr algn="l">
-              <a:defRPr sz="1000" b="1">
-                <a:solidFill>
-                  <a:srgbClr val="2B6CB0"/>
-                </a:solidFill>
-                <a:latin typeface="Yu Gothic"/>
-              </a:defRPr>
-            </a:pPr>
-            <a:r>
-              <a:t>倫理と研究加速</a:t>
-            </a:r>
-          </a:p>
-        </p:txBody>
-      </p:sp>
-      <p:sp>
-        <p:nvSpPr>
-          <p:cNvPr id="12" name="TextBox 11"/>
-          <p:cNvSpPr txBox="1"/>
-          <p:nvPr/>
-        </p:nvSpPr>
-        <p:spPr>
-          <a:xfrm>
-            <a:off x="960120" y="5303520"/>
-            <a:ext cx="10241280" cy="777240"/>
-          </a:xfrm>
-          <a:prstGeom prst="rect">
-            <a:avLst/>
-          </a:prstGeom>
-          <a:noFill/>
-        </p:spPr>
-        <p:txBody>
-          <a:bodyPr wrap="square">
-            <a:spAutoFit/>
-          </a:bodyPr>
-          <a:lstStyle/>
-          <a:p>
-            <a:pPr algn="l">
-              <a:defRPr sz="1500" b="0">
-                <a:solidFill>
-                  <a:srgbClr val="1A202C"/>
-                </a:solidFill>
-                <a:latin typeface="Yu Gothic"/>
-              </a:defRPr>
-            </a:pPr>
-            <a:r>
-              <a:t>研究において倫理は再現性のパーツであるに過ぎないのに過大視されている。</a:t>
-            </a:r>
-            <a:br/>
-            <a:r>
-              <a:t>オープンデータを活用して研究を加速させるほうが生産的</a:t>
-            </a:r>
-          </a:p>
-        </p:txBody>
-      </p:sp>
-      <p:sp>
-        <p:nvSpPr>
-          <p:cNvPr id="13" name="TextBox 12"/>
-          <p:cNvSpPr txBox="1"/>
-          <p:nvPr/>
-        </p:nvSpPr>
-        <p:spPr>
-          <a:xfrm>
-            <a:off x="365760" y="6400800"/>
-            <a:ext cx="914400" cy="274320"/>
-          </a:xfrm>
-          <a:prstGeom prst="rect">
-            <a:avLst/>
-          </a:prstGeom>
-          <a:noFill/>
-        </p:spPr>
-        <p:txBody>
-          <a:bodyPr wrap="square">
-            <a:spAutoFit/>
-          </a:bodyPr>
-          <a:lstStyle/>
-          <a:p>
-            <a:pPr algn="l">
-              <a:defRPr sz="1000" b="0">
+            <a:pPr algn="l"/>
+            <a:r>
+              <a:rPr sz="1000" b="0">
                 <a:solidFill>
                   <a:srgbClr val="4A5568"/>
                 </a:solidFill>
                 <a:latin typeface="Yu Gothic"/>
-              </a:defRPr>
-            </a:pPr>
-            <a:r>
+              </a:rPr>
               <a:t>7 / 16</a:t>
             </a:r>
           </a:p>
@@ -12980,15 +10053,14 @@
           </a:bodyPr>
           <a:lstStyle/>
           <a:p>
-            <a:pPr algn="l">
-              <a:defRPr sz="3200" b="1">
+            <a:pPr algn="l"/>
+            <a:r>
+              <a:rPr sz="3200" b="1">
                 <a:solidFill>
                   <a:srgbClr val="1A365D"/>
                 </a:solidFill>
                 <a:latin typeface="Yu Gothic"/>
-              </a:defRPr>
-            </a:pPr>
-            <a:r>
+              </a:rPr>
               <a:t>Phase 4：起業・国際連携期</a:t>
             </a:r>
           </a:p>
@@ -13046,7 +10118,7 @@
         <p:spPr>
           <a:xfrm>
             <a:off x="731520" y="1188720"/>
-            <a:ext cx="10515600" cy="3200400"/>
+            <a:ext cx="10515600" cy="3474720"/>
           </a:xfrm>
           <a:prstGeom prst="rect">
             <a:avLst/>
@@ -13075,7 +10147,7 @@
               <a:t>4-1  </a:t>
             </a:r>
             <a:r>
-              <a:rPr sz="1600">
+              <a:rPr sz="1600" b="0">
                 <a:solidFill>
                   <a:srgbClr val="1A202C"/>
                 </a:solidFill>
@@ -13091,7 +10163,7 @@
               </a:spcBef>
             </a:pPr>
             <a:r>
-              <a:rPr sz="1200">
+              <a:rPr sz="1200" b="0">
                 <a:solidFill>
                   <a:srgbClr val="4A5568"/>
                 </a:solidFill>
@@ -13116,7 +10188,7 @@
               <a:t>4-2  </a:t>
             </a:r>
             <a:r>
-              <a:rPr sz="1600">
+              <a:rPr sz="1600" b="0">
                 <a:solidFill>
                   <a:srgbClr val="1A202C"/>
                 </a:solidFill>
@@ -13141,7 +10213,7 @@
               <a:t>4-3  </a:t>
             </a:r>
             <a:r>
-              <a:rPr sz="1600">
+              <a:rPr sz="1600" b="0">
                 <a:solidFill>
                   <a:srgbClr val="1A202C"/>
                 </a:solidFill>
@@ -13166,7 +10238,7 @@
               <a:t>4-4  </a:t>
             </a:r>
             <a:r>
-              <a:rPr sz="1600">
+              <a:rPr sz="1600" b="0">
                 <a:solidFill>
                   <a:srgbClr val="1A202C"/>
                 </a:solidFill>
@@ -13191,7 +10263,7 @@
               <a:t>4-5  </a:t>
             </a:r>
             <a:r>
-              <a:rPr sz="1600">
+              <a:rPr sz="1600" b="0">
                 <a:solidFill>
                   <a:srgbClr val="1A202C"/>
                 </a:solidFill>
@@ -13216,7 +10288,7 @@
               <a:t>4-6  </a:t>
             </a:r>
             <a:r>
-              <a:rPr sz="1600">
+              <a:rPr sz="1600" b="0">
                 <a:solidFill>
                   <a:srgbClr val="1A202C"/>
                 </a:solidFill>
@@ -13235,7 +10307,7 @@
         </p:nvSpPr>
         <p:spPr>
           <a:xfrm>
-            <a:off x="731520" y="4754880"/>
+            <a:off x="731520" y="5029200"/>
             <a:ext cx="10515600" cy="1097280"/>
           </a:xfrm>
           <a:prstGeom prst="roundRect">
@@ -13244,8 +10316,10 @@
           <a:solidFill>
             <a:srgbClr val="FED7D7"/>
           </a:solidFill>
-          <a:ln>
-            <a:noFill/>
+          <a:ln w="25400">
+            <a:solidFill>
+              <a:srgbClr val="9B2C2C"/>
+            </a:solidFill>
           </a:ln>
         </p:spPr>
         <p:style>
@@ -13263,66 +10337,53 @@
           </a:fontRef>
         </p:style>
         <p:txBody>
-          <a:bodyPr rtlCol="0" anchor="ctr"/>
-          <a:lstStyle/>
-          <a:p>
-            <a:pPr algn="ctr"/>
-          </a:p>
-        </p:txBody>
-      </p:sp>
-      <p:sp>
-        <p:nvSpPr>
-          <p:cNvPr id="6" name="Rectangle 5"/>
-          <p:cNvSpPr/>
-          <p:nvPr/>
-        </p:nvSpPr>
-        <p:spPr>
-          <a:xfrm>
-            <a:off x="731520" y="4754880"/>
-            <a:ext cx="63500" cy="1097280"/>
-          </a:xfrm>
-          <a:prstGeom prst="rect">
-            <a:avLst/>
-          </a:prstGeom>
-          <a:solidFill>
-            <a:srgbClr val="9B2C2C"/>
-          </a:solidFill>
-          <a:ln>
-            <a:noFill/>
-          </a:ln>
-        </p:spPr>
-        <p:style>
-          <a:lnRef idx="1">
-            <a:schemeClr val="accent1"/>
-          </a:lnRef>
-          <a:fillRef idx="3">
-            <a:schemeClr val="accent1"/>
-          </a:fillRef>
-          <a:effectRef idx="2">
-            <a:schemeClr val="accent1"/>
-          </a:effectRef>
-          <a:fontRef idx="minor">
-            <a:schemeClr val="lt1"/>
-          </a:fontRef>
-        </p:style>
-        <p:txBody>
-          <a:bodyPr rtlCol="0" anchor="ctr"/>
-          <a:lstStyle/>
-          <a:p>
-            <a:pPr algn="ctr"/>
-          </a:p>
-        </p:txBody>
-      </p:sp>
-      <p:sp>
-        <p:nvSpPr>
-          <p:cNvPr id="7" name="TextBox 6"/>
+          <a:bodyPr rtlCol="0" anchor="ctr" wrap="square" lIns="137160" rIns="137160" tIns="73152" bIns="73152"/>
+          <a:lstStyle/>
+          <a:p>
+            <a:pPr algn="l">
+              <a:spcBef>
+                <a:spcPts val="200"/>
+              </a:spcBef>
+            </a:pPr>
+            <a:r>
+              <a:rPr sz="1000" b="1">
+                <a:solidFill>
+                  <a:srgbClr val="9B2C2C"/>
+                </a:solidFill>
+                <a:latin typeface="Yu Gothic"/>
+              </a:rPr>
+              <a:t>教訓</a:t>
+            </a:r>
+          </a:p>
+          <a:p>
+            <a:pPr algn="l">
+              <a:spcBef>
+                <a:spcPts val="200"/>
+              </a:spcBef>
+            </a:pPr>
+            <a:r>
+              <a:rPr sz="1400" b="0">
+                <a:solidFill>
+                  <a:srgbClr val="1A202C"/>
+                </a:solidFill>
+                <a:latin typeface="Yu Gothic"/>
+              </a:rPr>
+              <a:t>国際連携は相手側の事務能力に大きく依存する。国内でのネットワーク構築は成果として残る。
+倫理審査の未了は共同研究における予測困難なリスク。</a:t>
+            </a:r>
+          </a:p>
+        </p:txBody>
+      </p:sp>
+      <p:sp>
+        <p:nvSpPr>
+          <p:cNvPr id="6" name="TextBox 5"/>
           <p:cNvSpPr txBox="1"/>
           <p:nvPr/>
         </p:nvSpPr>
         <p:spPr>
           <a:xfrm>
-            <a:off x="960120" y="4828032"/>
-            <a:ext cx="10241280" cy="228600"/>
+            <a:off x="365760" y="6400800"/>
+            <a:ext cx="914400" cy="274320"/>
           </a:xfrm>
           <a:prstGeom prst="rect">
             <a:avLst/>
@@ -13335,91 +10396,14 @@
           </a:bodyPr>
           <a:lstStyle/>
           <a:p>
-            <a:pPr algn="l">
-              <a:defRPr sz="1000" b="1">
-                <a:solidFill>
-                  <a:srgbClr val="9B2C2C"/>
-                </a:solidFill>
-                <a:latin typeface="Yu Gothic"/>
-              </a:defRPr>
-            </a:pPr>
-            <a:r>
-              <a:t>教訓</a:t>
-            </a:r>
-          </a:p>
-        </p:txBody>
-      </p:sp>
-      <p:sp>
-        <p:nvSpPr>
-          <p:cNvPr id="8" name="TextBox 7"/>
-          <p:cNvSpPr txBox="1"/>
-          <p:nvPr/>
-        </p:nvSpPr>
-        <p:spPr>
-          <a:xfrm>
-            <a:off x="960120" y="5029200"/>
-            <a:ext cx="10241280" cy="777240"/>
-          </a:xfrm>
-          <a:prstGeom prst="rect">
-            <a:avLst/>
-          </a:prstGeom>
-          <a:noFill/>
-        </p:spPr>
-        <p:txBody>
-          <a:bodyPr wrap="square">
-            <a:spAutoFit/>
-          </a:bodyPr>
-          <a:lstStyle/>
-          <a:p>
-            <a:pPr algn="l">
-              <a:defRPr sz="1500" b="0">
-                <a:solidFill>
-                  <a:srgbClr val="1A202C"/>
-                </a:solidFill>
-                <a:latin typeface="Yu Gothic"/>
-              </a:defRPr>
-            </a:pPr>
-            <a:r>
-              <a:t>国際連携は相手側の事務能力に大きく依存する。国内でのネットワーク構築は成果として残る。</a:t>
-            </a:r>
-            <a:br/>
-            <a:r>
-              <a:t>倫理審査の未了は共同研究における予測困難なリスク。</a:t>
-            </a:r>
-          </a:p>
-        </p:txBody>
-      </p:sp>
-      <p:sp>
-        <p:nvSpPr>
-          <p:cNvPr id="9" name="TextBox 8"/>
-          <p:cNvSpPr txBox="1"/>
-          <p:nvPr/>
-        </p:nvSpPr>
-        <p:spPr>
-          <a:xfrm>
-            <a:off x="365760" y="6400800"/>
-            <a:ext cx="914400" cy="274320"/>
-          </a:xfrm>
-          <a:prstGeom prst="rect">
-            <a:avLst/>
-          </a:prstGeom>
-          <a:noFill/>
-        </p:spPr>
-        <p:txBody>
-          <a:bodyPr wrap="square">
-            <a:spAutoFit/>
-          </a:bodyPr>
-          <a:lstStyle/>
-          <a:p>
-            <a:pPr algn="l">
-              <a:defRPr sz="1000" b="0">
+            <a:pPr algn="l"/>
+            <a:r>
+              <a:rPr sz="1000" b="0">
                 <a:solidFill>
                   <a:srgbClr val="4A5568"/>
                 </a:solidFill>
                 <a:latin typeface="Yu Gothic"/>
-              </a:defRPr>
-            </a:pPr>
-            <a:r>
+              </a:rPr>
               <a:t>8 / 16</a:t>
             </a:r>
           </a:p>
@@ -13473,15 +10457,14 @@
           </a:bodyPr>
           <a:lstStyle/>
           <a:p>
-            <a:pPr algn="l">
-              <a:defRPr sz="3200" b="1">
+            <a:pPr algn="l"/>
+            <a:r>
+              <a:rPr sz="3200" b="1">
                 <a:solidFill>
                   <a:srgbClr val="1A365D"/>
                 </a:solidFill>
                 <a:latin typeface="Yu Gothic"/>
-              </a:defRPr>
-            </a:pPr>
-            <a:r>
+              </a:rPr>
               <a:t>Phase 5：データサイエンティスト期（現在）</a:t>
             </a:r>
           </a:p>
@@ -13568,7 +10551,7 @@
               <a:t>5-1  </a:t>
             </a:r>
             <a:r>
-              <a:rPr sz="1600">
+              <a:rPr sz="1600" b="0">
                 <a:solidFill>
                   <a:srgbClr val="1A202C"/>
                 </a:solidFill>
@@ -13593,7 +10576,7 @@
               <a:t>5-2  </a:t>
             </a:r>
             <a:r>
-              <a:rPr sz="1600">
+              <a:rPr sz="1600" b="0">
                 <a:solidFill>
                   <a:srgbClr val="1A202C"/>
                 </a:solidFill>
@@ -13618,7 +10601,7 @@
               <a:t>5-3  </a:t>
             </a:r>
             <a:r>
-              <a:rPr sz="1600">
+              <a:rPr sz="1600" b="0">
                 <a:solidFill>
                   <a:srgbClr val="1A202C"/>
                 </a:solidFill>
@@ -13643,7 +10626,7 @@
               <a:t>5-4  </a:t>
             </a:r>
             <a:r>
-              <a:rPr sz="1600">
+              <a:rPr sz="1600" b="0">
                 <a:solidFill>
                   <a:srgbClr val="1A202C"/>
                 </a:solidFill>
@@ -13668,7 +10651,7 @@
               <a:t>5-5  </a:t>
             </a:r>
             <a:r>
-              <a:rPr sz="1600">
+              <a:rPr sz="1600" b="0">
                 <a:solidFill>
                   <a:srgbClr val="1A202C"/>
                 </a:solidFill>
@@ -13701,15 +10684,14 @@
           </a:bodyPr>
           <a:lstStyle/>
           <a:p>
-            <a:pPr algn="l">
-              <a:defRPr sz="1000" b="0">
+            <a:pPr algn="l"/>
+            <a:r>
+              <a:rPr sz="1000" b="0">
                 <a:solidFill>
                   <a:srgbClr val="4A5568"/>
                 </a:solidFill>
                 <a:latin typeface="Yu Gothic"/>
-              </a:defRPr>
-            </a:pPr>
-            <a:r>
+              </a:rPr>
               <a:t>9 / 16</a:t>
             </a:r>
           </a:p>
